--- a/presentations/01_دوره_مقدماتی_گلف.pptx
+++ b/presentations/01_دوره_مقدماتی_گلف.pptx
@@ -1,6 +1,6 @@
 
 <file path=ppt/presentation.xml><?xml version="1.0" encoding="utf-8"?>
-<p:presentation xmlns:a="http://schemas.openxmlformats.org/drawingml/2006/main" xmlns:r="http://schemas.openxmlformats.org/officeDocument/2006/relationships" xmlns:p="http://schemas.openxmlformats.org/presentationml/2006/main" saveSubsetFonts="1" autoCompressPictures="0">
+<p:presentation xmlns:a="http://schemas.openxmlformats.org/drawingml/2006/main" xmlns:r="http://schemas.openxmlformats.org/officeDocument/2006/relationships" xmlns:p="http://schemas.openxmlformats.org/presentationml/2006/main" saveSubsetFonts="1" autoCompressPictures="0" embedTrueTypeFonts="1">
   <p:sldMasterIdLst>
     <p:sldMasterId id="2147483648" r:id="rId1"/>
   </p:sldMasterIdLst>
@@ -36,6 +36,13 @@
   </p:sldIdLst>
   <p:sldSz cx="12191695" cy="6858000" type="screen4x3"/>
   <p:notesSz cx="6858000" cy="9144000"/>
+  <p:embeddedFontLst>
+    <p:embeddedFont>
+      <p:font typeface="Vazirmatn" charset="178" pitchFamily="34"/>
+      <p:regular r:id="rId35"/>
+      <p:bold r:id="rId36"/>
+    </p:embeddedFont>
+  </p:embeddedFontLst>
   <p:defaultTextStyle>
     <a:defPPr>
       <a:defRPr lang="en-US"/>
@@ -3327,8 +3334,125 @@
         </p:nvSpPr>
         <p:spPr>
           <a:xfrm>
-            <a:off x="914400" y="4069080"/>
-            <a:ext cx="10362895" cy="2377440"/>
+            <a:off x="640080" y="457200"/>
+            <a:ext cx="4572000" cy="868680"/>
+          </a:xfrm>
+          <a:prstGeom prst="rect">
+            <a:avLst/>
+          </a:prstGeom>
+          <a:noFill/>
+        </p:spPr>
+        <p:txBody>
+          <a:bodyPr wrap="square" anchor="t" lIns="0" rIns="0" tIns="0" bIns="0">
+            <a:spAutoFit/>
+          </a:bodyPr>
+          <a:lstStyle/>
+          <a:p>
+            <a:pPr algn="l" rtl="1">
+              <a:lnSpc>
+                <a:spcPct val="108000"/>
+              </a:lnSpc>
+              <a:spcBef>
+                <a:spcPts val="0"/>
+              </a:spcBef>
+              <a:spcAft>
+                <a:spcPts val="0"/>
+              </a:spcAft>
+            </a:pPr>
+            <a:r>
+              <a:rPr sz="3000" b="1" i="0">
+                <a:solidFill>
+                  <a:srgbClr val="FFFFFF"/>
+                </a:solidFill>
+                <a:latin typeface="Vazirmatn"/>
+                <a:cs typeface="Vazirmatn"/>
+              </a:rPr>
+              <a:t>Puttclub</a:t>
+            </a:r>
+          </a:p>
+          <a:p>
+            <a:pPr algn="l" rtl="1">
+              <a:lnSpc>
+                <a:spcPct val="108000"/>
+              </a:lnSpc>
+              <a:spcBef>
+                <a:spcPts val="0"/>
+              </a:spcBef>
+              <a:spcAft>
+                <a:spcPts val="0"/>
+              </a:spcAft>
+            </a:pPr>
+            <a:r>
+              <a:rPr sz="1250" b="0" i="0">
+                <a:solidFill>
+                  <a:srgbClr val="D7E2D6"/>
+                </a:solidFill>
+                <a:latin typeface="Vazirmatn"/>
+                <a:cs typeface="Vazirmatn"/>
+              </a:rPr>
+              <a:t>آکادمی گلف پات‌کلاب  ·  الهام طالبی</a:t>
+            </a:r>
+          </a:p>
+        </p:txBody>
+      </p:sp>
+      <p:sp>
+        <p:nvSpPr>
+          <p:cNvPr id="8" name="Rounded Rectangle 7"/>
+          <p:cNvSpPr/>
+          <p:nvPr/>
+        </p:nvSpPr>
+        <p:spPr>
+          <a:xfrm>
+            <a:off x="8031175" y="502920"/>
+            <a:ext cx="3520440" cy="841248"/>
+          </a:xfrm>
+          <a:prstGeom prst="roundRect">
+            <a:avLst>
+              <a:gd name="adj" fmla="val 6000"/>
+            </a:avLst>
+          </a:prstGeom>
+          <a:solidFill>
+            <a:srgbClr val="FFFFFF">
+              <a:alpha val="120"/>
+            </a:srgbClr>
+          </a:solidFill>
+          <a:ln>
+            <a:noFill/>
+          </a:ln>
+          <a:effectLst/>
+        </p:spPr>
+        <p:style>
+          <a:lnRef idx="1">
+            <a:schemeClr val="accent1"/>
+          </a:lnRef>
+          <a:fillRef idx="3">
+            <a:schemeClr val="accent1"/>
+          </a:fillRef>
+          <a:effectRef idx="2">
+            <a:schemeClr val="accent1"/>
+          </a:effectRef>
+          <a:fontRef idx="minor">
+            <a:schemeClr val="lt1"/>
+          </a:fontRef>
+        </p:style>
+        <p:txBody>
+          <a:bodyPr rtlCol="0" anchor="ctr"/>
+          <a:lstStyle/>
+          <a:p>
+            <a:pPr algn="ctr"/>
+          </a:p>
+        </p:txBody>
+      </p:sp>
+      <p:sp>
+        <p:nvSpPr>
+          <p:cNvPr id="9" name="TextBox 8"/>
+          <p:cNvSpPr txBox="1"/>
+          <p:nvPr/>
+        </p:nvSpPr>
+        <p:spPr>
+          <a:xfrm>
+            <a:off x="8031175" y="548640"/>
+            <a:ext cx="3520440" cy="749808"/>
           </a:xfrm>
           <a:prstGeom prst="rect">
             <a:avLst/>
@@ -3341,7 +3465,7 @@
           </a:bodyPr>
           <a:lstStyle/>
           <a:p>
-            <a:pPr algn="r" rtl="1">
+            <a:pPr algn="ctr" rtl="1">
               <a:lnSpc>
                 <a:spcPct val="108000"/>
               </a:lnSpc>
@@ -3349,177 +3473,55 @@
                 <a:spcPts val="0"/>
               </a:spcBef>
               <a:spcAft>
-                <a:spcPts val="600"/>
-              </a:spcAft>
-            </a:pPr>
-            <a:r>
-              <a:rPr sz="1700" b="1" i="0">
+                <a:spcPts val="100"/>
+              </a:spcAft>
+            </a:pPr>
+            <a:r>
+              <a:rPr sz="1450" b="1" i="0">
+                <a:solidFill>
+                  <a:srgbClr val="FFFFFF"/>
+                </a:solidFill>
+                <a:latin typeface="Vazirmatn"/>
+                <a:cs typeface="Vazirmatn"/>
+              </a:rPr>
+              <a:t>مدرس: الهام طالبی</a:t>
+            </a:r>
+          </a:p>
+          <a:p>
+            <a:pPr algn="ctr" rtl="1">
+              <a:lnSpc>
+                <a:spcPct val="108000"/>
+              </a:lnSpc>
+              <a:spcBef>
+                <a:spcPts val="0"/>
+              </a:spcBef>
+              <a:spcAft>
+                <a:spcPts val="0"/>
+              </a:spcAft>
+            </a:pPr>
+            <a:r>
+              <a:rPr sz="1100" b="0" i="0">
                 <a:solidFill>
                   <a:srgbClr val="9CCC65"/>
                 </a:solidFill>
-                <a:latin typeface="Tahoma"/>
-                <a:cs typeface="Tahoma"/>
-              </a:rPr>
-              <a:t>آکادمی حرفه‌ای گلف  |  سطح ۱</a:t>
-            </a:r>
-          </a:p>
-          <a:p>
-            <a:pPr algn="r" rtl="1">
-              <a:lnSpc>
-                <a:spcPct val="108000"/>
-              </a:lnSpc>
-              <a:spcBef>
-                <a:spcPts val="0"/>
-              </a:spcBef>
-              <a:spcAft>
-                <a:spcPts val="600"/>
-              </a:spcAft>
-            </a:pPr>
-            <a:r>
-              <a:rPr sz="4600" b="1" i="0">
-                <a:solidFill>
-                  <a:srgbClr val="FFFFFF"/>
-                </a:solidFill>
-                <a:latin typeface="Tahoma"/>
-                <a:cs typeface="Tahoma"/>
-              </a:rPr>
-              <a:t>دوره مقدماتی آموزش گلف</a:t>
-            </a:r>
-          </a:p>
-          <a:p>
-            <a:pPr algn="r" rtl="1">
-              <a:lnSpc>
-                <a:spcPct val="108000"/>
-              </a:lnSpc>
-              <a:spcBef>
-                <a:spcPts val="0"/>
-              </a:spcBef>
-              <a:spcAft>
-                <a:spcPts val="1400"/>
-              </a:spcAft>
-            </a:pPr>
-            <a:r>
-              <a:rPr sz="2000" b="0" i="0">
-                <a:solidFill>
-                  <a:srgbClr val="D7E2D6"/>
-                </a:solidFill>
-                <a:latin typeface="Tahoma"/>
-                <a:cs typeface="Tahoma"/>
-              </a:rPr>
-              <a:t>آشنایی، اصول پایه و ساخت تکنیک صحیح</a:t>
-            </a:r>
-          </a:p>
-          <a:p>
-            <a:pPr algn="r" rtl="1">
-              <a:lnSpc>
-                <a:spcPct val="108000"/>
-              </a:lnSpc>
-              <a:spcBef>
-                <a:spcPts val="0"/>
-              </a:spcBef>
-              <a:spcAft>
-                <a:spcPts val="300"/>
-              </a:spcAft>
-            </a:pPr>
-            <a:r>
-              <a:rPr sz="1100" b="1" i="0">
-                <a:solidFill>
-                  <a:srgbClr val="9CCC65"/>
-                </a:solidFill>
-                <a:latin typeface="Tahoma"/>
-                <a:cs typeface="Tahoma"/>
-              </a:rPr>
-              <a:t>●  </a:t>
-            </a:r>
-            <a:r>
-              <a:rPr sz="1450" b="0" i="0">
-                <a:solidFill>
-                  <a:srgbClr val="C9D6C8"/>
-                </a:solidFill>
-                <a:latin typeface="Tahoma"/>
-                <a:cs typeface="Tahoma"/>
-              </a:rPr>
-              <a:t>مخاطب: بازیکنان مبتدی و تازه‌واردان به گلف</a:t>
-            </a:r>
-          </a:p>
-          <a:p>
-            <a:pPr algn="r" rtl="1">
-              <a:lnSpc>
-                <a:spcPct val="108000"/>
-              </a:lnSpc>
-              <a:spcBef>
-                <a:spcPts val="0"/>
-              </a:spcBef>
-              <a:spcAft>
-                <a:spcPts val="300"/>
-              </a:spcAft>
-            </a:pPr>
-            <a:r>
-              <a:rPr sz="1100" b="1" i="0">
-                <a:solidFill>
-                  <a:srgbClr val="9CCC65"/>
-                </a:solidFill>
-                <a:latin typeface="Tahoma"/>
-                <a:cs typeface="Tahoma"/>
-              </a:rPr>
-              <a:t>●  </a:t>
-            </a:r>
-            <a:r>
-              <a:rPr sz="1450" b="0" i="0">
-                <a:solidFill>
-                  <a:srgbClr val="C9D6C8"/>
-                </a:solidFill>
-                <a:latin typeface="Tahoma"/>
-                <a:cs typeface="Tahoma"/>
-              </a:rPr>
-              <a:t>هدف: اجرای ضربات پایه با اصول صحیح</a:t>
-            </a:r>
-          </a:p>
-          <a:p>
-            <a:pPr algn="r" rtl="1">
-              <a:lnSpc>
-                <a:spcPct val="108000"/>
-              </a:lnSpc>
-              <a:spcBef>
-                <a:spcPts val="0"/>
-              </a:spcBef>
-              <a:spcAft>
-                <a:spcPts val="300"/>
-              </a:spcAft>
-            </a:pPr>
-            <a:r>
-              <a:rPr sz="1100" b="1" i="0">
-                <a:solidFill>
-                  <a:srgbClr val="9CCC65"/>
-                </a:solidFill>
-                <a:latin typeface="Tahoma"/>
-                <a:cs typeface="Tahoma"/>
-              </a:rPr>
-              <a:t>●  </a:t>
-            </a:r>
-            <a:r>
-              <a:rPr sz="1450" b="0" i="0">
-                <a:solidFill>
-                  <a:srgbClr val="C9D6C8"/>
-                </a:solidFill>
-                <a:latin typeface="Tahoma"/>
-                <a:cs typeface="Tahoma"/>
-              </a:rPr>
-              <a:t>۲۲ فصل آموزشی  ·  ۱۰ جلسه عملی  ·  آزمون پایان دوره</a:t>
-            </a:r>
-          </a:p>
-        </p:txBody>
-      </p:sp>
-      <p:sp>
-        <p:nvSpPr>
-          <p:cNvPr id="8" name="TextBox 7"/>
+                <a:latin typeface="Vazirmatn"/>
+                <a:cs typeface="Vazirmatn"/>
+              </a:rPr>
+              <a:t>مدرس درجه یک گلف ایران</a:t>
+            </a:r>
+          </a:p>
+        </p:txBody>
+      </p:sp>
+      <p:sp>
+        <p:nvSpPr>
+          <p:cNvPr id="10" name="TextBox 9"/>
           <p:cNvSpPr txBox="1"/>
           <p:nvPr/>
         </p:nvSpPr>
         <p:spPr>
           <a:xfrm>
-            <a:off x="502920" y="6400800"/>
-            <a:ext cx="5486400" cy="320040"/>
+            <a:off x="914400" y="4069080"/>
+            <a:ext cx="10362895" cy="2377440"/>
           </a:xfrm>
           <a:prstGeom prst="rect">
             <a:avLst/>
@@ -3532,7 +3534,7 @@
           </a:bodyPr>
           <a:lstStyle/>
           <a:p>
-            <a:pPr algn="l" rtl="1">
+            <a:pPr algn="r" rtl="1">
               <a:lnSpc>
                 <a:spcPct val="108000"/>
               </a:lnSpc>
@@ -3540,32 +3542,177 @@
                 <a:spcPts val="0"/>
               </a:spcBef>
               <a:spcAft>
-                <a:spcPts val="0"/>
-              </a:spcAft>
-            </a:pPr>
-            <a:r>
-              <a:rPr sz="1000" b="0" i="0">
+                <a:spcPts val="600"/>
+              </a:spcAft>
+            </a:pPr>
+            <a:r>
+              <a:rPr sz="1700" b="1" i="0">
+                <a:solidFill>
+                  <a:srgbClr val="9CCC65"/>
+                </a:solidFill>
+                <a:latin typeface="Vazirmatn"/>
+                <a:cs typeface="Vazirmatn"/>
+              </a:rPr>
+              <a:t>Puttclub  |  آکادمی گلف پات‌کلاب  |  سطح ۱</a:t>
+            </a:r>
+          </a:p>
+          <a:p>
+            <a:pPr algn="r" rtl="1">
+              <a:lnSpc>
+                <a:spcPct val="108000"/>
+              </a:lnSpc>
+              <a:spcBef>
+                <a:spcPts val="0"/>
+              </a:spcBef>
+              <a:spcAft>
+                <a:spcPts val="600"/>
+              </a:spcAft>
+            </a:pPr>
+            <a:r>
+              <a:rPr sz="4600" b="1" i="0">
                 <a:solidFill>
                   <a:srgbClr val="FFFFFF"/>
                 </a:solidFill>
-                <a:latin typeface="Tahoma"/>
-                <a:cs typeface="Tahoma"/>
-              </a:rPr>
-              <a:t>Golf Academy  ·  Beginner · Level 1</a:t>
-            </a:r>
-          </a:p>
-        </p:txBody>
-      </p:sp>
-      <p:sp>
-        <p:nvSpPr>
-          <p:cNvPr id="9" name="TextBox 8"/>
+                <a:latin typeface="Vazirmatn"/>
+                <a:cs typeface="Vazirmatn"/>
+              </a:rPr>
+              <a:t>دوره مقدماتی آموزش گلف</a:t>
+            </a:r>
+          </a:p>
+          <a:p>
+            <a:pPr algn="r" rtl="1">
+              <a:lnSpc>
+                <a:spcPct val="108000"/>
+              </a:lnSpc>
+              <a:spcBef>
+                <a:spcPts val="0"/>
+              </a:spcBef>
+              <a:spcAft>
+                <a:spcPts val="1400"/>
+              </a:spcAft>
+            </a:pPr>
+            <a:r>
+              <a:rPr sz="2000" b="0" i="0">
+                <a:solidFill>
+                  <a:srgbClr val="D7E2D6"/>
+                </a:solidFill>
+                <a:latin typeface="Vazirmatn"/>
+                <a:cs typeface="Vazirmatn"/>
+              </a:rPr>
+              <a:t>آشنایی، اصول پایه و ساخت تکنیک صحیح</a:t>
+            </a:r>
+          </a:p>
+          <a:p>
+            <a:pPr algn="r" rtl="1">
+              <a:lnSpc>
+                <a:spcPct val="108000"/>
+              </a:lnSpc>
+              <a:spcBef>
+                <a:spcPts val="0"/>
+              </a:spcBef>
+              <a:spcAft>
+                <a:spcPts val="300"/>
+              </a:spcAft>
+            </a:pPr>
+            <a:r>
+              <a:rPr sz="1100" b="1" i="0">
+                <a:solidFill>
+                  <a:srgbClr val="9CCC65"/>
+                </a:solidFill>
+                <a:latin typeface="Vazirmatn"/>
+                <a:cs typeface="Vazirmatn"/>
+              </a:rPr>
+              <a:t>●  </a:t>
+            </a:r>
+            <a:r>
+              <a:rPr sz="1450" b="0" i="0">
+                <a:solidFill>
+                  <a:srgbClr val="C9D6C8"/>
+                </a:solidFill>
+                <a:latin typeface="Vazirmatn"/>
+                <a:cs typeface="Vazirmatn"/>
+              </a:rPr>
+              <a:t>مخاطب: بازیکنان مبتدی و تازه‌واردان به گلف</a:t>
+            </a:r>
+          </a:p>
+          <a:p>
+            <a:pPr algn="r" rtl="1">
+              <a:lnSpc>
+                <a:spcPct val="108000"/>
+              </a:lnSpc>
+              <a:spcBef>
+                <a:spcPts val="0"/>
+              </a:spcBef>
+              <a:spcAft>
+                <a:spcPts val="300"/>
+              </a:spcAft>
+            </a:pPr>
+            <a:r>
+              <a:rPr sz="1100" b="1" i="0">
+                <a:solidFill>
+                  <a:srgbClr val="9CCC65"/>
+                </a:solidFill>
+                <a:latin typeface="Vazirmatn"/>
+                <a:cs typeface="Vazirmatn"/>
+              </a:rPr>
+              <a:t>●  </a:t>
+            </a:r>
+            <a:r>
+              <a:rPr sz="1450" b="0" i="0">
+                <a:solidFill>
+                  <a:srgbClr val="C9D6C8"/>
+                </a:solidFill>
+                <a:latin typeface="Vazirmatn"/>
+                <a:cs typeface="Vazirmatn"/>
+              </a:rPr>
+              <a:t>هدف: اجرای ضربات پایه با اصول صحیح</a:t>
+            </a:r>
+          </a:p>
+          <a:p>
+            <a:pPr algn="r" rtl="1">
+              <a:lnSpc>
+                <a:spcPct val="108000"/>
+              </a:lnSpc>
+              <a:spcBef>
+                <a:spcPts val="0"/>
+              </a:spcBef>
+              <a:spcAft>
+                <a:spcPts val="300"/>
+              </a:spcAft>
+            </a:pPr>
+            <a:r>
+              <a:rPr sz="1100" b="1" i="0">
+                <a:solidFill>
+                  <a:srgbClr val="9CCC65"/>
+                </a:solidFill>
+                <a:latin typeface="Vazirmatn"/>
+                <a:cs typeface="Vazirmatn"/>
+              </a:rPr>
+              <a:t>●  </a:t>
+            </a:r>
+            <a:r>
+              <a:rPr sz="1450" b="0" i="0">
+                <a:solidFill>
+                  <a:srgbClr val="C9D6C8"/>
+                </a:solidFill>
+                <a:latin typeface="Vazirmatn"/>
+                <a:cs typeface="Vazirmatn"/>
+              </a:rPr>
+              <a:t>۲۲ فصل آموزشی  ·  ۱۰ جلسه عملی  ·  آزمون پایان دوره</a:t>
+            </a:r>
+          </a:p>
+        </p:txBody>
+      </p:sp>
+      <p:sp>
+        <p:nvSpPr>
+          <p:cNvPr id="11" name="TextBox 10"/>
           <p:cNvSpPr txBox="1"/>
           <p:nvPr/>
         </p:nvSpPr>
         <p:spPr>
           <a:xfrm>
-            <a:off x="10180015" y="6400800"/>
-            <a:ext cx="1463040" cy="320040"/>
+            <a:off x="502920" y="6400800"/>
+            <a:ext cx="6858000" cy="320040"/>
           </a:xfrm>
           <a:prstGeom prst="rect">
             <a:avLst/>
@@ -3594,8 +3741,64 @@
                 <a:solidFill>
                   <a:srgbClr val="9CCC65"/>
                 </a:solidFill>
-                <a:latin typeface="Tahoma"/>
-                <a:cs typeface="Tahoma"/>
+                <a:latin typeface="Vazirmatn"/>
+                <a:cs typeface="Vazirmatn"/>
+              </a:rPr>
+              <a:t>⛳ Puttclub</a:t>
+            </a:r>
+            <a:r>
+              <a:rPr sz="1000" b="0" i="0">
+                <a:solidFill>
+                  <a:srgbClr val="FFFFFF"/>
+                </a:solidFill>
+                <a:latin typeface="Vazirmatn"/>
+                <a:cs typeface="Vazirmatn"/>
+              </a:rPr>
+              <a:t>   ·   Beginner · Level 1</a:t>
+            </a:r>
+          </a:p>
+        </p:txBody>
+      </p:sp>
+      <p:sp>
+        <p:nvSpPr>
+          <p:cNvPr id="12" name="TextBox 11"/>
+          <p:cNvSpPr txBox="1"/>
+          <p:nvPr/>
+        </p:nvSpPr>
+        <p:spPr>
+          <a:xfrm>
+            <a:off x="10180015" y="6400800"/>
+            <a:ext cx="1463040" cy="320040"/>
+          </a:xfrm>
+          <a:prstGeom prst="rect">
+            <a:avLst/>
+          </a:prstGeom>
+          <a:noFill/>
+        </p:spPr>
+        <p:txBody>
+          <a:bodyPr wrap="square" anchor="ctr" lIns="0" rIns="0" tIns="0" bIns="0">
+            <a:spAutoFit/>
+          </a:bodyPr>
+          <a:lstStyle/>
+          <a:p>
+            <a:pPr algn="l" rtl="1">
+              <a:lnSpc>
+                <a:spcPct val="108000"/>
+              </a:lnSpc>
+              <a:spcBef>
+                <a:spcPts val="0"/>
+              </a:spcBef>
+              <a:spcAft>
+                <a:spcPts val="0"/>
+              </a:spcAft>
+            </a:pPr>
+            <a:r>
+              <a:rPr sz="1100" b="1" i="0">
+                <a:solidFill>
+                  <a:srgbClr val="9CCC65"/>
+                </a:solidFill>
+                <a:latin typeface="Vazirmatn"/>
+                <a:cs typeface="Vazirmatn"/>
               </a:rPr>
               <a:t>1</a:t>
             </a:r>
@@ -3746,8 +3949,8 @@
                 <a:solidFill>
                   <a:srgbClr val="2E7D32"/>
                 </a:solidFill>
-                <a:latin typeface="Tahoma"/>
-                <a:cs typeface="Tahoma"/>
+                <a:latin typeface="Vazirmatn"/>
+                <a:cs typeface="Vazirmatn"/>
               </a:rPr>
               <a:t>فصل هفتم</a:t>
             </a:r>
@@ -3769,8 +3972,8 @@
                 <a:solidFill>
                   <a:srgbClr val="1F2A24"/>
                 </a:solidFill>
-                <a:latin typeface="Tahoma"/>
-                <a:cs typeface="Tahoma"/>
+                <a:latin typeface="Vazirmatn"/>
+                <a:cs typeface="Vazirmatn"/>
               </a:rPr>
               <a:t>وضعیت بدن در Address (Posture)</a:t>
             </a:r>
@@ -3957,8 +4160,8 @@
                 <a:solidFill>
                   <a:srgbClr val="FFFFFF"/>
                 </a:solidFill>
-                <a:latin typeface="Tahoma"/>
-                <a:cs typeface="Tahoma"/>
+                <a:latin typeface="Vazirmatn"/>
+                <a:cs typeface="Vazirmatn"/>
               </a:rPr>
               <a:t>1</a:t>
             </a:r>
@@ -4003,8 +4206,8 @@
                 <a:solidFill>
                   <a:srgbClr val="1F2A24"/>
                 </a:solidFill>
-                <a:latin typeface="Tahoma"/>
-                <a:cs typeface="Tahoma"/>
+                <a:latin typeface="Vazirmatn"/>
+                <a:cs typeface="Vazirmatn"/>
               </a:rPr>
               <a:t>۱</a:t>
             </a:r>
@@ -4026,8 +4229,8 @@
                 <a:solidFill>
                   <a:srgbClr val="5C6B62"/>
                 </a:solidFill>
-                <a:latin typeface="Tahoma"/>
-                <a:cs typeface="Tahoma"/>
+                <a:latin typeface="Vazirmatn"/>
+                <a:cs typeface="Vazirmatn"/>
               </a:rPr>
               <a:t>صاف بایستید</a:t>
             </a:r>
@@ -4170,8 +4373,8 @@
                 <a:solidFill>
                   <a:srgbClr val="FFFFFF"/>
                 </a:solidFill>
-                <a:latin typeface="Tahoma"/>
-                <a:cs typeface="Tahoma"/>
+                <a:latin typeface="Vazirmatn"/>
+                <a:cs typeface="Vazirmatn"/>
               </a:rPr>
               <a:t>2</a:t>
             </a:r>
@@ -4216,8 +4419,8 @@
                 <a:solidFill>
                   <a:srgbClr val="1F2A24"/>
                 </a:solidFill>
-                <a:latin typeface="Tahoma"/>
-                <a:cs typeface="Tahoma"/>
+                <a:latin typeface="Vazirmatn"/>
+                <a:cs typeface="Vazirmatn"/>
               </a:rPr>
               <a:t>۲</a:t>
             </a:r>
@@ -4239,8 +4442,8 @@
                 <a:solidFill>
                   <a:srgbClr val="5C6B62"/>
                 </a:solidFill>
-                <a:latin typeface="Tahoma"/>
-                <a:cs typeface="Tahoma"/>
+                <a:latin typeface="Vazirmatn"/>
+                <a:cs typeface="Vazirmatn"/>
               </a:rPr>
               <a:t>از لگن به جلو خم شوید</a:t>
             </a:r>
@@ -4383,8 +4586,8 @@
                 <a:solidFill>
                   <a:srgbClr val="FFFFFF"/>
                 </a:solidFill>
-                <a:latin typeface="Tahoma"/>
-                <a:cs typeface="Tahoma"/>
+                <a:latin typeface="Vazirmatn"/>
+                <a:cs typeface="Vazirmatn"/>
               </a:rPr>
               <a:t>3</a:t>
             </a:r>
@@ -4429,8 +4632,8 @@
                 <a:solidFill>
                   <a:srgbClr val="1F2A24"/>
                 </a:solidFill>
-                <a:latin typeface="Tahoma"/>
-                <a:cs typeface="Tahoma"/>
+                <a:latin typeface="Vazirmatn"/>
+                <a:cs typeface="Vazirmatn"/>
               </a:rPr>
               <a:t>۳</a:t>
             </a:r>
@@ -4452,8 +4655,8 @@
                 <a:solidFill>
                   <a:srgbClr val="5C6B62"/>
                 </a:solidFill>
-                <a:latin typeface="Tahoma"/>
-                <a:cs typeface="Tahoma"/>
+                <a:latin typeface="Vazirmatn"/>
+                <a:cs typeface="Vazirmatn"/>
               </a:rPr>
               <a:t>زانوها کمی خم</a:t>
             </a:r>
@@ -4596,8 +4799,8 @@
                 <a:solidFill>
                   <a:srgbClr val="FFFFFF"/>
                 </a:solidFill>
-                <a:latin typeface="Tahoma"/>
-                <a:cs typeface="Tahoma"/>
+                <a:latin typeface="Vazirmatn"/>
+                <a:cs typeface="Vazirmatn"/>
               </a:rPr>
               <a:t>4</a:t>
             </a:r>
@@ -4642,8 +4845,8 @@
                 <a:solidFill>
                   <a:srgbClr val="1F2A24"/>
                 </a:solidFill>
-                <a:latin typeface="Tahoma"/>
-                <a:cs typeface="Tahoma"/>
+                <a:latin typeface="Vazirmatn"/>
+                <a:cs typeface="Vazirmatn"/>
               </a:rPr>
               <a:t>۴</a:t>
             </a:r>
@@ -4665,8 +4868,8 @@
                 <a:solidFill>
                   <a:srgbClr val="5C6B62"/>
                 </a:solidFill>
-                <a:latin typeface="Tahoma"/>
-                <a:cs typeface="Tahoma"/>
+                <a:latin typeface="Vazirmatn"/>
+                <a:cs typeface="Vazirmatn"/>
               </a:rPr>
               <a:t>دست‌ها آزاد</a:t>
             </a:r>
@@ -4809,8 +5012,8 @@
                 <a:solidFill>
                   <a:srgbClr val="FFFFFF"/>
                 </a:solidFill>
-                <a:latin typeface="Tahoma"/>
-                <a:cs typeface="Tahoma"/>
+                <a:latin typeface="Vazirmatn"/>
+                <a:cs typeface="Vazirmatn"/>
               </a:rPr>
               <a:t>5</a:t>
             </a:r>
@@ -4855,8 +5058,8 @@
                 <a:solidFill>
                   <a:srgbClr val="1F2A24"/>
                 </a:solidFill>
-                <a:latin typeface="Tahoma"/>
-                <a:cs typeface="Tahoma"/>
+                <a:latin typeface="Vazirmatn"/>
+                <a:cs typeface="Vazirmatn"/>
               </a:rPr>
               <a:t>۵</a:t>
             </a:r>
@@ -4878,8 +5081,8 @@
                 <a:solidFill>
                   <a:srgbClr val="5C6B62"/>
                 </a:solidFill>
-                <a:latin typeface="Tahoma"/>
-                <a:cs typeface="Tahoma"/>
+                <a:latin typeface="Vazirmatn"/>
+                <a:cs typeface="Vazirmatn"/>
               </a:rPr>
               <a:t>شانه‌ها رها</a:t>
             </a:r>
@@ -5022,8 +5225,8 @@
                 <a:solidFill>
                   <a:srgbClr val="FFFFFF"/>
                 </a:solidFill>
-                <a:latin typeface="Tahoma"/>
-                <a:cs typeface="Tahoma"/>
+                <a:latin typeface="Vazirmatn"/>
+                <a:cs typeface="Vazirmatn"/>
               </a:rPr>
               <a:t>6</a:t>
             </a:r>
@@ -5068,8 +5271,8 @@
                 <a:solidFill>
                   <a:srgbClr val="1F2A24"/>
                 </a:solidFill>
-                <a:latin typeface="Tahoma"/>
-                <a:cs typeface="Tahoma"/>
+                <a:latin typeface="Vazirmatn"/>
+                <a:cs typeface="Vazirmatn"/>
               </a:rPr>
               <a:t>۶</a:t>
             </a:r>
@@ -5091,8 +5294,8 @@
                 <a:solidFill>
                   <a:srgbClr val="5C6B62"/>
                 </a:solidFill>
-                <a:latin typeface="Tahoma"/>
-                <a:cs typeface="Tahoma"/>
+                <a:latin typeface="Vazirmatn"/>
+                <a:cs typeface="Vazirmatn"/>
               </a:rPr>
               <a:t>وزن متعادل</a:t>
             </a:r>
@@ -5227,8 +5430,8 @@
                 <a:solidFill>
                   <a:srgbClr val="1F2A24"/>
                 </a:solidFill>
-                <a:latin typeface="Tahoma"/>
-                <a:cs typeface="Tahoma"/>
+                <a:latin typeface="Vazirmatn"/>
+                <a:cs typeface="Vazirmatn"/>
               </a:rPr>
               <a:t>بدن را یک ساختار متعادل و آماده حرکت تصور کنید، نه اینکه خود را روی توپ خم کنید.</a:t>
             </a:r>
@@ -5244,7 +5447,7 @@
         <p:spPr>
           <a:xfrm>
             <a:off x="502920" y="6400800"/>
-            <a:ext cx="5486400" cy="320040"/>
+            <a:ext cx="6858000" cy="320040"/>
           </a:xfrm>
           <a:prstGeom prst="rect">
             <a:avLst/>
@@ -5269,14 +5472,24 @@
               </a:spcAft>
             </a:pPr>
             <a:r>
+              <a:rPr sz="1100" b="1" i="0">
+                <a:solidFill>
+                  <a:srgbClr val="2E7D32"/>
+                </a:solidFill>
+                <a:latin typeface="Vazirmatn"/>
+                <a:cs typeface="Vazirmatn"/>
+              </a:rPr>
+              <a:t>⛳ Puttclub</a:t>
+            </a:r>
+            <a:r>
               <a:rPr sz="1000" b="0" i="0">
                 <a:solidFill>
                   <a:srgbClr val="5C6B62"/>
                 </a:solidFill>
-                <a:latin typeface="Tahoma"/>
-                <a:cs typeface="Tahoma"/>
-              </a:rPr>
-              <a:t>Golf Academy  ·  Beginner · Level 1</a:t>
+                <a:latin typeface="Vazirmatn"/>
+                <a:cs typeface="Vazirmatn"/>
+              </a:rPr>
+              <a:t>   ·   Beginner · Level 1</a:t>
             </a:r>
           </a:p>
         </p:txBody>
@@ -5319,8 +5532,8 @@
                 <a:solidFill>
                   <a:srgbClr val="2E7D32"/>
                 </a:solidFill>
-                <a:latin typeface="Tahoma"/>
-                <a:cs typeface="Tahoma"/>
+                <a:latin typeface="Vazirmatn"/>
+                <a:cs typeface="Vazirmatn"/>
               </a:rPr>
               <a:t>10</a:t>
             </a:r>
@@ -5471,8 +5684,8 @@
                 <a:solidFill>
                   <a:srgbClr val="2E7D32"/>
                 </a:solidFill>
-                <a:latin typeface="Tahoma"/>
-                <a:cs typeface="Tahoma"/>
+                <a:latin typeface="Vazirmatn"/>
+                <a:cs typeface="Vazirmatn"/>
               </a:rPr>
               <a:t>فصل هشتم</a:t>
             </a:r>
@@ -5494,8 +5707,8 @@
                 <a:solidFill>
                   <a:srgbClr val="1F2A24"/>
                 </a:solidFill>
-                <a:latin typeface="Tahoma"/>
-                <a:cs typeface="Tahoma"/>
+                <a:latin typeface="Vazirmatn"/>
+                <a:cs typeface="Vazirmatn"/>
               </a:rPr>
               <a:t>تنظیم نسبت به هدف (Alignment)</a:t>
             </a:r>
@@ -5584,8 +5797,8 @@
                 <a:solidFill>
                   <a:srgbClr val="2E7D32"/>
                 </a:solidFill>
-                <a:latin typeface="Tahoma"/>
-                <a:cs typeface="Tahoma"/>
+                <a:latin typeface="Vazirmatn"/>
+                <a:cs typeface="Vazirmatn"/>
               </a:rPr>
               <a:t>●  </a:t>
             </a:r>
@@ -5594,8 +5807,8 @@
                 <a:solidFill>
                   <a:srgbClr val="2E7D32"/>
                 </a:solidFill>
-                <a:latin typeface="Tahoma"/>
-                <a:cs typeface="Tahoma"/>
+                <a:latin typeface="Vazirmatn"/>
+                <a:cs typeface="Vazirmatn"/>
               </a:rPr>
               <a:t>ترتیب صحیح</a:t>
             </a:r>
@@ -5604,8 +5817,8 @@
                 <a:solidFill>
                   <a:srgbClr val="1F2A24"/>
                 </a:solidFill>
-                <a:latin typeface="Tahoma"/>
-                <a:cs typeface="Tahoma"/>
+                <a:latin typeface="Vazirmatn"/>
+                <a:cs typeface="Vazirmatn"/>
               </a:rPr>
               <a:t>  —  Target ← Club Face ← Body</a:t>
             </a:r>
@@ -5627,8 +5840,8 @@
                 <a:solidFill>
                   <a:srgbClr val="2E7D32"/>
                 </a:solidFill>
-                <a:latin typeface="Tahoma"/>
-                <a:cs typeface="Tahoma"/>
+                <a:latin typeface="Vazirmatn"/>
+                <a:cs typeface="Vazirmatn"/>
               </a:rPr>
               <a:t>●  </a:t>
             </a:r>
@@ -5637,8 +5850,8 @@
                 <a:solidFill>
                   <a:srgbClr val="1F2A24"/>
                 </a:solidFill>
-                <a:latin typeface="Tahoma"/>
-                <a:cs typeface="Tahoma"/>
+                <a:latin typeface="Vazirmatn"/>
+                <a:cs typeface="Vazirmatn"/>
               </a:rPr>
               <a:t>ابتدا Club Face را نسبت به هدف تنظیم کنید</a:t>
             </a:r>
@@ -5660,8 +5873,8 @@
                 <a:solidFill>
                   <a:srgbClr val="2E7D32"/>
                 </a:solidFill>
-                <a:latin typeface="Tahoma"/>
-                <a:cs typeface="Tahoma"/>
+                <a:latin typeface="Vazirmatn"/>
+                <a:cs typeface="Vazirmatn"/>
               </a:rPr>
               <a:t>●  </a:t>
             </a:r>
@@ -5670,8 +5883,8 @@
                 <a:solidFill>
                   <a:srgbClr val="1F2A24"/>
                 </a:solidFill>
-                <a:latin typeface="Tahoma"/>
-                <a:cs typeface="Tahoma"/>
+                <a:latin typeface="Vazirmatn"/>
+                <a:cs typeface="Vazirmatn"/>
               </a:rPr>
               <a:t>سپس پاها، زانوها، لگن و شانه‌ها را موازی خط هدف بچینید</a:t>
             </a:r>
@@ -5693,8 +5906,8 @@
                 <a:solidFill>
                   <a:srgbClr val="2E7D32"/>
                 </a:solidFill>
-                <a:latin typeface="Tahoma"/>
-                <a:cs typeface="Tahoma"/>
+                <a:latin typeface="Vazirmatn"/>
+                <a:cs typeface="Vazirmatn"/>
               </a:rPr>
               <a:t>●  </a:t>
             </a:r>
@@ -5703,8 +5916,8 @@
                 <a:solidFill>
                   <a:srgbClr val="2E7D32"/>
                 </a:solidFill>
-                <a:latin typeface="Tahoma"/>
-                <a:cs typeface="Tahoma"/>
+                <a:latin typeface="Vazirmatn"/>
+                <a:cs typeface="Vazirmatn"/>
               </a:rPr>
               <a:t>تمرین Alignment</a:t>
             </a:r>
@@ -5726,8 +5939,8 @@
                 <a:solidFill>
                   <a:srgbClr val="2E7D32"/>
                 </a:solidFill>
-                <a:latin typeface="Tahoma"/>
-                <a:cs typeface="Tahoma"/>
+                <a:latin typeface="Vazirmatn"/>
+                <a:cs typeface="Vazirmatn"/>
               </a:rPr>
               <a:t>–  </a:t>
             </a:r>
@@ -5736,8 +5949,8 @@
                 <a:solidFill>
                   <a:srgbClr val="1F2A24"/>
                 </a:solidFill>
-                <a:latin typeface="Tahoma"/>
-                <a:cs typeface="Tahoma"/>
+                <a:latin typeface="Vazirmatn"/>
+                <a:cs typeface="Vazirmatn"/>
               </a:rPr>
               <a:t>دو چوب روی زمین بگذارید؛ یکی در امتداد هدف و دیگری موازی آن</a:t>
             </a:r>
@@ -5759,8 +5972,8 @@
                 <a:solidFill>
                   <a:srgbClr val="2E7D32"/>
                 </a:solidFill>
-                <a:latin typeface="Tahoma"/>
-                <a:cs typeface="Tahoma"/>
+                <a:latin typeface="Vazirmatn"/>
+                <a:cs typeface="Vazirmatn"/>
               </a:rPr>
               <a:t>–  </a:t>
             </a:r>
@@ -5769,8 +5982,8 @@
                 <a:solidFill>
                   <a:srgbClr val="1F2A24"/>
                 </a:solidFill>
-                <a:latin typeface="Tahoma"/>
-                <a:cs typeface="Tahoma"/>
+                <a:latin typeface="Vazirmatn"/>
+                <a:cs typeface="Vazirmatn"/>
               </a:rPr>
               <a:t>چند بار Setup بگیرید و بدون ضربه جهت بدن را بررسی کنید</a:t>
             </a:r>
@@ -5905,8 +6118,8 @@
                 <a:solidFill>
                   <a:srgbClr val="2E7D32"/>
                 </a:solidFill>
-                <a:latin typeface="Tahoma"/>
-                <a:cs typeface="Tahoma"/>
+                <a:latin typeface="Vazirmatn"/>
+                <a:cs typeface="Vazirmatn"/>
               </a:rPr>
               <a:t>💡 </a:t>
             </a:r>
@@ -5915,8 +6128,8 @@
                 <a:solidFill>
                   <a:srgbClr val="1F2A24"/>
                 </a:solidFill>
-                <a:latin typeface="Tahoma"/>
-                <a:cs typeface="Tahoma"/>
+                <a:latin typeface="Vazirmatn"/>
+                <a:cs typeface="Vazirmatn"/>
               </a:rPr>
               <a:t>اول صورت کلاب به هدف، بعد بدن؛ این ترتیب را هرگز عوض نکنید.</a:t>
             </a:r>
@@ -5932,7 +6145,7 @@
         <p:spPr>
           <a:xfrm>
             <a:off x="502920" y="6400800"/>
-            <a:ext cx="5486400" cy="320040"/>
+            <a:ext cx="6858000" cy="320040"/>
           </a:xfrm>
           <a:prstGeom prst="rect">
             <a:avLst/>
@@ -5957,14 +6170,24 @@
               </a:spcAft>
             </a:pPr>
             <a:r>
+              <a:rPr sz="1100" b="1" i="0">
+                <a:solidFill>
+                  <a:srgbClr val="2E7D32"/>
+                </a:solidFill>
+                <a:latin typeface="Vazirmatn"/>
+                <a:cs typeface="Vazirmatn"/>
+              </a:rPr>
+              <a:t>⛳ Puttclub</a:t>
+            </a:r>
+            <a:r>
               <a:rPr sz="1000" b="0" i="0">
                 <a:solidFill>
                   <a:srgbClr val="5C6B62"/>
                 </a:solidFill>
-                <a:latin typeface="Tahoma"/>
-                <a:cs typeface="Tahoma"/>
-              </a:rPr>
-              <a:t>Golf Academy  ·  Beginner · Level 1</a:t>
+                <a:latin typeface="Vazirmatn"/>
+                <a:cs typeface="Vazirmatn"/>
+              </a:rPr>
+              <a:t>   ·   Beginner · Level 1</a:t>
             </a:r>
           </a:p>
         </p:txBody>
@@ -6007,8 +6230,8 @@
                 <a:solidFill>
                   <a:srgbClr val="2E7D32"/>
                 </a:solidFill>
-                <a:latin typeface="Tahoma"/>
-                <a:cs typeface="Tahoma"/>
+                <a:latin typeface="Vazirmatn"/>
+                <a:cs typeface="Vazirmatn"/>
               </a:rPr>
               <a:t>11</a:t>
             </a:r>
@@ -6159,8 +6382,8 @@
                 <a:solidFill>
                   <a:srgbClr val="2E7D32"/>
                 </a:solidFill>
-                <a:latin typeface="Tahoma"/>
-                <a:cs typeface="Tahoma"/>
+                <a:latin typeface="Vazirmatn"/>
+                <a:cs typeface="Vazirmatn"/>
               </a:rPr>
               <a:t>فصل نهم</a:t>
             </a:r>
@@ -6182,8 +6405,8 @@
                 <a:solidFill>
                   <a:srgbClr val="1F2A24"/>
                 </a:solidFill>
-                <a:latin typeface="Tahoma"/>
-                <a:cs typeface="Tahoma"/>
+                <a:latin typeface="Vazirmatn"/>
+                <a:cs typeface="Vazirmatn"/>
               </a:rPr>
               <a:t>آشنایی با مراحل Swing</a:t>
             </a:r>
@@ -6370,8 +6593,8 @@
                 <a:solidFill>
                   <a:srgbClr val="FFFFFF"/>
                 </a:solidFill>
-                <a:latin typeface="Tahoma"/>
-                <a:cs typeface="Tahoma"/>
+                <a:latin typeface="Vazirmatn"/>
+                <a:cs typeface="Vazirmatn"/>
               </a:rPr>
               <a:t>1</a:t>
             </a:r>
@@ -6416,8 +6639,8 @@
                 <a:solidFill>
                   <a:srgbClr val="1F2A24"/>
                 </a:solidFill>
-                <a:latin typeface="Tahoma"/>
-                <a:cs typeface="Tahoma"/>
+                <a:latin typeface="Vazirmatn"/>
+                <a:cs typeface="Vazirmatn"/>
               </a:rPr>
               <a:t>Setup</a:t>
             </a:r>
@@ -6439,8 +6662,8 @@
                 <a:solidFill>
                   <a:srgbClr val="5C6B62"/>
                 </a:solidFill>
-                <a:latin typeface="Tahoma"/>
-                <a:cs typeface="Tahoma"/>
+                <a:latin typeface="Vazirmatn"/>
+                <a:cs typeface="Vazirmatn"/>
               </a:rPr>
               <a:t>آماده شدن</a:t>
             </a:r>
@@ -6583,8 +6806,8 @@
                 <a:solidFill>
                   <a:srgbClr val="FFFFFF"/>
                 </a:solidFill>
-                <a:latin typeface="Tahoma"/>
-                <a:cs typeface="Tahoma"/>
+                <a:latin typeface="Vazirmatn"/>
+                <a:cs typeface="Vazirmatn"/>
               </a:rPr>
               <a:t>2</a:t>
             </a:r>
@@ -6629,8 +6852,8 @@
                 <a:solidFill>
                   <a:srgbClr val="1F2A24"/>
                 </a:solidFill>
-                <a:latin typeface="Tahoma"/>
-                <a:cs typeface="Tahoma"/>
+                <a:latin typeface="Vazirmatn"/>
+                <a:cs typeface="Vazirmatn"/>
               </a:rPr>
               <a:t>Takeaway</a:t>
             </a:r>
@@ -6652,8 +6875,8 @@
                 <a:solidFill>
                   <a:srgbClr val="5C6B62"/>
                 </a:solidFill>
-                <a:latin typeface="Tahoma"/>
-                <a:cs typeface="Tahoma"/>
+                <a:latin typeface="Vazirmatn"/>
+                <a:cs typeface="Vazirmatn"/>
               </a:rPr>
               <a:t>شروع حرکت</a:t>
             </a:r>
@@ -6796,8 +7019,8 @@
                 <a:solidFill>
                   <a:srgbClr val="FFFFFF"/>
                 </a:solidFill>
-                <a:latin typeface="Tahoma"/>
-                <a:cs typeface="Tahoma"/>
+                <a:latin typeface="Vazirmatn"/>
+                <a:cs typeface="Vazirmatn"/>
               </a:rPr>
               <a:t>3</a:t>
             </a:r>
@@ -6842,8 +7065,8 @@
                 <a:solidFill>
                   <a:srgbClr val="1F2A24"/>
                 </a:solidFill>
-                <a:latin typeface="Tahoma"/>
-                <a:cs typeface="Tahoma"/>
+                <a:latin typeface="Vazirmatn"/>
+                <a:cs typeface="Vazirmatn"/>
               </a:rPr>
               <a:t>Backswing</a:t>
             </a:r>
@@ -6865,8 +7088,8 @@
                 <a:solidFill>
                   <a:srgbClr val="5C6B62"/>
                 </a:solidFill>
-                <a:latin typeface="Tahoma"/>
-                <a:cs typeface="Tahoma"/>
+                <a:latin typeface="Vazirmatn"/>
+                <a:cs typeface="Vazirmatn"/>
               </a:rPr>
               <a:t>حرکت به عقب</a:t>
             </a:r>
@@ -7009,8 +7232,8 @@
                 <a:solidFill>
                   <a:srgbClr val="FFFFFF"/>
                 </a:solidFill>
-                <a:latin typeface="Tahoma"/>
-                <a:cs typeface="Tahoma"/>
+                <a:latin typeface="Vazirmatn"/>
+                <a:cs typeface="Vazirmatn"/>
               </a:rPr>
               <a:t>4</a:t>
             </a:r>
@@ -7055,8 +7278,8 @@
                 <a:solidFill>
                   <a:srgbClr val="1F2A24"/>
                 </a:solidFill>
-                <a:latin typeface="Tahoma"/>
-                <a:cs typeface="Tahoma"/>
+                <a:latin typeface="Vazirmatn"/>
+                <a:cs typeface="Vazirmatn"/>
               </a:rPr>
               <a:t>Transition</a:t>
             </a:r>
@@ -7078,8 +7301,8 @@
                 <a:solidFill>
                   <a:srgbClr val="5C6B62"/>
                 </a:solidFill>
-                <a:latin typeface="Tahoma"/>
-                <a:cs typeface="Tahoma"/>
+                <a:latin typeface="Vazirmatn"/>
+                <a:cs typeface="Vazirmatn"/>
               </a:rPr>
               <a:t>انتقال</a:t>
             </a:r>
@@ -7222,8 +7445,8 @@
                 <a:solidFill>
                   <a:srgbClr val="FFFFFF"/>
                 </a:solidFill>
-                <a:latin typeface="Tahoma"/>
-                <a:cs typeface="Tahoma"/>
+                <a:latin typeface="Vazirmatn"/>
+                <a:cs typeface="Vazirmatn"/>
               </a:rPr>
               <a:t>5</a:t>
             </a:r>
@@ -7268,8 +7491,8 @@
                 <a:solidFill>
                   <a:srgbClr val="1F2A24"/>
                 </a:solidFill>
-                <a:latin typeface="Tahoma"/>
-                <a:cs typeface="Tahoma"/>
+                <a:latin typeface="Vazirmatn"/>
+                <a:cs typeface="Vazirmatn"/>
               </a:rPr>
               <a:t>Downswing</a:t>
             </a:r>
@@ -7291,8 +7514,8 @@
                 <a:solidFill>
                   <a:srgbClr val="5C6B62"/>
                 </a:solidFill>
-                <a:latin typeface="Tahoma"/>
-                <a:cs typeface="Tahoma"/>
+                <a:latin typeface="Vazirmatn"/>
+                <a:cs typeface="Vazirmatn"/>
               </a:rPr>
               <a:t>حرکت به توپ</a:t>
             </a:r>
@@ -7435,8 +7658,8 @@
                 <a:solidFill>
                   <a:srgbClr val="FFFFFF"/>
                 </a:solidFill>
-                <a:latin typeface="Tahoma"/>
-                <a:cs typeface="Tahoma"/>
+                <a:latin typeface="Vazirmatn"/>
+                <a:cs typeface="Vazirmatn"/>
               </a:rPr>
               <a:t>6</a:t>
             </a:r>
@@ -7481,8 +7704,8 @@
                 <a:solidFill>
                   <a:srgbClr val="1F2A24"/>
                 </a:solidFill>
-                <a:latin typeface="Tahoma"/>
-                <a:cs typeface="Tahoma"/>
+                <a:latin typeface="Vazirmatn"/>
+                <a:cs typeface="Vazirmatn"/>
               </a:rPr>
               <a:t>Impact</a:t>
             </a:r>
@@ -7504,8 +7727,8 @@
                 <a:solidFill>
                   <a:srgbClr val="5C6B62"/>
                 </a:solidFill>
-                <a:latin typeface="Tahoma"/>
-                <a:cs typeface="Tahoma"/>
+                <a:latin typeface="Vazirmatn"/>
+                <a:cs typeface="Vazirmatn"/>
               </a:rPr>
               <a:t>تماس</a:t>
             </a:r>
@@ -7648,8 +7871,8 @@
                 <a:solidFill>
                   <a:srgbClr val="FFFFFF"/>
                 </a:solidFill>
-                <a:latin typeface="Tahoma"/>
-                <a:cs typeface="Tahoma"/>
+                <a:latin typeface="Vazirmatn"/>
+                <a:cs typeface="Vazirmatn"/>
               </a:rPr>
               <a:t>7</a:t>
             </a:r>
@@ -7694,8 +7917,8 @@
                 <a:solidFill>
                   <a:srgbClr val="1F2A24"/>
                 </a:solidFill>
-                <a:latin typeface="Tahoma"/>
-                <a:cs typeface="Tahoma"/>
+                <a:latin typeface="Vazirmatn"/>
+                <a:cs typeface="Vazirmatn"/>
               </a:rPr>
               <a:t>Follow Through</a:t>
             </a:r>
@@ -7717,8 +7940,8 @@
                 <a:solidFill>
                   <a:srgbClr val="5C6B62"/>
                 </a:solidFill>
-                <a:latin typeface="Tahoma"/>
-                <a:cs typeface="Tahoma"/>
+                <a:latin typeface="Vazirmatn"/>
+                <a:cs typeface="Vazirmatn"/>
               </a:rPr>
               <a:t>ادامه حرکت</a:t>
             </a:r>
@@ -7861,8 +8084,8 @@
                 <a:solidFill>
                   <a:srgbClr val="FFFFFF"/>
                 </a:solidFill>
-                <a:latin typeface="Tahoma"/>
-                <a:cs typeface="Tahoma"/>
+                <a:latin typeface="Vazirmatn"/>
+                <a:cs typeface="Vazirmatn"/>
               </a:rPr>
               <a:t>8</a:t>
             </a:r>
@@ -7907,8 +8130,8 @@
                 <a:solidFill>
                   <a:srgbClr val="1F2A24"/>
                 </a:solidFill>
-                <a:latin typeface="Tahoma"/>
-                <a:cs typeface="Tahoma"/>
+                <a:latin typeface="Vazirmatn"/>
+                <a:cs typeface="Vazirmatn"/>
               </a:rPr>
               <a:t>Finish</a:t>
             </a:r>
@@ -7930,8 +8153,8 @@
                 <a:solidFill>
                   <a:srgbClr val="5C6B62"/>
                 </a:solidFill>
-                <a:latin typeface="Tahoma"/>
-                <a:cs typeface="Tahoma"/>
+                <a:latin typeface="Vazirmatn"/>
+                <a:cs typeface="Vazirmatn"/>
               </a:rPr>
               <a:t>پایان متعادل</a:t>
             </a:r>
@@ -8066,8 +8289,8 @@
                 <a:solidFill>
                   <a:srgbClr val="1F2A24"/>
                 </a:solidFill>
-                <a:latin typeface="Tahoma"/>
-                <a:cs typeface="Tahoma"/>
+                <a:latin typeface="Vazirmatn"/>
+                <a:cs typeface="Vazirmatn"/>
               </a:rPr>
               <a:t>در دوره مقدماتی Swing را پیچیده نکنید؛ مفهوم کلی و ترتیب مراحل مهم است.</a:t>
             </a:r>
@@ -8083,7 +8306,7 @@
         <p:spPr>
           <a:xfrm>
             <a:off x="502920" y="6400800"/>
-            <a:ext cx="5486400" cy="320040"/>
+            <a:ext cx="6858000" cy="320040"/>
           </a:xfrm>
           <a:prstGeom prst="rect">
             <a:avLst/>
@@ -8108,14 +8331,24 @@
               </a:spcAft>
             </a:pPr>
             <a:r>
+              <a:rPr sz="1100" b="1" i="0">
+                <a:solidFill>
+                  <a:srgbClr val="2E7D32"/>
+                </a:solidFill>
+                <a:latin typeface="Vazirmatn"/>
+                <a:cs typeface="Vazirmatn"/>
+              </a:rPr>
+              <a:t>⛳ Puttclub</a:t>
+            </a:r>
+            <a:r>
               <a:rPr sz="1000" b="0" i="0">
                 <a:solidFill>
                   <a:srgbClr val="5C6B62"/>
                 </a:solidFill>
-                <a:latin typeface="Tahoma"/>
-                <a:cs typeface="Tahoma"/>
-              </a:rPr>
-              <a:t>Golf Academy  ·  Beginner · Level 1</a:t>
+                <a:latin typeface="Vazirmatn"/>
+                <a:cs typeface="Vazirmatn"/>
+              </a:rPr>
+              <a:t>   ·   Beginner · Level 1</a:t>
             </a:r>
           </a:p>
         </p:txBody>
@@ -8158,8 +8391,8 @@
                 <a:solidFill>
                   <a:srgbClr val="2E7D32"/>
                 </a:solidFill>
-                <a:latin typeface="Tahoma"/>
-                <a:cs typeface="Tahoma"/>
+                <a:latin typeface="Vazirmatn"/>
+                <a:cs typeface="Vazirmatn"/>
               </a:rPr>
               <a:t>12</a:t>
             </a:r>
@@ -8336,8 +8569,8 @@
                 <a:solidFill>
                   <a:srgbClr val="FFFFFF"/>
                 </a:solidFill>
-                <a:latin typeface="Tahoma"/>
-                <a:cs typeface="Tahoma"/>
+                <a:latin typeface="Vazirmatn"/>
+                <a:cs typeface="Vazirmatn"/>
               </a:rPr>
               <a:t>چرخش بدن و حرکت هماهنگ</a:t>
             </a:r>
@@ -8426,8 +8659,8 @@
                 <a:solidFill>
                   <a:srgbClr val="2E7D32"/>
                 </a:solidFill>
-                <a:latin typeface="Tahoma"/>
-                <a:cs typeface="Tahoma"/>
+                <a:latin typeface="Vazirmatn"/>
+                <a:cs typeface="Vazirmatn"/>
               </a:rPr>
               <a:t>فصل دهم</a:t>
             </a:r>
@@ -8449,8 +8682,8 @@
                 <a:solidFill>
                   <a:srgbClr val="1F2A24"/>
                 </a:solidFill>
-                <a:latin typeface="Tahoma"/>
-                <a:cs typeface="Tahoma"/>
+                <a:latin typeface="Vazirmatn"/>
+                <a:cs typeface="Vazirmatn"/>
               </a:rPr>
               <a:t>Swing با Iron</a:t>
             </a:r>
@@ -8539,8 +8772,8 @@
                 <a:solidFill>
                   <a:srgbClr val="2E7D32"/>
                 </a:solidFill>
-                <a:latin typeface="Tahoma"/>
-                <a:cs typeface="Tahoma"/>
+                <a:latin typeface="Vazirmatn"/>
+                <a:cs typeface="Vazirmatn"/>
               </a:rPr>
               <a:t>●  </a:t>
             </a:r>
@@ -8549,8 +8782,8 @@
                 <a:solidFill>
                   <a:srgbClr val="2E7D32"/>
                 </a:solidFill>
-                <a:latin typeface="Tahoma"/>
-                <a:cs typeface="Tahoma"/>
+                <a:latin typeface="Vazirmatn"/>
+                <a:cs typeface="Vazirmatn"/>
               </a:rPr>
               <a:t>هدف اصلی</a:t>
             </a:r>
@@ -8559,8 +8792,8 @@
                 <a:solidFill>
                   <a:srgbClr val="1F2A24"/>
                 </a:solidFill>
-                <a:latin typeface="Tahoma"/>
-                <a:cs typeface="Tahoma"/>
+                <a:latin typeface="Vazirmatn"/>
+                <a:cs typeface="Vazirmatn"/>
               </a:rPr>
               <a:t>  —  تماس صحیح و تکرارپذیر</a:t>
             </a:r>
@@ -8582,8 +8815,8 @@
                 <a:solidFill>
                   <a:srgbClr val="2E7D32"/>
                 </a:solidFill>
-                <a:latin typeface="Tahoma"/>
-                <a:cs typeface="Tahoma"/>
+                <a:latin typeface="Vazirmatn"/>
+                <a:cs typeface="Vazirmatn"/>
               </a:rPr>
               <a:t>●  </a:t>
             </a:r>
@@ -8592,8 +8825,8 @@
                 <a:solidFill>
                   <a:srgbClr val="1F2A24"/>
                 </a:solidFill>
-                <a:latin typeface="Tahoma"/>
-                <a:cs typeface="Tahoma"/>
+                <a:latin typeface="Vazirmatn"/>
+                <a:cs typeface="Vazirmatn"/>
               </a:rPr>
               <a:t>بدن می‌چرخد، دست‌ها حرکت می‌کنند</a:t>
             </a:r>
@@ -8615,8 +8848,8 @@
                 <a:solidFill>
                   <a:srgbClr val="2E7D32"/>
                 </a:solidFill>
-                <a:latin typeface="Tahoma"/>
-                <a:cs typeface="Tahoma"/>
+                <a:latin typeface="Vazirmatn"/>
+                <a:cs typeface="Vazirmatn"/>
               </a:rPr>
               <a:t>●  </a:t>
             </a:r>
@@ -8625,8 +8858,8 @@
                 <a:solidFill>
                   <a:srgbClr val="1F2A24"/>
                 </a:solidFill>
-                <a:latin typeface="Tahoma"/>
-                <a:cs typeface="Tahoma"/>
+                <a:latin typeface="Vazirmatn"/>
+                <a:cs typeface="Vazirmatn"/>
               </a:rPr>
               <a:t>کلاب در مسیر مناسب به توپ می‌رسد</a:t>
             </a:r>
@@ -8648,8 +8881,8 @@
                 <a:solidFill>
                   <a:srgbClr val="2E7D32"/>
                 </a:solidFill>
-                <a:latin typeface="Tahoma"/>
-                <a:cs typeface="Tahoma"/>
+                <a:latin typeface="Vazirmatn"/>
+                <a:cs typeface="Vazirmatn"/>
               </a:rPr>
               <a:t>●  </a:t>
             </a:r>
@@ -8658,8 +8891,8 @@
                 <a:solidFill>
                   <a:srgbClr val="1F2A24"/>
                 </a:solidFill>
-                <a:latin typeface="Tahoma"/>
-                <a:cs typeface="Tahoma"/>
+                <a:latin typeface="Vazirmatn"/>
+                <a:cs typeface="Vazirmatn"/>
               </a:rPr>
               <a:t>نباید تمام Swing فقط با دست‌ها انجام شود</a:t>
             </a:r>
@@ -8681,8 +8914,8 @@
                 <a:solidFill>
                   <a:srgbClr val="2E7D32"/>
                 </a:solidFill>
-                <a:latin typeface="Tahoma"/>
-                <a:cs typeface="Tahoma"/>
+                <a:latin typeface="Vazirmatn"/>
+                <a:cs typeface="Vazirmatn"/>
               </a:rPr>
               <a:t>●  </a:t>
             </a:r>
@@ -8691,8 +8924,8 @@
                 <a:solidFill>
                   <a:srgbClr val="2E7D32"/>
                 </a:solidFill>
-                <a:latin typeface="Tahoma"/>
-                <a:cs typeface="Tahoma"/>
+                <a:latin typeface="Vazirmatn"/>
+                <a:cs typeface="Vazirmatn"/>
               </a:rPr>
               <a:t>ترتیب ساده</a:t>
             </a:r>
@@ -8701,8 +8934,8 @@
                 <a:solidFill>
                   <a:srgbClr val="1F2A24"/>
                 </a:solidFill>
-                <a:latin typeface="Tahoma"/>
-                <a:cs typeface="Tahoma"/>
+                <a:latin typeface="Vazirmatn"/>
+                <a:cs typeface="Vazirmatn"/>
               </a:rPr>
               <a:t>  —  Setup ← Turn ← Swing ← Impact ← Finish</a:t>
             </a:r>
@@ -8837,8 +9070,8 @@
                 <a:solidFill>
                   <a:srgbClr val="2E7D32"/>
                 </a:solidFill>
-                <a:latin typeface="Tahoma"/>
-                <a:cs typeface="Tahoma"/>
+                <a:latin typeface="Vazirmatn"/>
+                <a:cs typeface="Vazirmatn"/>
               </a:rPr>
               <a:t>نکته مربی:  </a:t>
             </a:r>
@@ -8847,8 +9080,8 @@
                 <a:solidFill>
                   <a:srgbClr val="1F2A24"/>
                 </a:solidFill>
-                <a:latin typeface="Tahoma"/>
-                <a:cs typeface="Tahoma"/>
+                <a:latin typeface="Vazirmatn"/>
+                <a:cs typeface="Vazirmatn"/>
               </a:rPr>
               <a:t>تکرارپذیری Setup و تماس، مهم‌تر از قدرت در دوره مقدماتی است.</a:t>
             </a:r>
@@ -8864,7 +9097,7 @@
         <p:spPr>
           <a:xfrm>
             <a:off x="502920" y="6400800"/>
-            <a:ext cx="5486400" cy="320040"/>
+            <a:ext cx="6858000" cy="320040"/>
           </a:xfrm>
           <a:prstGeom prst="rect">
             <a:avLst/>
@@ -8889,14 +9122,24 @@
               </a:spcAft>
             </a:pPr>
             <a:r>
+              <a:rPr sz="1100" b="1" i="0">
+                <a:solidFill>
+                  <a:srgbClr val="2E7D32"/>
+                </a:solidFill>
+                <a:latin typeface="Vazirmatn"/>
+                <a:cs typeface="Vazirmatn"/>
+              </a:rPr>
+              <a:t>⛳ Puttclub</a:t>
+            </a:r>
+            <a:r>
               <a:rPr sz="1000" b="0" i="0">
                 <a:solidFill>
                   <a:srgbClr val="5C6B62"/>
                 </a:solidFill>
-                <a:latin typeface="Tahoma"/>
-                <a:cs typeface="Tahoma"/>
-              </a:rPr>
-              <a:t>Golf Academy  ·  Beginner · Level 1</a:t>
+                <a:latin typeface="Vazirmatn"/>
+                <a:cs typeface="Vazirmatn"/>
+              </a:rPr>
+              <a:t>   ·   Beginner · Level 1</a:t>
             </a:r>
           </a:p>
         </p:txBody>
@@ -8939,8 +9182,8 @@
                 <a:solidFill>
                   <a:srgbClr val="2E7D32"/>
                 </a:solidFill>
-                <a:latin typeface="Tahoma"/>
-                <a:cs typeface="Tahoma"/>
+                <a:latin typeface="Vazirmatn"/>
+                <a:cs typeface="Vazirmatn"/>
               </a:rPr>
               <a:t>13</a:t>
             </a:r>
@@ -9117,8 +9360,8 @@
                 <a:solidFill>
                   <a:srgbClr val="FFFFFF"/>
                 </a:solidFill>
-                <a:latin typeface="Tahoma"/>
-                <a:cs typeface="Tahoma"/>
+                <a:latin typeface="Vazirmatn"/>
+                <a:cs typeface="Vazirmatn"/>
               </a:rPr>
               <a:t>آماده‌سازی برای تماس Ball-First</a:t>
             </a:r>
@@ -9207,8 +9450,8 @@
                 <a:solidFill>
                   <a:srgbClr val="2E7D32"/>
                 </a:solidFill>
-                <a:latin typeface="Tahoma"/>
-                <a:cs typeface="Tahoma"/>
+                <a:latin typeface="Vazirmatn"/>
+                <a:cs typeface="Vazirmatn"/>
               </a:rPr>
               <a:t>فصل یازدهم</a:t>
             </a:r>
@@ -9230,8 +9473,8 @@
                 <a:solidFill>
                   <a:srgbClr val="1F2A24"/>
                 </a:solidFill>
-                <a:latin typeface="Tahoma"/>
-                <a:cs typeface="Tahoma"/>
+                <a:latin typeface="Vazirmatn"/>
+                <a:cs typeface="Vazirmatn"/>
               </a:rPr>
               <a:t>تماس با توپ در Iron (Impact)</a:t>
             </a:r>
@@ -9320,8 +9563,8 @@
                 <a:solidFill>
                   <a:srgbClr val="2E7D32"/>
                 </a:solidFill>
-                <a:latin typeface="Tahoma"/>
-                <a:cs typeface="Tahoma"/>
+                <a:latin typeface="Vazirmatn"/>
+                <a:cs typeface="Vazirmatn"/>
               </a:rPr>
               <a:t>●  </a:t>
             </a:r>
@@ -9330,8 +9573,8 @@
                 <a:solidFill>
                   <a:srgbClr val="2E7D32"/>
                 </a:solidFill>
-                <a:latin typeface="Tahoma"/>
-                <a:cs typeface="Tahoma"/>
+                <a:latin typeface="Vazirmatn"/>
+                <a:cs typeface="Vazirmatn"/>
               </a:rPr>
               <a:t>مفهوم مهم</a:t>
             </a:r>
@@ -9340,8 +9583,8 @@
                 <a:solidFill>
                   <a:srgbClr val="1F2A24"/>
                 </a:solidFill>
-                <a:latin typeface="Tahoma"/>
-                <a:cs typeface="Tahoma"/>
+                <a:latin typeface="Vazirmatn"/>
+                <a:cs typeface="Vazirmatn"/>
               </a:rPr>
               <a:t>  —  Ball First (اول توپ)</a:t>
             </a:r>
@@ -9363,8 +9606,8 @@
                 <a:solidFill>
                   <a:srgbClr val="2E7D32"/>
                 </a:solidFill>
-                <a:latin typeface="Tahoma"/>
-                <a:cs typeface="Tahoma"/>
+                <a:latin typeface="Vazirmatn"/>
+                <a:cs typeface="Vazirmatn"/>
               </a:rPr>
               <a:t>●  </a:t>
             </a:r>
@@ -9373,8 +9616,8 @@
                 <a:solidFill>
                   <a:srgbClr val="1F2A24"/>
                 </a:solidFill>
-                <a:latin typeface="Tahoma"/>
-                <a:cs typeface="Tahoma"/>
+                <a:latin typeface="Vazirmatn"/>
+                <a:cs typeface="Vazirmatn"/>
               </a:rPr>
               <a:t>کلاب ابتدا با توپ تماس می‌گیرد، سپس زمین را لمس می‌کند</a:t>
             </a:r>
@@ -9396,8 +9639,8 @@
                 <a:solidFill>
                   <a:srgbClr val="2E7D32"/>
                 </a:solidFill>
-                <a:latin typeface="Tahoma"/>
-                <a:cs typeface="Tahoma"/>
+                <a:latin typeface="Vazirmatn"/>
+                <a:cs typeface="Vazirmatn"/>
               </a:rPr>
               <a:t>●  </a:t>
             </a:r>
@@ -9406,8 +9649,8 @@
                 <a:solidFill>
                   <a:srgbClr val="2E7D32"/>
                 </a:solidFill>
-                <a:latin typeface="Tahoma"/>
-                <a:cs typeface="Tahoma"/>
+                <a:latin typeface="Vazirmatn"/>
+                <a:cs typeface="Vazirmatn"/>
               </a:rPr>
               <a:t>نشانه مناسب</a:t>
             </a:r>
@@ -9416,8 +9659,8 @@
                 <a:solidFill>
                   <a:srgbClr val="1F2A24"/>
                 </a:solidFill>
-                <a:latin typeface="Tahoma"/>
-                <a:cs typeface="Tahoma"/>
+                <a:latin typeface="Vazirmatn"/>
+                <a:cs typeface="Vazirmatn"/>
               </a:rPr>
               <a:t>  —  توپ ← سپس زمین</a:t>
             </a:r>
@@ -9439,8 +9682,8 @@
                 <a:solidFill>
                   <a:srgbClr val="2E7D32"/>
                 </a:solidFill>
-                <a:latin typeface="Tahoma"/>
-                <a:cs typeface="Tahoma"/>
+                <a:latin typeface="Vazirmatn"/>
+                <a:cs typeface="Vazirmatn"/>
               </a:rPr>
               <a:t>●  </a:t>
             </a:r>
@@ -9449,8 +9692,8 @@
                 <a:solidFill>
                   <a:srgbClr val="1F2A24"/>
                 </a:solidFill>
-                <a:latin typeface="Tahoma"/>
-                <a:cs typeface="Tahoma"/>
+                <a:latin typeface="Vazirmatn"/>
+                <a:cs typeface="Vazirmatn"/>
               </a:rPr>
               <a:t>Divot معمولاً بعد از محل توپ ایجاد می‌شود</a:t>
             </a:r>
@@ -9472,8 +9715,8 @@
                 <a:solidFill>
                   <a:srgbClr val="2E7D32"/>
                 </a:solidFill>
-                <a:latin typeface="Tahoma"/>
-                <a:cs typeface="Tahoma"/>
+                <a:latin typeface="Vazirmatn"/>
+                <a:cs typeface="Vazirmatn"/>
               </a:rPr>
               <a:t>●  </a:t>
             </a:r>
@@ -9482,8 +9725,8 @@
                 <a:solidFill>
                   <a:srgbClr val="2E7D32"/>
                 </a:solidFill>
-                <a:latin typeface="Tahoma"/>
-                <a:cs typeface="Tahoma"/>
+                <a:latin typeface="Vazirmatn"/>
+                <a:cs typeface="Vazirmatn"/>
               </a:rPr>
               <a:t>تمرین</a:t>
             </a:r>
@@ -9492,8 +9735,8 @@
                 <a:solidFill>
                   <a:srgbClr val="1F2A24"/>
                 </a:solidFill>
-                <a:latin typeface="Tahoma"/>
-                <a:cs typeface="Tahoma"/>
+                <a:latin typeface="Vazirmatn"/>
+                <a:cs typeface="Vazirmatn"/>
               </a:rPr>
               <a:t>  —  ابتدا بدون توپ چند Swing آرام</a:t>
             </a:r>
@@ -9515,8 +9758,8 @@
                 <a:solidFill>
                   <a:srgbClr val="2E7D32"/>
                 </a:solidFill>
-                <a:latin typeface="Tahoma"/>
-                <a:cs typeface="Tahoma"/>
+                <a:latin typeface="Vazirmatn"/>
+                <a:cs typeface="Vazirmatn"/>
               </a:rPr>
               <a:t>●  </a:t>
             </a:r>
@@ -9525,8 +9768,8 @@
                 <a:solidFill>
                   <a:srgbClr val="1F2A24"/>
                 </a:solidFill>
-                <a:latin typeface="Tahoma"/>
-                <a:cs typeface="Tahoma"/>
+                <a:latin typeface="Vazirmatn"/>
+                <a:cs typeface="Vazirmatn"/>
               </a:rPr>
               <a:t>نقطه پایین Swing را کنترل کنید، سپس توپ اضافه شود</a:t>
             </a:r>
@@ -9661,8 +9904,8 @@
                 <a:solidFill>
                   <a:srgbClr val="2E7D32"/>
                 </a:solidFill>
-                <a:latin typeface="Tahoma"/>
-                <a:cs typeface="Tahoma"/>
+                <a:latin typeface="Vazirmatn"/>
+                <a:cs typeface="Vazirmatn"/>
               </a:rPr>
               <a:t>نکته مربی:  </a:t>
             </a:r>
@@ -9671,8 +9914,8 @@
                 <a:solidFill>
                   <a:srgbClr val="1F2A24"/>
                 </a:solidFill>
-                <a:latin typeface="Tahoma"/>
-                <a:cs typeface="Tahoma"/>
+                <a:latin typeface="Vazirmatn"/>
+                <a:cs typeface="Vazirmatn"/>
               </a:rPr>
               <a:t>اگر Divot جلوی توپ (بعد از توپ) ایجاد شود، یعنی تماس Ball-First داشته‌اید.</a:t>
             </a:r>
@@ -9688,7 +9931,7 @@
         <p:spPr>
           <a:xfrm>
             <a:off x="502920" y="6400800"/>
-            <a:ext cx="5486400" cy="320040"/>
+            <a:ext cx="6858000" cy="320040"/>
           </a:xfrm>
           <a:prstGeom prst="rect">
             <a:avLst/>
@@ -9713,14 +9956,24 @@
               </a:spcAft>
             </a:pPr>
             <a:r>
+              <a:rPr sz="1100" b="1" i="0">
+                <a:solidFill>
+                  <a:srgbClr val="2E7D32"/>
+                </a:solidFill>
+                <a:latin typeface="Vazirmatn"/>
+                <a:cs typeface="Vazirmatn"/>
+              </a:rPr>
+              <a:t>⛳ Puttclub</a:t>
+            </a:r>
+            <a:r>
               <a:rPr sz="1000" b="0" i="0">
                 <a:solidFill>
                   <a:srgbClr val="5C6B62"/>
                 </a:solidFill>
-                <a:latin typeface="Tahoma"/>
-                <a:cs typeface="Tahoma"/>
-              </a:rPr>
-              <a:t>Golf Academy  ·  Beginner · Level 1</a:t>
+                <a:latin typeface="Vazirmatn"/>
+                <a:cs typeface="Vazirmatn"/>
+              </a:rPr>
+              <a:t>   ·   Beginner · Level 1</a:t>
             </a:r>
           </a:p>
         </p:txBody>
@@ -9763,8 +10016,8 @@
                 <a:solidFill>
                   <a:srgbClr val="2E7D32"/>
                 </a:solidFill>
-                <a:latin typeface="Tahoma"/>
-                <a:cs typeface="Tahoma"/>
+                <a:latin typeface="Vazirmatn"/>
+                <a:cs typeface="Vazirmatn"/>
               </a:rPr>
               <a:t>14</a:t>
             </a:r>
@@ -9941,8 +10194,8 @@
                 <a:solidFill>
                   <a:srgbClr val="FFFFFF"/>
                 </a:solidFill>
-                <a:latin typeface="Tahoma"/>
-                <a:cs typeface="Tahoma"/>
+                <a:latin typeface="Vazirmatn"/>
+                <a:cs typeface="Vazirmatn"/>
               </a:rPr>
               <a:t>Driver از روی Tee</a:t>
             </a:r>
@@ -10031,8 +10284,8 @@
                 <a:solidFill>
                   <a:srgbClr val="2E7D32"/>
                 </a:solidFill>
-                <a:latin typeface="Tahoma"/>
-                <a:cs typeface="Tahoma"/>
+                <a:latin typeface="Vazirmatn"/>
+                <a:cs typeface="Vazirmatn"/>
               </a:rPr>
               <a:t>فصل دوازدهم</a:t>
             </a:r>
@@ -10054,8 +10307,8 @@
                 <a:solidFill>
                   <a:srgbClr val="1F2A24"/>
                 </a:solidFill>
-                <a:latin typeface="Tahoma"/>
-                <a:cs typeface="Tahoma"/>
+                <a:latin typeface="Vazirmatn"/>
+                <a:cs typeface="Vazirmatn"/>
               </a:rPr>
               <a:t>Swing با Wood و Driver</a:t>
             </a:r>
@@ -10144,8 +10397,8 @@
                 <a:solidFill>
                   <a:srgbClr val="2E7D32"/>
                 </a:solidFill>
-                <a:latin typeface="Tahoma"/>
-                <a:cs typeface="Tahoma"/>
+                <a:latin typeface="Vazirmatn"/>
+                <a:cs typeface="Vazirmatn"/>
               </a:rPr>
               <a:t>●  </a:t>
             </a:r>
@@ -10154,8 +10407,8 @@
                 <a:solidFill>
                   <a:srgbClr val="2E7D32"/>
                 </a:solidFill>
-                <a:latin typeface="Tahoma"/>
-                <a:cs typeface="Tahoma"/>
+                <a:latin typeface="Vazirmatn"/>
+                <a:cs typeface="Vazirmatn"/>
               </a:rPr>
               <a:t>هدف</a:t>
             </a:r>
@@ -10164,8 +10417,8 @@
                 <a:solidFill>
                   <a:srgbClr val="1F2A24"/>
                 </a:solidFill>
-                <a:latin typeface="Tahoma"/>
-                <a:cs typeface="Tahoma"/>
+                <a:latin typeface="Vazirmatn"/>
+                <a:cs typeface="Vazirmatn"/>
               </a:rPr>
               <a:t>  —  تماس مناسب + سرعت کنترل‌شده + تعادل</a:t>
             </a:r>
@@ -10187,8 +10440,8 @@
                 <a:solidFill>
                   <a:srgbClr val="2E7D32"/>
                 </a:solidFill>
-                <a:latin typeface="Tahoma"/>
-                <a:cs typeface="Tahoma"/>
+                <a:latin typeface="Vazirmatn"/>
+                <a:cs typeface="Vazirmatn"/>
               </a:rPr>
               <a:t>●  </a:t>
             </a:r>
@@ -10197,8 +10450,8 @@
                 <a:solidFill>
                   <a:srgbClr val="1F2A24"/>
                 </a:solidFill>
-                <a:latin typeface="Tahoma"/>
-                <a:cs typeface="Tahoma"/>
+                <a:latin typeface="Vazirmatn"/>
+                <a:cs typeface="Vazirmatn"/>
               </a:rPr>
               <a:t>برای Driver توپ جلوتر قرار می‌گیرد</a:t>
             </a:r>
@@ -10220,8 +10473,8 @@
                 <a:solidFill>
                   <a:srgbClr val="2E7D32"/>
                 </a:solidFill>
-                <a:latin typeface="Tahoma"/>
-                <a:cs typeface="Tahoma"/>
+                <a:latin typeface="Vazirmatn"/>
+                <a:cs typeface="Vazirmatn"/>
               </a:rPr>
               <a:t>●  </a:t>
             </a:r>
@@ -10230,8 +10483,8 @@
                 <a:solidFill>
                   <a:srgbClr val="1F2A24"/>
                 </a:solidFill>
-                <a:latin typeface="Tahoma"/>
-                <a:cs typeface="Tahoma"/>
+                <a:latin typeface="Vazirmatn"/>
+                <a:cs typeface="Vazirmatn"/>
               </a:rPr>
               <a:t>Stance کمی بازتر و چرخش بدن بسیار مهم است</a:t>
             </a:r>
@@ -10253,8 +10506,8 @@
                 <a:solidFill>
                   <a:srgbClr val="2E7D32"/>
                 </a:solidFill>
-                <a:latin typeface="Tahoma"/>
-                <a:cs typeface="Tahoma"/>
+                <a:latin typeface="Vazirmatn"/>
+                <a:cs typeface="Vazirmatn"/>
               </a:rPr>
               <a:t>●  </a:t>
             </a:r>
@@ -10263,8 +10516,8 @@
                 <a:solidFill>
                   <a:srgbClr val="1F2A24"/>
                 </a:solidFill>
-                <a:latin typeface="Tahoma"/>
-                <a:cs typeface="Tahoma"/>
+                <a:latin typeface="Vazirmatn"/>
+                <a:cs typeface="Vazirmatn"/>
               </a:rPr>
               <a:t>نباید با زور دست‌ها سرعت ایجاد کرد</a:t>
             </a:r>
@@ -10286,8 +10539,8 @@
                 <a:solidFill>
                   <a:srgbClr val="2E7D32"/>
                 </a:solidFill>
-                <a:latin typeface="Tahoma"/>
-                <a:cs typeface="Tahoma"/>
+                <a:latin typeface="Vazirmatn"/>
+                <a:cs typeface="Vazirmatn"/>
               </a:rPr>
               <a:t>●  </a:t>
             </a:r>
@@ -10296,8 +10549,8 @@
                 <a:solidFill>
                   <a:srgbClr val="2E7D32"/>
                 </a:solidFill>
-                <a:latin typeface="Tahoma"/>
-                <a:cs typeface="Tahoma"/>
+                <a:latin typeface="Vazirmatn"/>
+                <a:cs typeface="Vazirmatn"/>
               </a:rPr>
               <a:t>قانون دوره مقدماتی</a:t>
             </a:r>
@@ -10306,8 +10559,8 @@
                 <a:solidFill>
                   <a:srgbClr val="1F2A24"/>
                 </a:solidFill>
-                <a:latin typeface="Tahoma"/>
-                <a:cs typeface="Tahoma"/>
+                <a:latin typeface="Vazirmatn"/>
+                <a:cs typeface="Vazirmatn"/>
               </a:rPr>
               <a:t>  —  اول تماس صحیح، بعد سرعت</a:t>
             </a:r>
@@ -10442,8 +10695,8 @@
                 <a:solidFill>
                   <a:srgbClr val="2E7D32"/>
                 </a:solidFill>
-                <a:latin typeface="Tahoma"/>
-                <a:cs typeface="Tahoma"/>
+                <a:latin typeface="Vazirmatn"/>
+                <a:cs typeface="Vazirmatn"/>
               </a:rPr>
               <a:t>نکته مربی:  </a:t>
             </a:r>
@@ -10452,8 +10705,8 @@
                 <a:solidFill>
                   <a:srgbClr val="1F2A24"/>
                 </a:solidFill>
-                <a:latin typeface="Tahoma"/>
-                <a:cs typeface="Tahoma"/>
+                <a:latin typeface="Vazirmatn"/>
+                <a:cs typeface="Vazirmatn"/>
               </a:rPr>
               <a:t>در Driver هم مانند آهن، تعادل و تماس بر قدرت مقدم است.</a:t>
             </a:r>
@@ -10469,7 +10722,7 @@
         <p:spPr>
           <a:xfrm>
             <a:off x="502920" y="6400800"/>
-            <a:ext cx="5486400" cy="320040"/>
+            <a:ext cx="6858000" cy="320040"/>
           </a:xfrm>
           <a:prstGeom prst="rect">
             <a:avLst/>
@@ -10494,14 +10747,24 @@
               </a:spcAft>
             </a:pPr>
             <a:r>
+              <a:rPr sz="1100" b="1" i="0">
+                <a:solidFill>
+                  <a:srgbClr val="2E7D32"/>
+                </a:solidFill>
+                <a:latin typeface="Vazirmatn"/>
+                <a:cs typeface="Vazirmatn"/>
+              </a:rPr>
+              <a:t>⛳ Puttclub</a:t>
+            </a:r>
+            <a:r>
               <a:rPr sz="1000" b="0" i="0">
                 <a:solidFill>
                   <a:srgbClr val="5C6B62"/>
                 </a:solidFill>
-                <a:latin typeface="Tahoma"/>
-                <a:cs typeface="Tahoma"/>
-              </a:rPr>
-              <a:t>Golf Academy  ·  Beginner · Level 1</a:t>
+                <a:latin typeface="Vazirmatn"/>
+                <a:cs typeface="Vazirmatn"/>
+              </a:rPr>
+              <a:t>   ·   Beginner · Level 1</a:t>
             </a:r>
           </a:p>
         </p:txBody>
@@ -10544,8 +10807,8 @@
                 <a:solidFill>
                   <a:srgbClr val="2E7D32"/>
                 </a:solidFill>
-                <a:latin typeface="Tahoma"/>
-                <a:cs typeface="Tahoma"/>
+                <a:latin typeface="Vazirmatn"/>
+                <a:cs typeface="Vazirmatn"/>
               </a:rPr>
               <a:t>15</a:t>
             </a:r>
@@ -10696,8 +10959,8 @@
                 <a:solidFill>
                   <a:srgbClr val="2E7D32"/>
                 </a:solidFill>
-                <a:latin typeface="Tahoma"/>
-                <a:cs typeface="Tahoma"/>
+                <a:latin typeface="Vazirmatn"/>
+                <a:cs typeface="Vazirmatn"/>
               </a:rPr>
               <a:t>فصل سیزدهم</a:t>
             </a:r>
@@ -10719,8 +10982,8 @@
                 <a:solidFill>
                   <a:srgbClr val="1F2A24"/>
                 </a:solidFill>
-                <a:latin typeface="Tahoma"/>
-                <a:cs typeface="Tahoma"/>
+                <a:latin typeface="Vazirmatn"/>
+                <a:cs typeface="Vazirmatn"/>
               </a:rPr>
               <a:t>ضربه Pitch</a:t>
             </a:r>
@@ -10809,8 +11072,8 @@
                 <a:solidFill>
                   <a:srgbClr val="2E7D32"/>
                 </a:solidFill>
-                <a:latin typeface="Tahoma"/>
-                <a:cs typeface="Tahoma"/>
+                <a:latin typeface="Vazirmatn"/>
+                <a:cs typeface="Vazirmatn"/>
               </a:rPr>
               <a:t>●  </a:t>
             </a:r>
@@ -10819,8 +11082,8 @@
                 <a:solidFill>
                   <a:srgbClr val="1F2A24"/>
                 </a:solidFill>
-                <a:latin typeface="Tahoma"/>
-                <a:cs typeface="Tahoma"/>
+                <a:latin typeface="Vazirmatn"/>
+                <a:cs typeface="Vazirmatn"/>
               </a:rPr>
               <a:t>Pitch یک ضربه کوتاه با مسیر نسبتاً بلند در هواست</a:t>
             </a:r>
@@ -10842,8 +11105,8 @@
                 <a:solidFill>
                   <a:srgbClr val="2E7D32"/>
                 </a:solidFill>
-                <a:latin typeface="Tahoma"/>
-                <a:cs typeface="Tahoma"/>
+                <a:latin typeface="Vazirmatn"/>
+                <a:cs typeface="Vazirmatn"/>
               </a:rPr>
               <a:t>●  </a:t>
             </a:r>
@@ -10852,8 +11115,8 @@
                 <a:solidFill>
                   <a:srgbClr val="2E7D32"/>
                 </a:solidFill>
-                <a:latin typeface="Tahoma"/>
-                <a:cs typeface="Tahoma"/>
+                <a:latin typeface="Vazirmatn"/>
+                <a:cs typeface="Vazirmatn"/>
               </a:rPr>
               <a:t>هدف</a:t>
             </a:r>
@@ -10862,8 +11125,8 @@
                 <a:solidFill>
                   <a:srgbClr val="1F2A24"/>
                 </a:solidFill>
-                <a:latin typeface="Tahoma"/>
-                <a:cs typeface="Tahoma"/>
+                <a:latin typeface="Vazirmatn"/>
+                <a:cs typeface="Vazirmatn"/>
               </a:rPr>
               <a:t>  —  ارتفاع + کنترل فاصله</a:t>
             </a:r>
@@ -10885,8 +11148,8 @@
                 <a:solidFill>
                   <a:srgbClr val="2E7D32"/>
                 </a:solidFill>
-                <a:latin typeface="Tahoma"/>
-                <a:cs typeface="Tahoma"/>
+                <a:latin typeface="Vazirmatn"/>
+                <a:cs typeface="Vazirmatn"/>
               </a:rPr>
               <a:t>●  </a:t>
             </a:r>
@@ -10895,8 +11158,8 @@
                 <a:solidFill>
                   <a:srgbClr val="2E7D32"/>
                 </a:solidFill>
-                <a:latin typeface="Tahoma"/>
-                <a:cs typeface="Tahoma"/>
+                <a:latin typeface="Vazirmatn"/>
+                <a:cs typeface="Vazirmatn"/>
               </a:rPr>
               <a:t>Setup</a:t>
             </a:r>
@@ -10905,8 +11168,8 @@
                 <a:solidFill>
                   <a:srgbClr val="1F2A24"/>
                 </a:solidFill>
-                <a:latin typeface="Tahoma"/>
-                <a:cs typeface="Tahoma"/>
+                <a:latin typeface="Vazirmatn"/>
+                <a:cs typeface="Vazirmatn"/>
               </a:rPr>
               <a:t>  —  Stance نسبتاً باریک، وزن کمی بیشتر روی پای جلو</a:t>
             </a:r>
@@ -10928,8 +11191,8 @@
                 <a:solidFill>
                   <a:srgbClr val="2E7D32"/>
                 </a:solidFill>
-                <a:latin typeface="Tahoma"/>
-                <a:cs typeface="Tahoma"/>
+                <a:latin typeface="Vazirmatn"/>
+                <a:cs typeface="Vazirmatn"/>
               </a:rPr>
               <a:t>●  </a:t>
             </a:r>
@@ -10938,8 +11201,8 @@
                 <a:solidFill>
                   <a:srgbClr val="1F2A24"/>
                 </a:solidFill>
-                <a:latin typeface="Tahoma"/>
-                <a:cs typeface="Tahoma"/>
+                <a:latin typeface="Vazirmatn"/>
+                <a:cs typeface="Vazirmatn"/>
               </a:rPr>
               <a:t>توپ نزدیک مرکز تا کمی جلو و دست‌ها کنترل‌شده</a:t>
             </a:r>
@@ -10961,8 +11224,8 @@
                 <a:solidFill>
                   <a:srgbClr val="2E7D32"/>
                 </a:solidFill>
-                <a:latin typeface="Tahoma"/>
-                <a:cs typeface="Tahoma"/>
+                <a:latin typeface="Vazirmatn"/>
+                <a:cs typeface="Vazirmatn"/>
               </a:rPr>
               <a:t>●  </a:t>
             </a:r>
@@ -10971,8 +11234,8 @@
                 <a:solidFill>
                   <a:srgbClr val="2E7D32"/>
                 </a:solidFill>
-                <a:latin typeface="Tahoma"/>
-                <a:cs typeface="Tahoma"/>
+                <a:latin typeface="Vazirmatn"/>
+                <a:cs typeface="Vazirmatn"/>
               </a:rPr>
               <a:t>Swing</a:t>
             </a:r>
@@ -10981,8 +11244,8 @@
                 <a:solidFill>
                   <a:srgbClr val="1F2A24"/>
                 </a:solidFill>
-                <a:latin typeface="Tahoma"/>
-                <a:cs typeface="Tahoma"/>
+                <a:latin typeface="Vazirmatn"/>
+                <a:cs typeface="Vazirmatn"/>
               </a:rPr>
               <a:t>  —  Backswing کوتاه ← Impact ← Follow Through</a:t>
             </a:r>
@@ -11004,8 +11267,8 @@
                 <a:solidFill>
                   <a:srgbClr val="2E7D32"/>
                 </a:solidFill>
-                <a:latin typeface="Tahoma"/>
-                <a:cs typeface="Tahoma"/>
+                <a:latin typeface="Vazirmatn"/>
+                <a:cs typeface="Vazirmatn"/>
               </a:rPr>
               <a:t>●  </a:t>
             </a:r>
@@ -11014,8 +11277,8 @@
                 <a:solidFill>
                   <a:srgbClr val="1F2A24"/>
                 </a:solidFill>
-                <a:latin typeface="Tahoma"/>
-                <a:cs typeface="Tahoma"/>
+                <a:latin typeface="Vazirmatn"/>
+                <a:cs typeface="Vazirmatn"/>
               </a:rPr>
               <a:t>در Pitch نباید فقط با دست‌ها ضربه بزنیم</a:t>
             </a:r>
@@ -11150,8 +11413,8 @@
                 <a:solidFill>
                   <a:srgbClr val="2E7D32"/>
                 </a:solidFill>
-                <a:latin typeface="Tahoma"/>
-                <a:cs typeface="Tahoma"/>
+                <a:latin typeface="Vazirmatn"/>
+                <a:cs typeface="Vazirmatn"/>
               </a:rPr>
               <a:t>💡 </a:t>
             </a:r>
@@ -11160,8 +11423,8 @@
                 <a:solidFill>
                   <a:srgbClr val="1F2A24"/>
                 </a:solidFill>
-                <a:latin typeface="Tahoma"/>
-                <a:cs typeface="Tahoma"/>
+                <a:latin typeface="Vazirmatn"/>
+                <a:cs typeface="Vazirmatn"/>
               </a:rPr>
               <a:t>فاصله در Pitch با طول Swing و ریتم کنترل می‌شود، نه با زور بیشتر.</a:t>
             </a:r>
@@ -11177,7 +11440,7 @@
         <p:spPr>
           <a:xfrm>
             <a:off x="502920" y="6400800"/>
-            <a:ext cx="5486400" cy="320040"/>
+            <a:ext cx="6858000" cy="320040"/>
           </a:xfrm>
           <a:prstGeom prst="rect">
             <a:avLst/>
@@ -11202,14 +11465,24 @@
               </a:spcAft>
             </a:pPr>
             <a:r>
+              <a:rPr sz="1100" b="1" i="0">
+                <a:solidFill>
+                  <a:srgbClr val="2E7D32"/>
+                </a:solidFill>
+                <a:latin typeface="Vazirmatn"/>
+                <a:cs typeface="Vazirmatn"/>
+              </a:rPr>
+              <a:t>⛳ Puttclub</a:t>
+            </a:r>
+            <a:r>
               <a:rPr sz="1000" b="0" i="0">
                 <a:solidFill>
                   <a:srgbClr val="5C6B62"/>
                 </a:solidFill>
-                <a:latin typeface="Tahoma"/>
-                <a:cs typeface="Tahoma"/>
-              </a:rPr>
-              <a:t>Golf Academy  ·  Beginner · Level 1</a:t>
+                <a:latin typeface="Vazirmatn"/>
+                <a:cs typeface="Vazirmatn"/>
+              </a:rPr>
+              <a:t>   ·   Beginner · Level 1</a:t>
             </a:r>
           </a:p>
         </p:txBody>
@@ -11252,8 +11525,8 @@
                 <a:solidFill>
                   <a:srgbClr val="2E7D32"/>
                 </a:solidFill>
-                <a:latin typeface="Tahoma"/>
-                <a:cs typeface="Tahoma"/>
+                <a:latin typeface="Vazirmatn"/>
+                <a:cs typeface="Vazirmatn"/>
               </a:rPr>
               <a:t>16</a:t>
             </a:r>
@@ -11430,8 +11703,8 @@
                 <a:solidFill>
                   <a:srgbClr val="FFFFFF"/>
                 </a:solidFill>
-                <a:latin typeface="Tahoma"/>
-                <a:cs typeface="Tahoma"/>
+                <a:latin typeface="Vazirmatn"/>
+                <a:cs typeface="Vazirmatn"/>
               </a:rPr>
               <a:t>Chip نزدیک Green</a:t>
             </a:r>
@@ -11520,8 +11793,8 @@
                 <a:solidFill>
                   <a:srgbClr val="2E7D32"/>
                 </a:solidFill>
-                <a:latin typeface="Tahoma"/>
-                <a:cs typeface="Tahoma"/>
+                <a:latin typeface="Vazirmatn"/>
+                <a:cs typeface="Vazirmatn"/>
               </a:rPr>
               <a:t>فصل چهاردهم</a:t>
             </a:r>
@@ -11543,8 +11816,8 @@
                 <a:solidFill>
                   <a:srgbClr val="1F2A24"/>
                 </a:solidFill>
-                <a:latin typeface="Tahoma"/>
-                <a:cs typeface="Tahoma"/>
+                <a:latin typeface="Vazirmatn"/>
+                <a:cs typeface="Vazirmatn"/>
               </a:rPr>
               <a:t>ضربه Chip</a:t>
             </a:r>
@@ -11633,8 +11906,8 @@
                 <a:solidFill>
                   <a:srgbClr val="2E7D32"/>
                 </a:solidFill>
-                <a:latin typeface="Tahoma"/>
-                <a:cs typeface="Tahoma"/>
+                <a:latin typeface="Vazirmatn"/>
+                <a:cs typeface="Vazirmatn"/>
               </a:rPr>
               <a:t>●  </a:t>
             </a:r>
@@ -11643,8 +11916,8 @@
                 <a:solidFill>
                   <a:srgbClr val="1F2A24"/>
                 </a:solidFill>
-                <a:latin typeface="Tahoma"/>
-                <a:cs typeface="Tahoma"/>
+                <a:latin typeface="Vazirmatn"/>
+                <a:cs typeface="Vazirmatn"/>
               </a:rPr>
               <a:t>Chip معمولاً نزدیک Green استفاده می‌شود</a:t>
             </a:r>
@@ -11666,8 +11939,8 @@
                 <a:solidFill>
                   <a:srgbClr val="2E7D32"/>
                 </a:solidFill>
-                <a:latin typeface="Tahoma"/>
-                <a:cs typeface="Tahoma"/>
+                <a:latin typeface="Vazirmatn"/>
+                <a:cs typeface="Vazirmatn"/>
               </a:rPr>
               <a:t>●  </a:t>
             </a:r>
@@ -11676,8 +11949,8 @@
                 <a:solidFill>
                   <a:srgbClr val="2E7D32"/>
                 </a:solidFill>
-                <a:latin typeface="Tahoma"/>
-                <a:cs typeface="Tahoma"/>
+                <a:latin typeface="Vazirmatn"/>
+                <a:cs typeface="Vazirmatn"/>
               </a:rPr>
               <a:t>هدف</a:t>
             </a:r>
@@ -11686,8 +11959,8 @@
                 <a:solidFill>
                   <a:srgbClr val="1F2A24"/>
                 </a:solidFill>
-                <a:latin typeface="Tahoma"/>
-                <a:cs typeface="Tahoma"/>
+                <a:latin typeface="Vazirmatn"/>
+                <a:cs typeface="Vazirmatn"/>
               </a:rPr>
               <a:t>  —  توپ کمی در هوا، بیشتر روی زمین بغلتد</a:t>
             </a:r>
@@ -11709,8 +11982,8 @@
                 <a:solidFill>
                   <a:srgbClr val="2E7D32"/>
                 </a:solidFill>
-                <a:latin typeface="Tahoma"/>
-                <a:cs typeface="Tahoma"/>
+                <a:latin typeface="Vazirmatn"/>
+                <a:cs typeface="Vazirmatn"/>
               </a:rPr>
               <a:t>●  </a:t>
             </a:r>
@@ -11719,8 +11992,8 @@
                 <a:solidFill>
                   <a:srgbClr val="2E7D32"/>
                 </a:solidFill>
-                <a:latin typeface="Tahoma"/>
-                <a:cs typeface="Tahoma"/>
+                <a:latin typeface="Vazirmatn"/>
+                <a:cs typeface="Vazirmatn"/>
               </a:rPr>
               <a:t>Setup</a:t>
             </a:r>
@@ -11729,8 +12002,8 @@
                 <a:solidFill>
                   <a:srgbClr val="1F2A24"/>
                 </a:solidFill>
-                <a:latin typeface="Tahoma"/>
-                <a:cs typeface="Tahoma"/>
+                <a:latin typeface="Vazirmatn"/>
+                <a:cs typeface="Vazirmatn"/>
               </a:rPr>
               <a:t>  —  Stance باریک، وزن بیشتر روی پای جلو</a:t>
             </a:r>
@@ -11752,8 +12025,8 @@
                 <a:solidFill>
                   <a:srgbClr val="2E7D32"/>
                 </a:solidFill>
-                <a:latin typeface="Tahoma"/>
-                <a:cs typeface="Tahoma"/>
+                <a:latin typeface="Vazirmatn"/>
+                <a:cs typeface="Vazirmatn"/>
               </a:rPr>
               <a:t>●  </a:t>
             </a:r>
@@ -11762,8 +12035,8 @@
                 <a:solidFill>
                   <a:srgbClr val="1F2A24"/>
                 </a:solidFill>
-                <a:latin typeface="Tahoma"/>
-                <a:cs typeface="Tahoma"/>
+                <a:latin typeface="Vazirmatn"/>
+                <a:cs typeface="Vazirmatn"/>
               </a:rPr>
               <a:t>توپ وسط یا کمی عقب، دست‌ها کمی جلوتر</a:t>
             </a:r>
@@ -11785,8 +12058,8 @@
                 <a:solidFill>
                   <a:srgbClr val="2E7D32"/>
                 </a:solidFill>
-                <a:latin typeface="Tahoma"/>
-                <a:cs typeface="Tahoma"/>
+                <a:latin typeface="Vazirmatn"/>
+                <a:cs typeface="Vazirmatn"/>
               </a:rPr>
               <a:t>●  </a:t>
             </a:r>
@@ -11795,8 +12068,8 @@
                 <a:solidFill>
                   <a:srgbClr val="2E7D32"/>
                 </a:solidFill>
-                <a:latin typeface="Tahoma"/>
-                <a:cs typeface="Tahoma"/>
+                <a:latin typeface="Vazirmatn"/>
+                <a:cs typeface="Vazirmatn"/>
               </a:rPr>
               <a:t>حرکت مانند پاندول</a:t>
             </a:r>
@@ -11805,8 +12078,8 @@
                 <a:solidFill>
                   <a:srgbClr val="1F2A24"/>
                 </a:solidFill>
-                <a:latin typeface="Tahoma"/>
-                <a:cs typeface="Tahoma"/>
+                <a:latin typeface="Vazirmatn"/>
+                <a:cs typeface="Vazirmatn"/>
               </a:rPr>
               <a:t>  —  Back ← Impact ← Through</a:t>
             </a:r>
@@ -11828,8 +12101,8 @@
                 <a:solidFill>
                   <a:srgbClr val="2E7D32"/>
                 </a:solidFill>
-                <a:latin typeface="Tahoma"/>
-                <a:cs typeface="Tahoma"/>
+                <a:latin typeface="Vazirmatn"/>
+                <a:cs typeface="Vazirmatn"/>
               </a:rPr>
               <a:t>●  </a:t>
             </a:r>
@@ -11838,8 +12111,8 @@
                 <a:solidFill>
                   <a:srgbClr val="1F2A24"/>
                 </a:solidFill>
-                <a:latin typeface="Tahoma"/>
-                <a:cs typeface="Tahoma"/>
+                <a:latin typeface="Vazirmatn"/>
+                <a:cs typeface="Vazirmatn"/>
               </a:rPr>
               <a:t>قبل از ضربه مشخص کنید توپ کجا فرود آید، سپس Roll را حساب کنید</a:t>
             </a:r>
@@ -11974,8 +12247,8 @@
                 <a:solidFill>
                   <a:srgbClr val="2E7D32"/>
                 </a:solidFill>
-                <a:latin typeface="Tahoma"/>
-                <a:cs typeface="Tahoma"/>
+                <a:latin typeface="Vazirmatn"/>
+                <a:cs typeface="Vazirmatn"/>
               </a:rPr>
               <a:t>نکته مربی:  </a:t>
             </a:r>
@@ -11984,8 +12257,8 @@
                 <a:solidFill>
                   <a:srgbClr val="1F2A24"/>
                 </a:solidFill>
-                <a:latin typeface="Tahoma"/>
-                <a:cs typeface="Tahoma"/>
+                <a:latin typeface="Vazirmatn"/>
+                <a:cs typeface="Vazirmatn"/>
               </a:rPr>
               <a:t>اول نقطه فرود را انتخاب کنید؛ مقدار Roll را بعد از آن در نظر بگیرید.</a:t>
             </a:r>
@@ -12001,7 +12274,7 @@
         <p:spPr>
           <a:xfrm>
             <a:off x="502920" y="6400800"/>
-            <a:ext cx="5486400" cy="320040"/>
+            <a:ext cx="6858000" cy="320040"/>
           </a:xfrm>
           <a:prstGeom prst="rect">
             <a:avLst/>
@@ -12026,14 +12299,24 @@
               </a:spcAft>
             </a:pPr>
             <a:r>
+              <a:rPr sz="1100" b="1" i="0">
+                <a:solidFill>
+                  <a:srgbClr val="2E7D32"/>
+                </a:solidFill>
+                <a:latin typeface="Vazirmatn"/>
+                <a:cs typeface="Vazirmatn"/>
+              </a:rPr>
+              <a:t>⛳ Puttclub</a:t>
+            </a:r>
+            <a:r>
               <a:rPr sz="1000" b="0" i="0">
                 <a:solidFill>
                   <a:srgbClr val="5C6B62"/>
                 </a:solidFill>
-                <a:latin typeface="Tahoma"/>
-                <a:cs typeface="Tahoma"/>
-              </a:rPr>
-              <a:t>Golf Academy  ·  Beginner · Level 1</a:t>
+                <a:latin typeface="Vazirmatn"/>
+                <a:cs typeface="Vazirmatn"/>
+              </a:rPr>
+              <a:t>   ·   Beginner · Level 1</a:t>
             </a:r>
           </a:p>
         </p:txBody>
@@ -12076,8 +12359,8 @@
                 <a:solidFill>
                   <a:srgbClr val="2E7D32"/>
                 </a:solidFill>
-                <a:latin typeface="Tahoma"/>
-                <a:cs typeface="Tahoma"/>
+                <a:latin typeface="Vazirmatn"/>
+                <a:cs typeface="Vazirmatn"/>
               </a:rPr>
               <a:t>17</a:t>
             </a:r>
@@ -12228,8 +12511,8 @@
                 <a:solidFill>
                   <a:srgbClr val="2E7D32"/>
                 </a:solidFill>
-                <a:latin typeface="Tahoma"/>
-                <a:cs typeface="Tahoma"/>
+                <a:latin typeface="Vazirmatn"/>
+                <a:cs typeface="Vazirmatn"/>
               </a:rPr>
               <a:t>فصل پانزدهم</a:t>
             </a:r>
@@ -12251,8 +12534,8 @@
                 <a:solidFill>
                   <a:srgbClr val="1F2A24"/>
                 </a:solidFill>
-                <a:latin typeface="Tahoma"/>
-                <a:cs typeface="Tahoma"/>
+                <a:latin typeface="Vazirmatn"/>
+                <a:cs typeface="Vazirmatn"/>
               </a:rPr>
               <a:t>Putting</a:t>
             </a:r>
@@ -12341,8 +12624,8 @@
                 <a:solidFill>
                   <a:srgbClr val="2E7D32"/>
                 </a:solidFill>
-                <a:latin typeface="Tahoma"/>
-                <a:cs typeface="Tahoma"/>
+                <a:latin typeface="Vazirmatn"/>
+                <a:cs typeface="Vazirmatn"/>
               </a:rPr>
               <a:t>●  </a:t>
             </a:r>
@@ -12351,8 +12634,8 @@
                 <a:solidFill>
                   <a:srgbClr val="1F2A24"/>
                 </a:solidFill>
-                <a:latin typeface="Tahoma"/>
-                <a:cs typeface="Tahoma"/>
+                <a:latin typeface="Vazirmatn"/>
+                <a:cs typeface="Vazirmatn"/>
               </a:rPr>
               <a:t>Putting یکی از مهم‌ترین مهارت‌های گلف است</a:t>
             </a:r>
@@ -12374,8 +12657,8 @@
                 <a:solidFill>
                   <a:srgbClr val="2E7D32"/>
                 </a:solidFill>
-                <a:latin typeface="Tahoma"/>
-                <a:cs typeface="Tahoma"/>
+                <a:latin typeface="Vazirmatn"/>
+                <a:cs typeface="Vazirmatn"/>
               </a:rPr>
               <a:t>●  </a:t>
             </a:r>
@@ -12384,8 +12667,8 @@
                 <a:solidFill>
                   <a:srgbClr val="2E7D32"/>
                 </a:solidFill>
-                <a:latin typeface="Tahoma"/>
-                <a:cs typeface="Tahoma"/>
+                <a:latin typeface="Vazirmatn"/>
+                <a:cs typeface="Vazirmatn"/>
               </a:rPr>
               <a:t>چهار موضوع اصلی در دوره مقدماتی</a:t>
             </a:r>
@@ -12407,8 +12690,8 @@
                 <a:solidFill>
                   <a:srgbClr val="2E7D32"/>
                 </a:solidFill>
-                <a:latin typeface="Tahoma"/>
-                <a:cs typeface="Tahoma"/>
+                <a:latin typeface="Vazirmatn"/>
+                <a:cs typeface="Vazirmatn"/>
               </a:rPr>
               <a:t>–  </a:t>
             </a:r>
@@ -12417,8 +12700,8 @@
                 <a:solidFill>
                   <a:srgbClr val="1F2A24"/>
                 </a:solidFill>
-                <a:latin typeface="Tahoma"/>
-                <a:cs typeface="Tahoma"/>
+                <a:latin typeface="Vazirmatn"/>
+                <a:cs typeface="Vazirmatn"/>
               </a:rPr>
               <a:t>Grip:: گرفتن صحیح Putter</a:t>
             </a:r>
@@ -12440,8 +12723,8 @@
                 <a:solidFill>
                   <a:srgbClr val="2E7D32"/>
                 </a:solidFill>
-                <a:latin typeface="Tahoma"/>
-                <a:cs typeface="Tahoma"/>
+                <a:latin typeface="Vazirmatn"/>
+                <a:cs typeface="Vazirmatn"/>
               </a:rPr>
               <a:t>–  </a:t>
             </a:r>
@@ -12450,8 +12733,8 @@
                 <a:solidFill>
                   <a:srgbClr val="1F2A24"/>
                 </a:solidFill>
-                <a:latin typeface="Tahoma"/>
-                <a:cs typeface="Tahoma"/>
+                <a:latin typeface="Vazirmatn"/>
+                <a:cs typeface="Vazirmatn"/>
               </a:rPr>
               <a:t>Stance:: قرارگیری مناسب بدن</a:t>
             </a:r>
@@ -12473,8 +12756,8 @@
                 <a:solidFill>
                   <a:srgbClr val="2E7D32"/>
                 </a:solidFill>
-                <a:latin typeface="Tahoma"/>
-                <a:cs typeface="Tahoma"/>
+                <a:latin typeface="Vazirmatn"/>
+                <a:cs typeface="Vazirmatn"/>
               </a:rPr>
               <a:t>–  </a:t>
             </a:r>
@@ -12483,8 +12766,8 @@
                 <a:solidFill>
                   <a:srgbClr val="1F2A24"/>
                 </a:solidFill>
-                <a:latin typeface="Tahoma"/>
-                <a:cs typeface="Tahoma"/>
+                <a:latin typeface="Vazirmatn"/>
+                <a:cs typeface="Vazirmatn"/>
               </a:rPr>
               <a:t>Alignment:: تنظیم نسبت به خط هدف</a:t>
             </a:r>
@@ -12506,8 +12789,8 @@
                 <a:solidFill>
                   <a:srgbClr val="2E7D32"/>
                 </a:solidFill>
-                <a:latin typeface="Tahoma"/>
-                <a:cs typeface="Tahoma"/>
+                <a:latin typeface="Vazirmatn"/>
+                <a:cs typeface="Vazirmatn"/>
               </a:rPr>
               <a:t>–  </a:t>
             </a:r>
@@ -12516,8 +12799,8 @@
                 <a:solidFill>
                   <a:srgbClr val="1F2A24"/>
                 </a:solidFill>
-                <a:latin typeface="Tahoma"/>
-                <a:cs typeface="Tahoma"/>
+                <a:latin typeface="Vazirmatn"/>
+                <a:cs typeface="Vazirmatn"/>
               </a:rPr>
               <a:t>Distance Control:: کنترل سرعت و فاصله</a:t>
             </a:r>
@@ -12539,8 +12822,8 @@
                 <a:solidFill>
                   <a:srgbClr val="2E7D32"/>
                 </a:solidFill>
-                <a:latin typeface="Tahoma"/>
-                <a:cs typeface="Tahoma"/>
+                <a:latin typeface="Vazirmatn"/>
+                <a:cs typeface="Vazirmatn"/>
               </a:rPr>
               <a:t>●  </a:t>
             </a:r>
@@ -12549,8 +12832,8 @@
                 <a:solidFill>
                   <a:srgbClr val="1F2A24"/>
                 </a:solidFill>
-                <a:latin typeface="Tahoma"/>
-                <a:cs typeface="Tahoma"/>
+                <a:latin typeface="Vazirmatn"/>
+                <a:cs typeface="Vazirmatn"/>
               </a:rPr>
               <a:t>حرکت Putter باید ساده و کنترل‌شده باشد</a:t>
             </a:r>
@@ -12685,8 +12968,8 @@
                 <a:solidFill>
                   <a:srgbClr val="2E7D32"/>
                 </a:solidFill>
-                <a:latin typeface="Tahoma"/>
-                <a:cs typeface="Tahoma"/>
+                <a:latin typeface="Vazirmatn"/>
+                <a:cs typeface="Vazirmatn"/>
               </a:rPr>
               <a:t>💡 </a:t>
             </a:r>
@@ -12695,8 +12978,8 @@
                 <a:solidFill>
                   <a:srgbClr val="1F2A24"/>
                 </a:solidFill>
-                <a:latin typeface="Tahoma"/>
-                <a:cs typeface="Tahoma"/>
+                <a:latin typeface="Vazirmatn"/>
+                <a:cs typeface="Vazirmatn"/>
               </a:rPr>
               <a:t>بیشترین ضربه‌های یک راند روی Green زده می‌شود؛ روی Putting وقت بگذارید.</a:t>
             </a:r>
@@ -12712,7 +12995,7 @@
         <p:spPr>
           <a:xfrm>
             <a:off x="502920" y="6400800"/>
-            <a:ext cx="5486400" cy="320040"/>
+            <a:ext cx="6858000" cy="320040"/>
           </a:xfrm>
           <a:prstGeom prst="rect">
             <a:avLst/>
@@ -12737,14 +13020,24 @@
               </a:spcAft>
             </a:pPr>
             <a:r>
+              <a:rPr sz="1100" b="1" i="0">
+                <a:solidFill>
+                  <a:srgbClr val="2E7D32"/>
+                </a:solidFill>
+                <a:latin typeface="Vazirmatn"/>
+                <a:cs typeface="Vazirmatn"/>
+              </a:rPr>
+              <a:t>⛳ Puttclub</a:t>
+            </a:r>
+            <a:r>
               <a:rPr sz="1000" b="0" i="0">
                 <a:solidFill>
                   <a:srgbClr val="5C6B62"/>
                 </a:solidFill>
-                <a:latin typeface="Tahoma"/>
-                <a:cs typeface="Tahoma"/>
-              </a:rPr>
-              <a:t>Golf Academy  ·  Beginner · Level 1</a:t>
+                <a:latin typeface="Vazirmatn"/>
+                <a:cs typeface="Vazirmatn"/>
+              </a:rPr>
+              <a:t>   ·   Beginner · Level 1</a:t>
             </a:r>
           </a:p>
         </p:txBody>
@@ -12787,8 +13080,8 @@
                 <a:solidFill>
                   <a:srgbClr val="2E7D32"/>
                 </a:solidFill>
-                <a:latin typeface="Tahoma"/>
-                <a:cs typeface="Tahoma"/>
+                <a:latin typeface="Vazirmatn"/>
+                <a:cs typeface="Vazirmatn"/>
               </a:rPr>
               <a:t>18</a:t>
             </a:r>
@@ -12965,8 +13258,8 @@
                 <a:solidFill>
                   <a:srgbClr val="FFFFFF"/>
                 </a:solidFill>
-                <a:latin typeface="Tahoma"/>
-                <a:cs typeface="Tahoma"/>
+                <a:latin typeface="Vazirmatn"/>
+                <a:cs typeface="Vazirmatn"/>
               </a:rPr>
               <a:t>توپ نزدیک Hole روی Green</a:t>
             </a:r>
@@ -13055,8 +13348,8 @@
                 <a:solidFill>
                   <a:srgbClr val="2E7D32"/>
                 </a:solidFill>
-                <a:latin typeface="Tahoma"/>
-                <a:cs typeface="Tahoma"/>
+                <a:latin typeface="Vazirmatn"/>
+                <a:cs typeface="Vazirmatn"/>
               </a:rPr>
               <a:t>فصل شانزدهم</a:t>
             </a:r>
@@ -13078,8 +13371,8 @@
                 <a:solidFill>
                   <a:srgbClr val="1F2A24"/>
                 </a:solidFill>
-                <a:latin typeface="Tahoma"/>
-                <a:cs typeface="Tahoma"/>
+                <a:latin typeface="Vazirmatn"/>
+                <a:cs typeface="Vazirmatn"/>
               </a:rPr>
               <a:t>تمرین Putting</a:t>
             </a:r>
@@ -13168,8 +13461,8 @@
                 <a:solidFill>
                   <a:srgbClr val="2E7D32"/>
                 </a:solidFill>
-                <a:latin typeface="Tahoma"/>
-                <a:cs typeface="Tahoma"/>
+                <a:latin typeface="Vazirmatn"/>
+                <a:cs typeface="Vazirmatn"/>
               </a:rPr>
               <a:t>●  </a:t>
             </a:r>
@@ -13178,8 +13471,8 @@
                 <a:solidFill>
                   <a:srgbClr val="1F2A24"/>
                 </a:solidFill>
-                <a:latin typeface="Tahoma"/>
-                <a:cs typeface="Tahoma"/>
+                <a:latin typeface="Vazirmatn"/>
+                <a:cs typeface="Vazirmatn"/>
               </a:rPr>
               <a:t>توپ‌ها را در فاصله‌های ۲، ۴ و ۶ متری قرار دهید</a:t>
             </a:r>
@@ -13201,8 +13494,8 @@
                 <a:solidFill>
                   <a:srgbClr val="2E7D32"/>
                 </a:solidFill>
-                <a:latin typeface="Tahoma"/>
-                <a:cs typeface="Tahoma"/>
+                <a:latin typeface="Vazirmatn"/>
+                <a:cs typeface="Vazirmatn"/>
               </a:rPr>
               <a:t>●  </a:t>
             </a:r>
@@ -13211,8 +13504,8 @@
                 <a:solidFill>
                   <a:srgbClr val="1F2A24"/>
                 </a:solidFill>
-                <a:latin typeface="Tahoma"/>
-                <a:cs typeface="Tahoma"/>
+                <a:latin typeface="Vazirmatn"/>
+                <a:cs typeface="Vazirmatn"/>
               </a:rPr>
               <a:t>در ابتدا هدف فقط Hole کردن نیست</a:t>
             </a:r>
@@ -13234,8 +13527,8 @@
                 <a:solidFill>
                   <a:srgbClr val="2E7D32"/>
                 </a:solidFill>
-                <a:latin typeface="Tahoma"/>
-                <a:cs typeface="Tahoma"/>
+                <a:latin typeface="Vazirmatn"/>
+                <a:cs typeface="Vazirmatn"/>
               </a:rPr>
               <a:t>●  </a:t>
             </a:r>
@@ -13244,8 +13537,8 @@
                 <a:solidFill>
                   <a:srgbClr val="2E7D32"/>
                 </a:solidFill>
-                <a:latin typeface="Tahoma"/>
-                <a:cs typeface="Tahoma"/>
+                <a:latin typeface="Vazirmatn"/>
+                <a:cs typeface="Vazirmatn"/>
               </a:rPr>
               <a:t>هدف اصلی</a:t>
             </a:r>
@@ -13254,8 +13547,8 @@
                 <a:solidFill>
                   <a:srgbClr val="1F2A24"/>
                 </a:solidFill>
-                <a:latin typeface="Tahoma"/>
-                <a:cs typeface="Tahoma"/>
+                <a:latin typeface="Vazirmatn"/>
+                <a:cs typeface="Vazirmatn"/>
               </a:rPr>
               <a:t>  —  کنترل سرعت توپ</a:t>
             </a:r>
@@ -13277,8 +13570,8 @@
                 <a:solidFill>
                   <a:srgbClr val="2E7D32"/>
                 </a:solidFill>
-                <a:latin typeface="Tahoma"/>
-                <a:cs typeface="Tahoma"/>
+                <a:latin typeface="Vazirmatn"/>
+                <a:cs typeface="Vazirmatn"/>
               </a:rPr>
               <a:t>●  </a:t>
             </a:r>
@@ -13287,8 +13580,8 @@
                 <a:solidFill>
                   <a:srgbClr val="1F2A24"/>
                 </a:solidFill>
-                <a:latin typeface="Tahoma"/>
-                <a:cs typeface="Tahoma"/>
+                <a:latin typeface="Vazirmatn"/>
+                <a:cs typeface="Vazirmatn"/>
               </a:rPr>
               <a:t>توپ باید در اطراف Hole متوقف شود</a:t>
             </a:r>
@@ -13310,8 +13603,8 @@
                 <a:solidFill>
                   <a:srgbClr val="2E7D32"/>
                 </a:solidFill>
-                <a:latin typeface="Tahoma"/>
-                <a:cs typeface="Tahoma"/>
+                <a:latin typeface="Vazirmatn"/>
+                <a:cs typeface="Vazirmatn"/>
               </a:rPr>
               <a:t>●  </a:t>
             </a:r>
@@ -13320,8 +13613,8 @@
                 <a:solidFill>
                   <a:srgbClr val="1F2A24"/>
                 </a:solidFill>
-                <a:latin typeface="Tahoma"/>
-                <a:cs typeface="Tahoma"/>
+                <a:latin typeface="Vazirmatn"/>
+                <a:cs typeface="Vazirmatn"/>
               </a:rPr>
               <a:t>سپس تمرین Short Putts را انجام دهید</a:t>
             </a:r>
@@ -13343,8 +13636,8 @@
                 <a:solidFill>
                   <a:srgbClr val="2E7D32"/>
                 </a:solidFill>
-                <a:latin typeface="Tahoma"/>
-                <a:cs typeface="Tahoma"/>
+                <a:latin typeface="Vazirmatn"/>
+                <a:cs typeface="Vazirmatn"/>
               </a:rPr>
               <a:t>●  </a:t>
             </a:r>
@@ -13353,8 +13646,8 @@
                 <a:solidFill>
                   <a:srgbClr val="1F2A24"/>
                 </a:solidFill>
-                <a:latin typeface="Tahoma"/>
-                <a:cs typeface="Tahoma"/>
+                <a:latin typeface="Vazirmatn"/>
+                <a:cs typeface="Vazirmatn"/>
               </a:rPr>
               <a:t>حس فاصله با تکرار ساخته می‌شود</a:t>
             </a:r>
@@ -13489,8 +13782,8 @@
                 <a:solidFill>
                   <a:srgbClr val="2E7D32"/>
                 </a:solidFill>
-                <a:latin typeface="Tahoma"/>
-                <a:cs typeface="Tahoma"/>
+                <a:latin typeface="Vazirmatn"/>
+                <a:cs typeface="Vazirmatn"/>
               </a:rPr>
               <a:t>نکته مربی:  </a:t>
             </a:r>
@@ -13499,8 +13792,8 @@
                 <a:solidFill>
                   <a:srgbClr val="1F2A24"/>
                 </a:solidFill>
-                <a:latin typeface="Tahoma"/>
-                <a:cs typeface="Tahoma"/>
+                <a:latin typeface="Vazirmatn"/>
+                <a:cs typeface="Vazirmatn"/>
               </a:rPr>
               <a:t>اگر توپ همیشه با سرعت مناسب به Hole برسد، شانس Hole شدن بسیار بالا می‌رود.</a:t>
             </a:r>
@@ -13516,7 +13809,7 @@
         <p:spPr>
           <a:xfrm>
             <a:off x="502920" y="6400800"/>
-            <a:ext cx="5486400" cy="320040"/>
+            <a:ext cx="6858000" cy="320040"/>
           </a:xfrm>
           <a:prstGeom prst="rect">
             <a:avLst/>
@@ -13541,14 +13834,24 @@
               </a:spcAft>
             </a:pPr>
             <a:r>
+              <a:rPr sz="1100" b="1" i="0">
+                <a:solidFill>
+                  <a:srgbClr val="2E7D32"/>
+                </a:solidFill>
+                <a:latin typeface="Vazirmatn"/>
+                <a:cs typeface="Vazirmatn"/>
+              </a:rPr>
+              <a:t>⛳ Puttclub</a:t>
+            </a:r>
+            <a:r>
               <a:rPr sz="1000" b="0" i="0">
                 <a:solidFill>
                   <a:srgbClr val="5C6B62"/>
                 </a:solidFill>
-                <a:latin typeface="Tahoma"/>
-                <a:cs typeface="Tahoma"/>
-              </a:rPr>
-              <a:t>Golf Academy  ·  Beginner · Level 1</a:t>
+                <a:latin typeface="Vazirmatn"/>
+                <a:cs typeface="Vazirmatn"/>
+              </a:rPr>
+              <a:t>   ·   Beginner · Level 1</a:t>
             </a:r>
           </a:p>
         </p:txBody>
@@ -13591,8 +13894,8 @@
                 <a:solidFill>
                   <a:srgbClr val="2E7D32"/>
                 </a:solidFill>
-                <a:latin typeface="Tahoma"/>
-                <a:cs typeface="Tahoma"/>
+                <a:latin typeface="Vazirmatn"/>
+                <a:cs typeface="Vazirmatn"/>
               </a:rPr>
               <a:t>19</a:t>
             </a:r>
@@ -13740,8 +14043,8 @@
             </a:pPr>
             <a:r>
               <a:rPr sz="15000" b="1" i="0">
-                <a:latin typeface="Tahoma"/>
-                <a:cs typeface="Tahoma"/>
+                <a:latin typeface="Vazirmatn"/>
+                <a:cs typeface="Vazirmatn"/>
                 <a:solidFill>
                   <a:srgbClr val="FFFFFF">
                     <a:alpha val="22000"/>
@@ -13791,8 +14094,8 @@
                 <a:solidFill>
                   <a:srgbClr val="FFFFFF"/>
                 </a:solidFill>
-                <a:latin typeface="Tahoma"/>
-                <a:cs typeface="Tahoma"/>
+                <a:latin typeface="Vazirmatn"/>
+                <a:cs typeface="Vazirmatn"/>
               </a:rPr>
               <a:t>هدف نهایی دوره</a:t>
             </a:r>
@@ -13814,8 +14117,8 @@
                 <a:solidFill>
                   <a:srgbClr val="EAF3E8"/>
                 </a:solidFill>
-                <a:latin typeface="Tahoma"/>
-                <a:cs typeface="Tahoma"/>
+                <a:latin typeface="Vazirmatn"/>
+                <a:cs typeface="Vazirmatn"/>
               </a:rPr>
               <a:t>ساختن پایه‌ای صحیح برای ادامه مسیر گلف</a:t>
             </a:r>
@@ -13860,8 +14163,8 @@
                 <a:solidFill>
                   <a:srgbClr val="9CCC65"/>
                 </a:solidFill>
-                <a:latin typeface="Tahoma"/>
-                <a:cs typeface="Tahoma"/>
+                <a:latin typeface="Vazirmatn"/>
+                <a:cs typeface="Vazirmatn"/>
               </a:rPr>
               <a:t>●  </a:t>
             </a:r>
@@ -13870,8 +14173,8 @@
                 <a:solidFill>
                   <a:srgbClr val="FFFFFF"/>
                 </a:solidFill>
-                <a:latin typeface="Tahoma"/>
-                <a:cs typeface="Tahoma"/>
+                <a:latin typeface="Vazirmatn"/>
+                <a:cs typeface="Vazirmatn"/>
               </a:rPr>
               <a:t>ضربات پایه را با اصول صحیح اجرا کند</a:t>
             </a:r>
@@ -13893,8 +14196,8 @@
                 <a:solidFill>
                   <a:srgbClr val="9CCC65"/>
                 </a:solidFill>
-                <a:latin typeface="Tahoma"/>
-                <a:cs typeface="Tahoma"/>
+                <a:latin typeface="Vazirmatn"/>
+                <a:cs typeface="Vazirmatn"/>
               </a:rPr>
               <a:t>●  </a:t>
             </a:r>
@@ -13903,8 +14206,8 @@
                 <a:solidFill>
                   <a:srgbClr val="FFFFFF"/>
                 </a:solidFill>
-                <a:latin typeface="Tahoma"/>
-                <a:cs typeface="Tahoma"/>
+                <a:latin typeface="Vazirmatn"/>
+                <a:cs typeface="Vazirmatn"/>
               </a:rPr>
               <a:t>زمین و تجهیزات را بشناسد</a:t>
             </a:r>
@@ -13926,8 +14229,8 @@
                 <a:solidFill>
                   <a:srgbClr val="9CCC65"/>
                 </a:solidFill>
-                <a:latin typeface="Tahoma"/>
-                <a:cs typeface="Tahoma"/>
+                <a:latin typeface="Vazirmatn"/>
+                <a:cs typeface="Vazirmatn"/>
               </a:rPr>
               <a:t>●  </a:t>
             </a:r>
@@ -13936,8 +14239,8 @@
                 <a:solidFill>
                   <a:srgbClr val="FFFFFF"/>
                 </a:solidFill>
-                <a:latin typeface="Tahoma"/>
-                <a:cs typeface="Tahoma"/>
+                <a:latin typeface="Vazirmatn"/>
+                <a:cs typeface="Vazirmatn"/>
               </a:rPr>
               <a:t>قوانین ابتدایی را رعایت کند</a:t>
             </a:r>
@@ -13959,8 +14262,8 @@
                 <a:solidFill>
                   <a:srgbClr val="9CCC65"/>
                 </a:solidFill>
-                <a:latin typeface="Tahoma"/>
-                <a:cs typeface="Tahoma"/>
+                <a:latin typeface="Vazirmatn"/>
+                <a:cs typeface="Vazirmatn"/>
               </a:rPr>
               <a:t>●  </a:t>
             </a:r>
@@ -13969,8 +14272,8 @@
                 <a:solidFill>
                   <a:srgbClr val="FFFFFF"/>
                 </a:solidFill>
-                <a:latin typeface="Tahoma"/>
-                <a:cs typeface="Tahoma"/>
+                <a:latin typeface="Vazirmatn"/>
+                <a:cs typeface="Vazirmatn"/>
               </a:rPr>
               <a:t>یک بازی ساده را مدیریت کند</a:t>
             </a:r>
@@ -13992,8 +14295,8 @@
                 <a:solidFill>
                   <a:srgbClr val="9CCC65"/>
                 </a:solidFill>
-                <a:latin typeface="Tahoma"/>
-                <a:cs typeface="Tahoma"/>
+                <a:latin typeface="Vazirmatn"/>
+                <a:cs typeface="Vazirmatn"/>
               </a:rPr>
               <a:t>●  </a:t>
             </a:r>
@@ -14002,8 +14305,8 @@
                 <a:solidFill>
                   <a:srgbClr val="FFFFFF"/>
                 </a:solidFill>
-                <a:latin typeface="Tahoma"/>
-                <a:cs typeface="Tahoma"/>
+                <a:latin typeface="Vazirmatn"/>
+                <a:cs typeface="Vazirmatn"/>
               </a:rPr>
               <a:t>امتیاز خود را درست ثبت کند</a:t>
             </a:r>
@@ -14019,7 +14322,7 @@
         <p:spPr>
           <a:xfrm>
             <a:off x="502920" y="6400800"/>
-            <a:ext cx="5486400" cy="320040"/>
+            <a:ext cx="6858000" cy="320040"/>
           </a:xfrm>
           <a:prstGeom prst="rect">
             <a:avLst/>
@@ -14044,14 +14347,24 @@
               </a:spcAft>
             </a:pPr>
             <a:r>
+              <a:rPr sz="1100" b="1" i="0">
+                <a:solidFill>
+                  <a:srgbClr val="9CCC65"/>
+                </a:solidFill>
+                <a:latin typeface="Vazirmatn"/>
+                <a:cs typeface="Vazirmatn"/>
+              </a:rPr>
+              <a:t>⛳ Puttclub</a:t>
+            </a:r>
+            <a:r>
               <a:rPr sz="1000" b="0" i="0">
                 <a:solidFill>
                   <a:srgbClr val="FFFFFF"/>
                 </a:solidFill>
-                <a:latin typeface="Tahoma"/>
-                <a:cs typeface="Tahoma"/>
-              </a:rPr>
-              <a:t>Golf Academy  ·  Beginner · Level 1</a:t>
+                <a:latin typeface="Vazirmatn"/>
+                <a:cs typeface="Vazirmatn"/>
+              </a:rPr>
+              <a:t>   ·   Beginner · Level 1</a:t>
             </a:r>
           </a:p>
         </p:txBody>
@@ -14094,8 +14407,8 @@
                 <a:solidFill>
                   <a:srgbClr val="9CCC65"/>
                 </a:solidFill>
-                <a:latin typeface="Tahoma"/>
-                <a:cs typeface="Tahoma"/>
+                <a:latin typeface="Vazirmatn"/>
+                <a:cs typeface="Vazirmatn"/>
               </a:rPr>
               <a:t>2</a:t>
             </a:r>
@@ -14246,8 +14559,8 @@
                 <a:solidFill>
                   <a:srgbClr val="2E7D32"/>
                 </a:solidFill>
-                <a:latin typeface="Tahoma"/>
-                <a:cs typeface="Tahoma"/>
+                <a:latin typeface="Vazirmatn"/>
+                <a:cs typeface="Vazirmatn"/>
               </a:rPr>
               <a:t>فصل هفدهم</a:t>
             </a:r>
@@ -14269,8 +14582,8 @@
                 <a:solidFill>
                   <a:srgbClr val="1F2A24"/>
                 </a:solidFill>
-                <a:latin typeface="Tahoma"/>
-                <a:cs typeface="Tahoma"/>
+                <a:latin typeface="Vazirmatn"/>
+                <a:cs typeface="Vazirmatn"/>
               </a:rPr>
               <a:t>قوانین پایه</a:t>
             </a:r>
@@ -14449,8 +14762,8 @@
                 <a:solidFill>
                   <a:srgbClr val="2E7D32"/>
                 </a:solidFill>
-                <a:latin typeface="Tahoma"/>
-                <a:cs typeface="Tahoma"/>
+                <a:latin typeface="Vazirmatn"/>
+                <a:cs typeface="Vazirmatn"/>
               </a:rPr>
               <a:t>Tee</a:t>
             </a:r>
@@ -14472,8 +14785,8 @@
                 <a:solidFill>
                   <a:srgbClr val="5C6B62"/>
                 </a:solidFill>
-                <a:latin typeface="Tahoma"/>
-                <a:cs typeface="Tahoma"/>
+                <a:latin typeface="Vazirmatn"/>
+                <a:cs typeface="Vazirmatn"/>
               </a:rPr>
               <a:t>محل شروع هر سوراخ</a:t>
             </a:r>
@@ -14608,8 +14921,8 @@
                 <a:solidFill>
                   <a:srgbClr val="2E7D32"/>
                 </a:solidFill>
-                <a:latin typeface="Tahoma"/>
-                <a:cs typeface="Tahoma"/>
+                <a:latin typeface="Vazirmatn"/>
+                <a:cs typeface="Vazirmatn"/>
               </a:rPr>
               <a:t>Hole</a:t>
             </a:r>
@@ -14631,8 +14944,8 @@
                 <a:solidFill>
                   <a:srgbClr val="5C6B62"/>
                 </a:solidFill>
-                <a:latin typeface="Tahoma"/>
-                <a:cs typeface="Tahoma"/>
+                <a:latin typeface="Vazirmatn"/>
+                <a:cs typeface="Vazirmatn"/>
               </a:rPr>
               <a:t>هدف نهایی توپ</a:t>
             </a:r>
@@ -14767,8 +15080,8 @@
                 <a:solidFill>
                   <a:srgbClr val="2E7D32"/>
                 </a:solidFill>
-                <a:latin typeface="Tahoma"/>
-                <a:cs typeface="Tahoma"/>
+                <a:latin typeface="Vazirmatn"/>
+                <a:cs typeface="Vazirmatn"/>
               </a:rPr>
               <a:t>Stroke</a:t>
             </a:r>
@@ -14790,8 +15103,8 @@
                 <a:solidFill>
                   <a:srgbClr val="5C6B62"/>
                 </a:solidFill>
-                <a:latin typeface="Tahoma"/>
-                <a:cs typeface="Tahoma"/>
+                <a:latin typeface="Vazirmatn"/>
+                <a:cs typeface="Vazirmatn"/>
               </a:rPr>
               <a:t>هر ضربه به توپ</a:t>
             </a:r>
@@ -14926,8 +15239,8 @@
                 <a:solidFill>
                   <a:srgbClr val="2E7D32"/>
                 </a:solidFill>
-                <a:latin typeface="Tahoma"/>
-                <a:cs typeface="Tahoma"/>
+                <a:latin typeface="Vazirmatn"/>
+                <a:cs typeface="Vazirmatn"/>
               </a:rPr>
               <a:t>Penalty</a:t>
             </a:r>
@@ -14949,8 +15262,8 @@
                 <a:solidFill>
                   <a:srgbClr val="5C6B62"/>
                 </a:solidFill>
-                <a:latin typeface="Tahoma"/>
-                <a:cs typeface="Tahoma"/>
+                <a:latin typeface="Vazirmatn"/>
+                <a:cs typeface="Vazirmatn"/>
               </a:rPr>
               <a:t>جریمه خطا</a:t>
             </a:r>
@@ -15085,8 +15398,8 @@
                 <a:solidFill>
                   <a:srgbClr val="2E7D32"/>
                 </a:solidFill>
-                <a:latin typeface="Tahoma"/>
-                <a:cs typeface="Tahoma"/>
+                <a:latin typeface="Vazirmatn"/>
+                <a:cs typeface="Vazirmatn"/>
               </a:rPr>
               <a:t>Out of Bounds</a:t>
             </a:r>
@@ -15108,8 +15421,8 @@
                 <a:solidFill>
                   <a:srgbClr val="5C6B62"/>
                 </a:solidFill>
-                <a:latin typeface="Tahoma"/>
-                <a:cs typeface="Tahoma"/>
+                <a:latin typeface="Vazirmatn"/>
+                <a:cs typeface="Vazirmatn"/>
               </a:rPr>
               <a:t>خارج از محدوده مجاز</a:t>
             </a:r>
@@ -15244,8 +15557,8 @@
                 <a:solidFill>
                   <a:srgbClr val="2E7D32"/>
                 </a:solidFill>
-                <a:latin typeface="Tahoma"/>
-                <a:cs typeface="Tahoma"/>
+                <a:latin typeface="Vazirmatn"/>
+                <a:cs typeface="Vazirmatn"/>
               </a:rPr>
               <a:t>Lost Ball</a:t>
             </a:r>
@@ -15267,8 +15580,8 @@
                 <a:solidFill>
                   <a:srgbClr val="5C6B62"/>
                 </a:solidFill>
-                <a:latin typeface="Tahoma"/>
-                <a:cs typeface="Tahoma"/>
+                <a:latin typeface="Vazirmatn"/>
+                <a:cs typeface="Vazirmatn"/>
               </a:rPr>
               <a:t>توپ گم‌شده</a:t>
             </a:r>
@@ -15403,8 +15716,8 @@
                 <a:solidFill>
                   <a:srgbClr val="2E7D32"/>
                 </a:solidFill>
-                <a:latin typeface="Tahoma"/>
-                <a:cs typeface="Tahoma"/>
+                <a:latin typeface="Vazirmatn"/>
+                <a:cs typeface="Vazirmatn"/>
               </a:rPr>
               <a:t>Penalty Area</a:t>
             </a:r>
@@ -15426,8 +15739,8 @@
                 <a:solidFill>
                   <a:srgbClr val="5C6B62"/>
                 </a:solidFill>
-                <a:latin typeface="Tahoma"/>
-                <a:cs typeface="Tahoma"/>
+                <a:latin typeface="Vazirmatn"/>
+                <a:cs typeface="Vazirmatn"/>
               </a:rPr>
               <a:t>منطقه جریمه (آب و...)</a:t>
             </a:r>
@@ -15562,8 +15875,8 @@
                 <a:solidFill>
                   <a:srgbClr val="2E7D32"/>
                 </a:solidFill>
-                <a:latin typeface="Tahoma"/>
-                <a:cs typeface="Tahoma"/>
+                <a:latin typeface="Vazirmatn"/>
+                <a:cs typeface="Vazirmatn"/>
               </a:rPr>
               <a:t>Bunker</a:t>
             </a:r>
@@ -15585,8 +15898,8 @@
                 <a:solidFill>
                   <a:srgbClr val="5C6B62"/>
                 </a:solidFill>
-                <a:latin typeface="Tahoma"/>
-                <a:cs typeface="Tahoma"/>
+                <a:latin typeface="Vazirmatn"/>
+                <a:cs typeface="Vazirmatn"/>
               </a:rPr>
               <a:t>موانع شنی</a:t>
             </a:r>
@@ -15721,8 +16034,8 @@
                 <a:solidFill>
                   <a:srgbClr val="2E7D32"/>
                 </a:solidFill>
-                <a:latin typeface="Tahoma"/>
-                <a:cs typeface="Tahoma"/>
+                <a:latin typeface="Vazirmatn"/>
+                <a:cs typeface="Vazirmatn"/>
               </a:rPr>
               <a:t>Ground Under Repair</a:t>
             </a:r>
@@ -15744,8 +16057,8 @@
                 <a:solidFill>
                   <a:srgbClr val="5C6B62"/>
                 </a:solidFill>
-                <a:latin typeface="Tahoma"/>
-                <a:cs typeface="Tahoma"/>
+                <a:latin typeface="Vazirmatn"/>
+                <a:cs typeface="Vazirmatn"/>
               </a:rPr>
               <a:t>زمین در دست تعمیر</a:t>
             </a:r>
@@ -15880,8 +16193,8 @@
                 <a:solidFill>
                   <a:srgbClr val="2E7D32"/>
                 </a:solidFill>
-                <a:latin typeface="Tahoma"/>
-                <a:cs typeface="Tahoma"/>
+                <a:latin typeface="Vazirmatn"/>
+                <a:cs typeface="Vazirmatn"/>
               </a:rPr>
               <a:t>Provisional Ball</a:t>
             </a:r>
@@ -15903,8 +16216,8 @@
                 <a:solidFill>
                   <a:srgbClr val="5C6B62"/>
                 </a:solidFill>
-                <a:latin typeface="Tahoma"/>
-                <a:cs typeface="Tahoma"/>
+                <a:latin typeface="Vazirmatn"/>
+                <a:cs typeface="Vazirmatn"/>
               </a:rPr>
               <a:t>توپ موقت</a:t>
             </a:r>
@@ -16039,8 +16352,8 @@
                 <a:solidFill>
                   <a:srgbClr val="2E7D32"/>
                 </a:solidFill>
-                <a:latin typeface="Tahoma"/>
-                <a:cs typeface="Tahoma"/>
+                <a:latin typeface="Vazirmatn"/>
+                <a:cs typeface="Vazirmatn"/>
               </a:rPr>
               <a:t>Local Rules</a:t>
             </a:r>
@@ -16062,8 +16375,8 @@
                 <a:solidFill>
                   <a:srgbClr val="5C6B62"/>
                 </a:solidFill>
-                <a:latin typeface="Tahoma"/>
-                <a:cs typeface="Tahoma"/>
+                <a:latin typeface="Vazirmatn"/>
+                <a:cs typeface="Vazirmatn"/>
               </a:rPr>
               <a:t>قوانین محلی زمین</a:t>
             </a:r>
@@ -16198,8 +16511,8 @@
                 <a:solidFill>
                   <a:srgbClr val="2E7D32"/>
                 </a:solidFill>
-                <a:latin typeface="Tahoma"/>
-                <a:cs typeface="Tahoma"/>
+                <a:latin typeface="Vazirmatn"/>
+                <a:cs typeface="Vazirmatn"/>
               </a:rPr>
               <a:t>Scorecard</a:t>
             </a:r>
@@ -16221,8 +16534,8 @@
                 <a:solidFill>
                   <a:srgbClr val="5C6B62"/>
                 </a:solidFill>
-                <a:latin typeface="Tahoma"/>
-                <a:cs typeface="Tahoma"/>
+                <a:latin typeface="Vazirmatn"/>
+                <a:cs typeface="Vazirmatn"/>
               </a:rPr>
               <a:t>ثبت امتیاز</a:t>
             </a:r>
@@ -16313,8 +16626,8 @@
                 <a:solidFill>
                   <a:srgbClr val="FFFFFF"/>
                 </a:solidFill>
-                <a:latin typeface="Tahoma"/>
-                <a:cs typeface="Tahoma"/>
+                <a:latin typeface="Vazirmatn"/>
+                <a:cs typeface="Vazirmatn"/>
               </a:rPr>
               <a:t>قوانین محلی زمین (Local Rules) ممکن است شرایط خاصی ایجاد کنند.</a:t>
             </a:r>
@@ -16330,7 +16643,7 @@
         <p:spPr>
           <a:xfrm>
             <a:off x="502920" y="6400800"/>
-            <a:ext cx="5486400" cy="320040"/>
+            <a:ext cx="6858000" cy="320040"/>
           </a:xfrm>
           <a:prstGeom prst="rect">
             <a:avLst/>
@@ -16355,14 +16668,24 @@
               </a:spcAft>
             </a:pPr>
             <a:r>
+              <a:rPr sz="1100" b="1" i="0">
+                <a:solidFill>
+                  <a:srgbClr val="2E7D32"/>
+                </a:solidFill>
+                <a:latin typeface="Vazirmatn"/>
+                <a:cs typeface="Vazirmatn"/>
+              </a:rPr>
+              <a:t>⛳ Puttclub</a:t>
+            </a:r>
+            <a:r>
               <a:rPr sz="1000" b="0" i="0">
                 <a:solidFill>
                   <a:srgbClr val="5C6B62"/>
                 </a:solidFill>
-                <a:latin typeface="Tahoma"/>
-                <a:cs typeface="Tahoma"/>
-              </a:rPr>
-              <a:t>Golf Academy  ·  Beginner · Level 1</a:t>
+                <a:latin typeface="Vazirmatn"/>
+                <a:cs typeface="Vazirmatn"/>
+              </a:rPr>
+              <a:t>   ·   Beginner · Level 1</a:t>
             </a:r>
           </a:p>
         </p:txBody>
@@ -16405,8 +16728,8 @@
                 <a:solidFill>
                   <a:srgbClr val="2E7D32"/>
                 </a:solidFill>
-                <a:latin typeface="Tahoma"/>
-                <a:cs typeface="Tahoma"/>
+                <a:latin typeface="Vazirmatn"/>
+                <a:cs typeface="Vazirmatn"/>
               </a:rPr>
               <a:t>20</a:t>
             </a:r>
@@ -16557,8 +16880,8 @@
                 <a:solidFill>
                   <a:srgbClr val="2E7D32"/>
                 </a:solidFill>
-                <a:latin typeface="Tahoma"/>
-                <a:cs typeface="Tahoma"/>
+                <a:latin typeface="Vazirmatn"/>
+                <a:cs typeface="Vazirmatn"/>
               </a:rPr>
               <a:t>فصل هجدهم</a:t>
             </a:r>
@@ -16580,8 +16903,8 @@
                 <a:solidFill>
                   <a:srgbClr val="1F2A24"/>
                 </a:solidFill>
-                <a:latin typeface="Tahoma"/>
-                <a:cs typeface="Tahoma"/>
+                <a:latin typeface="Vazirmatn"/>
+                <a:cs typeface="Vazirmatn"/>
               </a:rPr>
               <a:t>امتیازگیری (Score)</a:t>
             </a:r>
@@ -16667,8 +16990,8 @@
                           <a:solidFill>
                             <a:srgbClr val="FFFFFF"/>
                           </a:solidFill>
-                          <a:latin typeface="Tahoma"/>
-                          <a:cs typeface="Tahoma"/>
+                          <a:latin typeface="Vazirmatn"/>
+                          <a:cs typeface="Vazirmatn"/>
                         </a:rPr>
                         <a:t>نتیجه</a:t>
                       </a:r>
@@ -16691,8 +17014,8 @@
                           <a:solidFill>
                             <a:srgbClr val="FFFFFF"/>
                           </a:solidFill>
-                          <a:latin typeface="Tahoma"/>
-                          <a:cs typeface="Tahoma"/>
+                          <a:latin typeface="Vazirmatn"/>
+                          <a:cs typeface="Vazirmatn"/>
                         </a:rPr>
                         <a:t>تعداد ضربه</a:t>
                       </a:r>
@@ -16715,8 +17038,8 @@
                           <a:solidFill>
                             <a:srgbClr val="FFFFFF"/>
                           </a:solidFill>
-                          <a:latin typeface="Tahoma"/>
-                          <a:cs typeface="Tahoma"/>
+                          <a:latin typeface="Vazirmatn"/>
+                          <a:cs typeface="Vazirmatn"/>
                         </a:rPr>
                         <a:t>نسبت به Par 4</a:t>
                       </a:r>
@@ -16741,8 +17064,8 @@
                           <a:solidFill>
                             <a:srgbClr val="2E7D32"/>
                           </a:solidFill>
-                          <a:latin typeface="Tahoma"/>
-                          <a:cs typeface="Tahoma"/>
+                          <a:latin typeface="Vazirmatn"/>
+                          <a:cs typeface="Vazirmatn"/>
                         </a:rPr>
                         <a:t>Birdie</a:t>
                       </a:r>
@@ -16765,8 +17088,8 @@
                           <a:solidFill>
                             <a:srgbClr val="1F2A24"/>
                           </a:solidFill>
-                          <a:latin typeface="Tahoma"/>
-                          <a:cs typeface="Tahoma"/>
+                          <a:latin typeface="Vazirmatn"/>
+                          <a:cs typeface="Vazirmatn"/>
                         </a:rPr>
                         <a:t>۳ ضربه</a:t>
                       </a:r>
@@ -16789,8 +17112,8 @@
                           <a:solidFill>
                             <a:srgbClr val="1F2A24"/>
                           </a:solidFill>
-                          <a:latin typeface="Tahoma"/>
-                          <a:cs typeface="Tahoma"/>
+                          <a:latin typeface="Vazirmatn"/>
+                          <a:cs typeface="Vazirmatn"/>
                         </a:rPr>
                         <a:t>یک ضربه کمتر از Par</a:t>
                       </a:r>
@@ -16815,8 +17138,8 @@
                           <a:solidFill>
                             <a:srgbClr val="2E7D32"/>
                           </a:solidFill>
-                          <a:latin typeface="Tahoma"/>
-                          <a:cs typeface="Tahoma"/>
+                          <a:latin typeface="Vazirmatn"/>
+                          <a:cs typeface="Vazirmatn"/>
                         </a:rPr>
                         <a:t>Par</a:t>
                       </a:r>
@@ -16839,8 +17162,8 @@
                           <a:solidFill>
                             <a:srgbClr val="1F2A24"/>
                           </a:solidFill>
-                          <a:latin typeface="Tahoma"/>
-                          <a:cs typeface="Tahoma"/>
+                          <a:latin typeface="Vazirmatn"/>
+                          <a:cs typeface="Vazirmatn"/>
                         </a:rPr>
                         <a:t>۴ ضربه</a:t>
                       </a:r>
@@ -16863,8 +17186,8 @@
                           <a:solidFill>
                             <a:srgbClr val="1F2A24"/>
                           </a:solidFill>
-                          <a:latin typeface="Tahoma"/>
-                          <a:cs typeface="Tahoma"/>
+                          <a:latin typeface="Vazirmatn"/>
+                          <a:cs typeface="Vazirmatn"/>
                         </a:rPr>
                         <a:t>هم‌سطح Par</a:t>
                       </a:r>
@@ -16889,8 +17212,8 @@
                           <a:solidFill>
                             <a:srgbClr val="2E7D32"/>
                           </a:solidFill>
-                          <a:latin typeface="Tahoma"/>
-                          <a:cs typeface="Tahoma"/>
+                          <a:latin typeface="Vazirmatn"/>
+                          <a:cs typeface="Vazirmatn"/>
                         </a:rPr>
                         <a:t>Bogey</a:t>
                       </a:r>
@@ -16913,8 +17236,8 @@
                           <a:solidFill>
                             <a:srgbClr val="1F2A24"/>
                           </a:solidFill>
-                          <a:latin typeface="Tahoma"/>
-                          <a:cs typeface="Tahoma"/>
+                          <a:latin typeface="Vazirmatn"/>
+                          <a:cs typeface="Vazirmatn"/>
                         </a:rPr>
                         <a:t>۵ ضربه</a:t>
                       </a:r>
@@ -16937,8 +17260,8 @@
                           <a:solidFill>
                             <a:srgbClr val="1F2A24"/>
                           </a:solidFill>
-                          <a:latin typeface="Tahoma"/>
-                          <a:cs typeface="Tahoma"/>
+                          <a:latin typeface="Vazirmatn"/>
+                          <a:cs typeface="Vazirmatn"/>
                         </a:rPr>
                         <a:t>یک ضربه بیشتر</a:t>
                       </a:r>
@@ -16963,8 +17286,8 @@
                           <a:solidFill>
                             <a:srgbClr val="2E7D32"/>
                           </a:solidFill>
-                          <a:latin typeface="Tahoma"/>
-                          <a:cs typeface="Tahoma"/>
+                          <a:latin typeface="Vazirmatn"/>
+                          <a:cs typeface="Vazirmatn"/>
                         </a:rPr>
                         <a:t>Double Bogey</a:t>
                       </a:r>
@@ -16987,8 +17310,8 @@
                           <a:solidFill>
                             <a:srgbClr val="1F2A24"/>
                           </a:solidFill>
-                          <a:latin typeface="Tahoma"/>
-                          <a:cs typeface="Tahoma"/>
+                          <a:latin typeface="Vazirmatn"/>
+                          <a:cs typeface="Vazirmatn"/>
                         </a:rPr>
                         <a:t>۶ ضربه</a:t>
                       </a:r>
@@ -17011,8 +17334,8 @@
                           <a:solidFill>
                             <a:srgbClr val="1F2A24"/>
                           </a:solidFill>
-                          <a:latin typeface="Tahoma"/>
-                          <a:cs typeface="Tahoma"/>
+                          <a:latin typeface="Vazirmatn"/>
+                          <a:cs typeface="Vazirmatn"/>
                         </a:rPr>
                         <a:t>دو ضربه بیشتر</a:t>
                       </a:r>
@@ -17067,8 +17390,8 @@
                 <a:solidFill>
                   <a:srgbClr val="2E7D32"/>
                 </a:solidFill>
-                <a:latin typeface="Tahoma"/>
-                <a:cs typeface="Tahoma"/>
+                <a:latin typeface="Vazirmatn"/>
+                <a:cs typeface="Vazirmatn"/>
               </a:rPr>
               <a:t>●  </a:t>
             </a:r>
@@ -17077,8 +17400,8 @@
                 <a:solidFill>
                   <a:srgbClr val="5C6B62"/>
                 </a:solidFill>
-                <a:latin typeface="Tahoma"/>
-                <a:cs typeface="Tahoma"/>
+                <a:latin typeface="Vazirmatn"/>
+                <a:cs typeface="Vazirmatn"/>
               </a:rPr>
               <a:t>هدف گلف کمترین تعداد ضربه است؛ از همان ابتدا عادت کنید هر ضربه را ثبت کنید.</a:t>
             </a:r>
@@ -17094,7 +17417,7 @@
         <p:spPr>
           <a:xfrm>
             <a:off x="502920" y="6400800"/>
-            <a:ext cx="5486400" cy="320040"/>
+            <a:ext cx="6858000" cy="320040"/>
           </a:xfrm>
           <a:prstGeom prst="rect">
             <a:avLst/>
@@ -17119,14 +17442,24 @@
               </a:spcAft>
             </a:pPr>
             <a:r>
+              <a:rPr sz="1100" b="1" i="0">
+                <a:solidFill>
+                  <a:srgbClr val="2E7D32"/>
+                </a:solidFill>
+                <a:latin typeface="Vazirmatn"/>
+                <a:cs typeface="Vazirmatn"/>
+              </a:rPr>
+              <a:t>⛳ Puttclub</a:t>
+            </a:r>
+            <a:r>
               <a:rPr sz="1000" b="0" i="0">
                 <a:solidFill>
                   <a:srgbClr val="5C6B62"/>
                 </a:solidFill>
-                <a:latin typeface="Tahoma"/>
-                <a:cs typeface="Tahoma"/>
-              </a:rPr>
-              <a:t>Golf Academy  ·  Beginner · Level 1</a:t>
+                <a:latin typeface="Vazirmatn"/>
+                <a:cs typeface="Vazirmatn"/>
+              </a:rPr>
+              <a:t>   ·   Beginner · Level 1</a:t>
             </a:r>
           </a:p>
         </p:txBody>
@@ -17169,8 +17502,8 @@
                 <a:solidFill>
                   <a:srgbClr val="2E7D32"/>
                 </a:solidFill>
-                <a:latin typeface="Tahoma"/>
-                <a:cs typeface="Tahoma"/>
+                <a:latin typeface="Vazirmatn"/>
+                <a:cs typeface="Vazirmatn"/>
               </a:rPr>
               <a:t>21</a:t>
             </a:r>
@@ -17321,8 +17654,8 @@
                 <a:solidFill>
                   <a:srgbClr val="2E7D32"/>
                 </a:solidFill>
-                <a:latin typeface="Tahoma"/>
-                <a:cs typeface="Tahoma"/>
+                <a:latin typeface="Vazirmatn"/>
+                <a:cs typeface="Vazirmatn"/>
               </a:rPr>
               <a:t>فصل نوزدهم</a:t>
             </a:r>
@@ -17344,8 +17677,8 @@
                 <a:solidFill>
                   <a:srgbClr val="1F2A24"/>
                 </a:solidFill>
-                <a:latin typeface="Tahoma"/>
-                <a:cs typeface="Tahoma"/>
+                <a:latin typeface="Vazirmatn"/>
+                <a:cs typeface="Vazirmatn"/>
               </a:rPr>
               <a:t>Course Management مقدماتی</a:t>
             </a:r>
@@ -17434,8 +17767,8 @@
                 <a:solidFill>
                   <a:srgbClr val="2E7D32"/>
                 </a:solidFill>
-                <a:latin typeface="Tahoma"/>
-                <a:cs typeface="Tahoma"/>
+                <a:latin typeface="Vazirmatn"/>
+                <a:cs typeface="Vazirmatn"/>
               </a:rPr>
               <a:t>●  </a:t>
             </a:r>
@@ -17444,8 +17777,8 @@
                 <a:solidFill>
                   <a:srgbClr val="1F2A24"/>
                 </a:solidFill>
-                <a:latin typeface="Tahoma"/>
-                <a:cs typeface="Tahoma"/>
+                <a:latin typeface="Vazirmatn"/>
+                <a:cs typeface="Vazirmatn"/>
               </a:rPr>
               <a:t>حتی بازیکن مبتدی باید قبل از ضربه فکر کند. پنج پرسش پایه:</a:t>
             </a:r>
@@ -17467,8 +17800,8 @@
                 <a:solidFill>
                   <a:srgbClr val="2E7D32"/>
                 </a:solidFill>
-                <a:latin typeface="Tahoma"/>
-                <a:cs typeface="Tahoma"/>
+                <a:latin typeface="Vazirmatn"/>
+                <a:cs typeface="Vazirmatn"/>
               </a:rPr>
               <a:t>●  </a:t>
             </a:r>
@@ -17477,8 +17810,8 @@
                 <a:solidFill>
                   <a:srgbClr val="1F2A24"/>
                 </a:solidFill>
-                <a:latin typeface="Tahoma"/>
-                <a:cs typeface="Tahoma"/>
+                <a:latin typeface="Vazirmatn"/>
+                <a:cs typeface="Vazirmatn"/>
               </a:rPr>
               <a:t>۱) هدف من کجاست؟</a:t>
             </a:r>
@@ -17500,8 +17833,8 @@
                 <a:solidFill>
                   <a:srgbClr val="2E7D32"/>
                 </a:solidFill>
-                <a:latin typeface="Tahoma"/>
-                <a:cs typeface="Tahoma"/>
+                <a:latin typeface="Vazirmatn"/>
+                <a:cs typeface="Vazirmatn"/>
               </a:rPr>
               <a:t>●  </a:t>
             </a:r>
@@ -17510,8 +17843,8 @@
                 <a:solidFill>
                   <a:srgbClr val="1F2A24"/>
                 </a:solidFill>
-                <a:latin typeface="Tahoma"/>
-                <a:cs typeface="Tahoma"/>
+                <a:latin typeface="Vazirmatn"/>
+                <a:cs typeface="Vazirmatn"/>
               </a:rPr>
               <a:t>۲) خطر کجاست؟</a:t>
             </a:r>
@@ -17533,8 +17866,8 @@
                 <a:solidFill>
                   <a:srgbClr val="2E7D32"/>
                 </a:solidFill>
-                <a:latin typeface="Tahoma"/>
-                <a:cs typeface="Tahoma"/>
+                <a:latin typeface="Vazirmatn"/>
+                <a:cs typeface="Vazirmatn"/>
               </a:rPr>
               <a:t>●  </a:t>
             </a:r>
@@ -17543,8 +17876,8 @@
                 <a:solidFill>
                   <a:srgbClr val="1F2A24"/>
                 </a:solidFill>
-                <a:latin typeface="Tahoma"/>
-                <a:cs typeface="Tahoma"/>
+                <a:latin typeface="Vazirmatn"/>
+                <a:cs typeface="Vazirmatn"/>
               </a:rPr>
               <a:t>۳) فاصله چقدر است؟</a:t>
             </a:r>
@@ -17566,8 +17899,8 @@
                 <a:solidFill>
                   <a:srgbClr val="2E7D32"/>
                 </a:solidFill>
-                <a:latin typeface="Tahoma"/>
-                <a:cs typeface="Tahoma"/>
+                <a:latin typeface="Vazirmatn"/>
+                <a:cs typeface="Vazirmatn"/>
               </a:rPr>
               <a:t>●  </a:t>
             </a:r>
@@ -17576,8 +17909,8 @@
                 <a:solidFill>
                   <a:srgbClr val="1F2A24"/>
                 </a:solidFill>
-                <a:latin typeface="Tahoma"/>
-                <a:cs typeface="Tahoma"/>
+                <a:latin typeface="Vazirmatn"/>
+                <a:cs typeface="Vazirmatn"/>
               </a:rPr>
               <a:t>۴) کدام Club مناسب‌تر است؟</a:t>
             </a:r>
@@ -17599,8 +17932,8 @@
                 <a:solidFill>
                   <a:srgbClr val="2E7D32"/>
                 </a:solidFill>
-                <a:latin typeface="Tahoma"/>
-                <a:cs typeface="Tahoma"/>
+                <a:latin typeface="Vazirmatn"/>
+                <a:cs typeface="Vazirmatn"/>
               </a:rPr>
               <a:t>●  </a:t>
             </a:r>
@@ -17609,8 +17942,8 @@
                 <a:solidFill>
                   <a:srgbClr val="1F2A24"/>
                 </a:solidFill>
-                <a:latin typeface="Tahoma"/>
-                <a:cs typeface="Tahoma"/>
+                <a:latin typeface="Vazirmatn"/>
+                <a:cs typeface="Vazirmatn"/>
               </a:rPr>
               <a:t>۵) ضربه بعدی من از کجا خواهد بود؟</a:t>
             </a:r>
@@ -17745,8 +18078,8 @@
                 <a:solidFill>
                   <a:srgbClr val="2E7D32"/>
                 </a:solidFill>
-                <a:latin typeface="Tahoma"/>
-                <a:cs typeface="Tahoma"/>
+                <a:latin typeface="Vazirmatn"/>
+                <a:cs typeface="Vazirmatn"/>
               </a:rPr>
               <a:t>💡 </a:t>
             </a:r>
@@ -17755,8 +18088,8 @@
                 <a:solidFill>
                   <a:srgbClr val="1F2A24"/>
                 </a:solidFill>
-                <a:latin typeface="Tahoma"/>
-                <a:cs typeface="Tahoma"/>
+                <a:latin typeface="Vazirmatn"/>
+                <a:cs typeface="Vazirmatn"/>
               </a:rPr>
               <a:t>این پنج سؤال، پایه تصمیم‌گیری در زمین را تشکیل می‌دهند.</a:t>
             </a:r>
@@ -17772,7 +18105,7 @@
         <p:spPr>
           <a:xfrm>
             <a:off x="502920" y="6400800"/>
-            <a:ext cx="5486400" cy="320040"/>
+            <a:ext cx="6858000" cy="320040"/>
           </a:xfrm>
           <a:prstGeom prst="rect">
             <a:avLst/>
@@ -17797,14 +18130,24 @@
               </a:spcAft>
             </a:pPr>
             <a:r>
+              <a:rPr sz="1100" b="1" i="0">
+                <a:solidFill>
+                  <a:srgbClr val="2E7D32"/>
+                </a:solidFill>
+                <a:latin typeface="Vazirmatn"/>
+                <a:cs typeface="Vazirmatn"/>
+              </a:rPr>
+              <a:t>⛳ Puttclub</a:t>
+            </a:r>
+            <a:r>
               <a:rPr sz="1000" b="0" i="0">
                 <a:solidFill>
                   <a:srgbClr val="5C6B62"/>
                 </a:solidFill>
-                <a:latin typeface="Tahoma"/>
-                <a:cs typeface="Tahoma"/>
-              </a:rPr>
-              <a:t>Golf Academy  ·  Beginner · Level 1</a:t>
+                <a:latin typeface="Vazirmatn"/>
+                <a:cs typeface="Vazirmatn"/>
+              </a:rPr>
+              <a:t>   ·   Beginner · Level 1</a:t>
             </a:r>
           </a:p>
         </p:txBody>
@@ -17847,8 +18190,8 @@
                 <a:solidFill>
                   <a:srgbClr val="2E7D32"/>
                 </a:solidFill>
-                <a:latin typeface="Tahoma"/>
-                <a:cs typeface="Tahoma"/>
+                <a:latin typeface="Vazirmatn"/>
+                <a:cs typeface="Vazirmatn"/>
               </a:rPr>
               <a:t>22</a:t>
             </a:r>
@@ -17999,8 +18342,8 @@
                 <a:solidFill>
                   <a:srgbClr val="2E7D32"/>
                 </a:solidFill>
-                <a:latin typeface="Tahoma"/>
-                <a:cs typeface="Tahoma"/>
+                <a:latin typeface="Vazirmatn"/>
+                <a:cs typeface="Vazirmatn"/>
               </a:rPr>
               <a:t>فصل بیستم</a:t>
             </a:r>
@@ -18022,8 +18365,8 @@
                 <a:solidFill>
                   <a:srgbClr val="1F2A24"/>
                 </a:solidFill>
-                <a:latin typeface="Tahoma"/>
-                <a:cs typeface="Tahoma"/>
+                <a:latin typeface="Vazirmatn"/>
+                <a:cs typeface="Vazirmatn"/>
               </a:rPr>
               <a:t>آداب و فرهنگ گلف</a:t>
             </a:r>
@@ -18112,8 +18455,8 @@
                 <a:solidFill>
                   <a:srgbClr val="2E7D32"/>
                 </a:solidFill>
-                <a:latin typeface="Tahoma"/>
-                <a:cs typeface="Tahoma"/>
+                <a:latin typeface="Vazirmatn"/>
+                <a:cs typeface="Vazirmatn"/>
               </a:rPr>
               <a:t>●  </a:t>
             </a:r>
@@ -18122,8 +18465,8 @@
                 <a:solidFill>
                   <a:srgbClr val="1F2A24"/>
                 </a:solidFill>
-                <a:latin typeface="Tahoma"/>
-                <a:cs typeface="Tahoma"/>
+                <a:latin typeface="Vazirmatn"/>
+                <a:cs typeface="Vazirmatn"/>
               </a:rPr>
               <a:t>هنگام ضربه دیگران سکوت کنید و ایمنی را رعایت کنید</a:t>
             </a:r>
@@ -18145,8 +18488,8 @@
                 <a:solidFill>
                   <a:srgbClr val="2E7D32"/>
                 </a:solidFill>
-                <a:latin typeface="Tahoma"/>
-                <a:cs typeface="Tahoma"/>
+                <a:latin typeface="Vazirmatn"/>
+                <a:cs typeface="Vazirmatn"/>
               </a:rPr>
               <a:t>●  </a:t>
             </a:r>
@@ -18155,8 +18498,8 @@
                 <a:solidFill>
                   <a:srgbClr val="1F2A24"/>
                 </a:solidFill>
-                <a:latin typeface="Tahoma"/>
-                <a:cs typeface="Tahoma"/>
+                <a:latin typeface="Vazirmatn"/>
+                <a:cs typeface="Vazirmatn"/>
               </a:rPr>
               <a:t>به بازیکنان احترام بگذارید و زمین را خراب نکنید</a:t>
             </a:r>
@@ -18178,8 +18521,8 @@
                 <a:solidFill>
                   <a:srgbClr val="2E7D32"/>
                 </a:solidFill>
-                <a:latin typeface="Tahoma"/>
-                <a:cs typeface="Tahoma"/>
+                <a:latin typeface="Vazirmatn"/>
+                <a:cs typeface="Vazirmatn"/>
               </a:rPr>
               <a:t>●  </a:t>
             </a:r>
@@ -18188,8 +18531,8 @@
                 <a:solidFill>
                   <a:srgbClr val="1F2A24"/>
                 </a:solidFill>
-                <a:latin typeface="Tahoma"/>
-                <a:cs typeface="Tahoma"/>
+                <a:latin typeface="Vazirmatn"/>
+                <a:cs typeface="Vazirmatn"/>
               </a:rPr>
               <a:t>آثار ضربه (Divot) را ترمیم کنید</a:t>
             </a:r>
@@ -18211,8 +18554,8 @@
                 <a:solidFill>
                   <a:srgbClr val="2E7D32"/>
                 </a:solidFill>
-                <a:latin typeface="Tahoma"/>
-                <a:cs typeface="Tahoma"/>
+                <a:latin typeface="Vazirmatn"/>
+                <a:cs typeface="Vazirmatn"/>
               </a:rPr>
               <a:t>●  </a:t>
             </a:r>
@@ -18221,8 +18564,8 @@
                 <a:solidFill>
                   <a:srgbClr val="1F2A24"/>
                 </a:solidFill>
-                <a:latin typeface="Tahoma"/>
-                <a:cs typeface="Tahoma"/>
+                <a:latin typeface="Vazirmatn"/>
+                <a:cs typeface="Vazirmatn"/>
               </a:rPr>
               <a:t>Bunker را بعد از بازی مرتب (Rake) کنید</a:t>
             </a:r>
@@ -18244,8 +18587,8 @@
                 <a:solidFill>
                   <a:srgbClr val="2E7D32"/>
                 </a:solidFill>
-                <a:latin typeface="Tahoma"/>
-                <a:cs typeface="Tahoma"/>
+                <a:latin typeface="Vazirmatn"/>
+                <a:cs typeface="Vazirmatn"/>
               </a:rPr>
               <a:t>●  </a:t>
             </a:r>
@@ -18254,8 +18597,8 @@
                 <a:solidFill>
                   <a:srgbClr val="1F2A24"/>
                 </a:solidFill>
-                <a:latin typeface="Tahoma"/>
-                <a:cs typeface="Tahoma"/>
+                <a:latin typeface="Vazirmatn"/>
+                <a:cs typeface="Vazirmatn"/>
               </a:rPr>
               <a:t>به‌موقع حاضر شوید و امتیاز واقعی خود را ثبت کنید</a:t>
             </a:r>
@@ -18390,8 +18733,8 @@
                 <a:solidFill>
                   <a:srgbClr val="2E7D32"/>
                 </a:solidFill>
-                <a:latin typeface="Tahoma"/>
-                <a:cs typeface="Tahoma"/>
+                <a:latin typeface="Vazirmatn"/>
+                <a:cs typeface="Vazirmatn"/>
               </a:rPr>
               <a:t>💡 </a:t>
             </a:r>
@@ -18400,8 +18743,8 @@
                 <a:solidFill>
                   <a:srgbClr val="1F2A24"/>
                 </a:solidFill>
-                <a:latin typeface="Tahoma"/>
-                <a:cs typeface="Tahoma"/>
+                <a:latin typeface="Vazirmatn"/>
+                <a:cs typeface="Vazirmatn"/>
               </a:rPr>
               <a:t>یک گلف‌باز خوب فقط ضربه خوب نمی‌زند؛ رفتار خوبی هم دارد.</a:t>
             </a:r>
@@ -18417,7 +18760,7 @@
         <p:spPr>
           <a:xfrm>
             <a:off x="502920" y="6400800"/>
-            <a:ext cx="5486400" cy="320040"/>
+            <a:ext cx="6858000" cy="320040"/>
           </a:xfrm>
           <a:prstGeom prst="rect">
             <a:avLst/>
@@ -18442,14 +18785,24 @@
               </a:spcAft>
             </a:pPr>
             <a:r>
+              <a:rPr sz="1100" b="1" i="0">
+                <a:solidFill>
+                  <a:srgbClr val="2E7D32"/>
+                </a:solidFill>
+                <a:latin typeface="Vazirmatn"/>
+                <a:cs typeface="Vazirmatn"/>
+              </a:rPr>
+              <a:t>⛳ Puttclub</a:t>
+            </a:r>
+            <a:r>
               <a:rPr sz="1000" b="0" i="0">
                 <a:solidFill>
                   <a:srgbClr val="5C6B62"/>
                 </a:solidFill>
-                <a:latin typeface="Tahoma"/>
-                <a:cs typeface="Tahoma"/>
-              </a:rPr>
-              <a:t>Golf Academy  ·  Beginner · Level 1</a:t>
+                <a:latin typeface="Vazirmatn"/>
+                <a:cs typeface="Vazirmatn"/>
+              </a:rPr>
+              <a:t>   ·   Beginner · Level 1</a:t>
             </a:r>
           </a:p>
         </p:txBody>
@@ -18492,8 +18845,8 @@
                 <a:solidFill>
                   <a:srgbClr val="2E7D32"/>
                 </a:solidFill>
-                <a:latin typeface="Tahoma"/>
-                <a:cs typeface="Tahoma"/>
+                <a:latin typeface="Vazirmatn"/>
+                <a:cs typeface="Vazirmatn"/>
               </a:rPr>
               <a:t>23</a:t>
             </a:r>
@@ -18644,8 +18997,8 @@
                 <a:solidFill>
                   <a:srgbClr val="2E7D32"/>
                 </a:solidFill>
-                <a:latin typeface="Tahoma"/>
-                <a:cs typeface="Tahoma"/>
+                <a:latin typeface="Vazirmatn"/>
+                <a:cs typeface="Vazirmatn"/>
               </a:rPr>
               <a:t>فصل بیست‌ویکم</a:t>
             </a:r>
@@ -18667,8 +19020,8 @@
                 <a:solidFill>
                   <a:srgbClr val="1F2A24"/>
                 </a:solidFill>
-                <a:latin typeface="Tahoma"/>
-                <a:cs typeface="Tahoma"/>
+                <a:latin typeface="Vazirmatn"/>
+                <a:cs typeface="Vazirmatn"/>
               </a:rPr>
               <a:t>روتین ساده تمرکز</a:t>
             </a:r>
@@ -18855,8 +19208,8 @@
                 <a:solidFill>
                   <a:srgbClr val="FFFFFF"/>
                 </a:solidFill>
-                <a:latin typeface="Tahoma"/>
-                <a:cs typeface="Tahoma"/>
+                <a:latin typeface="Vazirmatn"/>
+                <a:cs typeface="Vazirmatn"/>
               </a:rPr>
               <a:t>1</a:t>
             </a:r>
@@ -18901,8 +19254,8 @@
                 <a:solidFill>
                   <a:srgbClr val="1F2A24"/>
                 </a:solidFill>
-                <a:latin typeface="Tahoma"/>
-                <a:cs typeface="Tahoma"/>
+                <a:latin typeface="Vazirmatn"/>
+                <a:cs typeface="Vazirmatn"/>
               </a:rPr>
               <a:t>ببین</a:t>
             </a:r>
@@ -18924,8 +19277,8 @@
                 <a:solidFill>
                   <a:srgbClr val="5C6B62"/>
                 </a:solidFill>
-                <a:latin typeface="Tahoma"/>
-                <a:cs typeface="Tahoma"/>
+                <a:latin typeface="Vazirmatn"/>
+                <a:cs typeface="Vazirmatn"/>
               </a:rPr>
               <a:t>موقعیت را ببین</a:t>
             </a:r>
@@ -19068,8 +19421,8 @@
                 <a:solidFill>
                   <a:srgbClr val="FFFFFF"/>
                 </a:solidFill>
-                <a:latin typeface="Tahoma"/>
-                <a:cs typeface="Tahoma"/>
+                <a:latin typeface="Vazirmatn"/>
+                <a:cs typeface="Vazirmatn"/>
               </a:rPr>
               <a:t>2</a:t>
             </a:r>
@@ -19114,8 +19467,8 @@
                 <a:solidFill>
                   <a:srgbClr val="1F2A24"/>
                 </a:solidFill>
-                <a:latin typeface="Tahoma"/>
-                <a:cs typeface="Tahoma"/>
+                <a:latin typeface="Vazirmatn"/>
+                <a:cs typeface="Vazirmatn"/>
               </a:rPr>
               <a:t>تصمیم بگیر</a:t>
             </a:r>
@@ -19137,8 +19490,8 @@
                 <a:solidFill>
                   <a:srgbClr val="5C6B62"/>
                 </a:solidFill>
-                <a:latin typeface="Tahoma"/>
-                <a:cs typeface="Tahoma"/>
+                <a:latin typeface="Vazirmatn"/>
+                <a:cs typeface="Vazirmatn"/>
               </a:rPr>
               <a:t>انتخاب ضربه</a:t>
             </a:r>
@@ -19281,8 +19634,8 @@
                 <a:solidFill>
                   <a:srgbClr val="FFFFFF"/>
                 </a:solidFill>
-                <a:latin typeface="Tahoma"/>
-                <a:cs typeface="Tahoma"/>
+                <a:latin typeface="Vazirmatn"/>
+                <a:cs typeface="Vazirmatn"/>
               </a:rPr>
               <a:t>3</a:t>
             </a:r>
@@ -19327,8 +19680,8 @@
                 <a:solidFill>
                   <a:srgbClr val="1F2A24"/>
                 </a:solidFill>
-                <a:latin typeface="Tahoma"/>
-                <a:cs typeface="Tahoma"/>
+                <a:latin typeface="Vazirmatn"/>
+                <a:cs typeface="Vazirmatn"/>
               </a:rPr>
               <a:t>آماده شو</a:t>
             </a:r>
@@ -19350,8 +19703,8 @@
                 <a:solidFill>
                   <a:srgbClr val="5C6B62"/>
                 </a:solidFill>
-                <a:latin typeface="Tahoma"/>
-                <a:cs typeface="Tahoma"/>
+                <a:latin typeface="Vazirmatn"/>
+                <a:cs typeface="Vazirmatn"/>
               </a:rPr>
               <a:t>Setup</a:t>
             </a:r>
@@ -19494,8 +19847,8 @@
                 <a:solidFill>
                   <a:srgbClr val="FFFFFF"/>
                 </a:solidFill>
-                <a:latin typeface="Tahoma"/>
-                <a:cs typeface="Tahoma"/>
+                <a:latin typeface="Vazirmatn"/>
+                <a:cs typeface="Vazirmatn"/>
               </a:rPr>
               <a:t>4</a:t>
             </a:r>
@@ -19540,8 +19893,8 @@
                 <a:solidFill>
                   <a:srgbClr val="1F2A24"/>
                 </a:solidFill>
-                <a:latin typeface="Tahoma"/>
-                <a:cs typeface="Tahoma"/>
+                <a:latin typeface="Vazirmatn"/>
+                <a:cs typeface="Vazirmatn"/>
               </a:rPr>
               <a:t>ضربه بزن</a:t>
             </a:r>
@@ -19563,8 +19916,8 @@
                 <a:solidFill>
                   <a:srgbClr val="5C6B62"/>
                 </a:solidFill>
-                <a:latin typeface="Tahoma"/>
-                <a:cs typeface="Tahoma"/>
+                <a:latin typeface="Vazirmatn"/>
+                <a:cs typeface="Vazirmatn"/>
               </a:rPr>
               <a:t>اجرا</a:t>
             </a:r>
@@ -19707,8 +20060,8 @@
                 <a:solidFill>
                   <a:srgbClr val="FFFFFF"/>
                 </a:solidFill>
-                <a:latin typeface="Tahoma"/>
-                <a:cs typeface="Tahoma"/>
+                <a:latin typeface="Vazirmatn"/>
+                <a:cs typeface="Vazirmatn"/>
               </a:rPr>
               <a:t>5</a:t>
             </a:r>
@@ -19753,8 +20106,8 @@
                 <a:solidFill>
                   <a:srgbClr val="1F2A24"/>
                 </a:solidFill>
-                <a:latin typeface="Tahoma"/>
-                <a:cs typeface="Tahoma"/>
+                <a:latin typeface="Vazirmatn"/>
+                <a:cs typeface="Vazirmatn"/>
               </a:rPr>
               <a:t>رها کن</a:t>
             </a:r>
@@ -19776,8 +20129,8 @@
                 <a:solidFill>
                   <a:srgbClr val="5C6B62"/>
                 </a:solidFill>
-                <a:latin typeface="Tahoma"/>
-                <a:cs typeface="Tahoma"/>
+                <a:latin typeface="Vazirmatn"/>
+                <a:cs typeface="Vazirmatn"/>
               </a:rPr>
               <a:t>پذیرش</a:t>
             </a:r>
@@ -19912,8 +20265,8 @@
                 <a:solidFill>
                   <a:srgbClr val="1F2A24"/>
                 </a:solidFill>
-                <a:latin typeface="Tahoma"/>
-                <a:cs typeface="Tahoma"/>
+                <a:latin typeface="Vazirmatn"/>
+                <a:cs typeface="Vazirmatn"/>
               </a:rPr>
               <a:t>بعد از ضربه: پذیرش ← یک نفس ← تصمیم جدید؛ ضربه قبلی را مدام تحلیل نکن.</a:t>
             </a:r>
@@ -19929,7 +20282,7 @@
         <p:spPr>
           <a:xfrm>
             <a:off x="502920" y="6400800"/>
-            <a:ext cx="5486400" cy="320040"/>
+            <a:ext cx="6858000" cy="320040"/>
           </a:xfrm>
           <a:prstGeom prst="rect">
             <a:avLst/>
@@ -19954,14 +20307,24 @@
               </a:spcAft>
             </a:pPr>
             <a:r>
+              <a:rPr sz="1100" b="1" i="0">
+                <a:solidFill>
+                  <a:srgbClr val="2E7D32"/>
+                </a:solidFill>
+                <a:latin typeface="Vazirmatn"/>
+                <a:cs typeface="Vazirmatn"/>
+              </a:rPr>
+              <a:t>⛳ Puttclub</a:t>
+            </a:r>
+            <a:r>
               <a:rPr sz="1000" b="0" i="0">
                 <a:solidFill>
                   <a:srgbClr val="5C6B62"/>
                 </a:solidFill>
-                <a:latin typeface="Tahoma"/>
-                <a:cs typeface="Tahoma"/>
-              </a:rPr>
-              <a:t>Golf Academy  ·  Beginner · Level 1</a:t>
+                <a:latin typeface="Vazirmatn"/>
+                <a:cs typeface="Vazirmatn"/>
+              </a:rPr>
+              <a:t>   ·   Beginner · Level 1</a:t>
             </a:r>
           </a:p>
         </p:txBody>
@@ -20004,8 +20367,8 @@
                 <a:solidFill>
                   <a:srgbClr val="2E7D32"/>
                 </a:solidFill>
-                <a:latin typeface="Tahoma"/>
-                <a:cs typeface="Tahoma"/>
+                <a:latin typeface="Vazirmatn"/>
+                <a:cs typeface="Vazirmatn"/>
               </a:rPr>
               <a:t>24</a:t>
             </a:r>
@@ -20156,8 +20519,8 @@
                 <a:solidFill>
                   <a:srgbClr val="2E7D32"/>
                 </a:solidFill>
-                <a:latin typeface="Tahoma"/>
-                <a:cs typeface="Tahoma"/>
+                <a:latin typeface="Vazirmatn"/>
+                <a:cs typeface="Vazirmatn"/>
               </a:rPr>
               <a:t>فصل بیست‌ودوم</a:t>
             </a:r>
@@ -20179,8 +20542,8 @@
                 <a:solidFill>
                   <a:srgbClr val="1F2A24"/>
                 </a:solidFill>
-                <a:latin typeface="Tahoma"/>
-                <a:cs typeface="Tahoma"/>
+                <a:latin typeface="Vazirmatn"/>
+                <a:cs typeface="Vazirmatn"/>
               </a:rPr>
               <a:t>برنامه عملی ۱۰ جلسه‌ای</a:t>
             </a:r>
@@ -20267,8 +20630,8 @@
                           <a:solidFill>
                             <a:srgbClr val="FFFFFF"/>
                           </a:solidFill>
-                          <a:latin typeface="Tahoma"/>
-                          <a:cs typeface="Tahoma"/>
+                          <a:latin typeface="Vazirmatn"/>
+                          <a:cs typeface="Vazirmatn"/>
                         </a:rPr>
                         <a:t>جلسه</a:t>
                       </a:r>
@@ -20291,8 +20654,8 @@
                           <a:solidFill>
                             <a:srgbClr val="FFFFFF"/>
                           </a:solidFill>
-                          <a:latin typeface="Tahoma"/>
-                          <a:cs typeface="Tahoma"/>
+                          <a:latin typeface="Vazirmatn"/>
+                          <a:cs typeface="Vazirmatn"/>
                         </a:rPr>
                         <a:t>موضوع</a:t>
                       </a:r>
@@ -20315,8 +20678,8 @@
                           <a:solidFill>
                             <a:srgbClr val="FFFFFF"/>
                           </a:solidFill>
-                          <a:latin typeface="Tahoma"/>
-                          <a:cs typeface="Tahoma"/>
+                          <a:latin typeface="Vazirmatn"/>
+                          <a:cs typeface="Vazirmatn"/>
                         </a:rPr>
                         <a:t>جلسه</a:t>
                       </a:r>
@@ -20339,8 +20702,8 @@
                           <a:solidFill>
                             <a:srgbClr val="FFFFFF"/>
                           </a:solidFill>
-                          <a:latin typeface="Tahoma"/>
-                          <a:cs typeface="Tahoma"/>
+                          <a:latin typeface="Vazirmatn"/>
+                          <a:cs typeface="Vazirmatn"/>
                         </a:rPr>
                         <a:t>موضوع</a:t>
                       </a:r>
@@ -20365,8 +20728,8 @@
                           <a:solidFill>
                             <a:srgbClr val="2E7D32"/>
                           </a:solidFill>
-                          <a:latin typeface="Tahoma"/>
-                          <a:cs typeface="Tahoma"/>
+                          <a:latin typeface="Vazirmatn"/>
+                          <a:cs typeface="Vazirmatn"/>
                         </a:rPr>
                         <a:t>۱</a:t>
                       </a:r>
@@ -20389,8 +20752,8 @@
                           <a:solidFill>
                             <a:srgbClr val="1F2A24"/>
                           </a:solidFill>
-                          <a:latin typeface="Tahoma"/>
-                          <a:cs typeface="Tahoma"/>
+                          <a:latin typeface="Vazirmatn"/>
+                          <a:cs typeface="Vazirmatn"/>
                         </a:rPr>
                         <a:t>آشنایی + تجهیزات + زمین + قوانین</a:t>
                       </a:r>
@@ -20413,8 +20776,8 @@
                           <a:solidFill>
                             <a:srgbClr val="1F2A24"/>
                           </a:solidFill>
-                          <a:latin typeface="Tahoma"/>
-                          <a:cs typeface="Tahoma"/>
+                          <a:latin typeface="Vazirmatn"/>
+                          <a:cs typeface="Vazirmatn"/>
                         </a:rPr>
                         <a:t>۶</a:t>
                       </a:r>
@@ -20437,8 +20800,8 @@
                           <a:solidFill>
                             <a:srgbClr val="1F2A24"/>
                           </a:solidFill>
-                          <a:latin typeface="Tahoma"/>
-                          <a:cs typeface="Tahoma"/>
+                          <a:latin typeface="Vazirmatn"/>
+                          <a:cs typeface="Vazirmatn"/>
                         </a:rPr>
                         <a:t>Pitching</a:t>
                       </a:r>
@@ -20463,8 +20826,8 @@
                           <a:solidFill>
                             <a:srgbClr val="2E7D32"/>
                           </a:solidFill>
-                          <a:latin typeface="Tahoma"/>
-                          <a:cs typeface="Tahoma"/>
+                          <a:latin typeface="Vazirmatn"/>
+                          <a:cs typeface="Vazirmatn"/>
                         </a:rPr>
                         <a:t>۲</a:t>
                       </a:r>
@@ -20487,8 +20850,8 @@
                           <a:solidFill>
                             <a:srgbClr val="1F2A24"/>
                           </a:solidFill>
-                          <a:latin typeface="Tahoma"/>
-                          <a:cs typeface="Tahoma"/>
+                          <a:latin typeface="Vazirmatn"/>
+                          <a:cs typeface="Vazirmatn"/>
                         </a:rPr>
                         <a:t>Grip + Stance + Posture</a:t>
                       </a:r>
@@ -20511,8 +20874,8 @@
                           <a:solidFill>
                             <a:srgbClr val="1F2A24"/>
                           </a:solidFill>
-                          <a:latin typeface="Tahoma"/>
-                          <a:cs typeface="Tahoma"/>
+                          <a:latin typeface="Vazirmatn"/>
+                          <a:cs typeface="Vazirmatn"/>
                         </a:rPr>
                         <a:t>۷</a:t>
                       </a:r>
@@ -20535,8 +20898,8 @@
                           <a:solidFill>
                             <a:srgbClr val="1F2A24"/>
                           </a:solidFill>
-                          <a:latin typeface="Tahoma"/>
-                          <a:cs typeface="Tahoma"/>
+                          <a:latin typeface="Vazirmatn"/>
+                          <a:cs typeface="Vazirmatn"/>
                         </a:rPr>
                         <a:t>Iron Swing</a:t>
                       </a:r>
@@ -20561,8 +20924,8 @@
                           <a:solidFill>
                             <a:srgbClr val="2E7D32"/>
                           </a:solidFill>
-                          <a:latin typeface="Tahoma"/>
-                          <a:cs typeface="Tahoma"/>
+                          <a:latin typeface="Vazirmatn"/>
+                          <a:cs typeface="Vazirmatn"/>
                         </a:rPr>
                         <a:t>۳</a:t>
                       </a:r>
@@ -20585,8 +20948,8 @@
                           <a:solidFill>
                             <a:srgbClr val="1F2A24"/>
                           </a:solidFill>
-                          <a:latin typeface="Tahoma"/>
-                          <a:cs typeface="Tahoma"/>
+                          <a:latin typeface="Vazirmatn"/>
+                          <a:cs typeface="Vazirmatn"/>
                         </a:rPr>
                         <a:t>Alignment + Setup</a:t>
                       </a:r>
@@ -20609,8 +20972,8 @@
                           <a:solidFill>
                             <a:srgbClr val="1F2A24"/>
                           </a:solidFill>
-                          <a:latin typeface="Tahoma"/>
-                          <a:cs typeface="Tahoma"/>
+                          <a:latin typeface="Vazirmatn"/>
+                          <a:cs typeface="Vazirmatn"/>
                         </a:rPr>
                         <a:t>۸</a:t>
                       </a:r>
@@ -20633,8 +20996,8 @@
                           <a:solidFill>
                             <a:srgbClr val="1F2A24"/>
                           </a:solidFill>
-                          <a:latin typeface="Tahoma"/>
-                          <a:cs typeface="Tahoma"/>
+                          <a:latin typeface="Vazirmatn"/>
+                          <a:cs typeface="Vazirmatn"/>
                         </a:rPr>
                         <a:t>Wood / Driver</a:t>
                       </a:r>
@@ -20659,8 +21022,8 @@
                           <a:solidFill>
                             <a:srgbClr val="2E7D32"/>
                           </a:solidFill>
-                          <a:latin typeface="Tahoma"/>
-                          <a:cs typeface="Tahoma"/>
+                          <a:latin typeface="Vazirmatn"/>
+                          <a:cs typeface="Vazirmatn"/>
                         </a:rPr>
                         <a:t>۴</a:t>
                       </a:r>
@@ -20683,8 +21046,8 @@
                           <a:solidFill>
                             <a:srgbClr val="1F2A24"/>
                           </a:solidFill>
-                          <a:latin typeface="Tahoma"/>
-                          <a:cs typeface="Tahoma"/>
+                          <a:latin typeface="Vazirmatn"/>
+                          <a:cs typeface="Vazirmatn"/>
                         </a:rPr>
                         <a:t>Putting</a:t>
                       </a:r>
@@ -20707,8 +21070,8 @@
                           <a:solidFill>
                             <a:srgbClr val="1F2A24"/>
                           </a:solidFill>
-                          <a:latin typeface="Tahoma"/>
-                          <a:cs typeface="Tahoma"/>
+                          <a:latin typeface="Vazirmatn"/>
+                          <a:cs typeface="Vazirmatn"/>
                         </a:rPr>
                         <a:t>۹</a:t>
                       </a:r>
@@ -20731,8 +21094,8 @@
                           <a:solidFill>
                             <a:srgbClr val="1F2A24"/>
                           </a:solidFill>
-                          <a:latin typeface="Tahoma"/>
-                          <a:cs typeface="Tahoma"/>
+                          <a:latin typeface="Vazirmatn"/>
+                          <a:cs typeface="Vazirmatn"/>
                         </a:rPr>
                         <a:t>ترکیب ضربات + Course Management</a:t>
                       </a:r>
@@ -20757,8 +21120,8 @@
                           <a:solidFill>
                             <a:srgbClr val="2E7D32"/>
                           </a:solidFill>
-                          <a:latin typeface="Tahoma"/>
-                          <a:cs typeface="Tahoma"/>
+                          <a:latin typeface="Vazirmatn"/>
+                          <a:cs typeface="Vazirmatn"/>
                         </a:rPr>
                         <a:t>۵</a:t>
                       </a:r>
@@ -20781,8 +21144,8 @@
                           <a:solidFill>
                             <a:srgbClr val="1F2A24"/>
                           </a:solidFill>
-                          <a:latin typeface="Tahoma"/>
-                          <a:cs typeface="Tahoma"/>
+                          <a:latin typeface="Vazirmatn"/>
+                          <a:cs typeface="Vazirmatn"/>
                         </a:rPr>
                         <a:t>Chipping</a:t>
                       </a:r>
@@ -20805,8 +21168,8 @@
                           <a:solidFill>
                             <a:srgbClr val="1F2A24"/>
                           </a:solidFill>
-                          <a:latin typeface="Tahoma"/>
-                          <a:cs typeface="Tahoma"/>
+                          <a:latin typeface="Vazirmatn"/>
+                          <a:cs typeface="Vazirmatn"/>
                         </a:rPr>
                         <a:t>۱۰</a:t>
                       </a:r>
@@ -20829,8 +21192,8 @@
                           <a:solidFill>
                             <a:srgbClr val="1F2A24"/>
                           </a:solidFill>
-                          <a:latin typeface="Tahoma"/>
-                          <a:cs typeface="Tahoma"/>
+                          <a:latin typeface="Vazirmatn"/>
+                          <a:cs typeface="Vazirmatn"/>
                         </a:rPr>
                         <a:t>بازی آموزشی + ارزیابی</a:t>
                       </a:r>
@@ -20885,8 +21248,8 @@
                 <a:solidFill>
                   <a:srgbClr val="2E7D32"/>
                 </a:solidFill>
-                <a:latin typeface="Tahoma"/>
-                <a:cs typeface="Tahoma"/>
+                <a:latin typeface="Vazirmatn"/>
+                <a:cs typeface="Vazirmatn"/>
               </a:rPr>
               <a:t>●  </a:t>
             </a:r>
@@ -20895,8 +21258,8 @@
                 <a:solidFill>
                   <a:srgbClr val="5C6B62"/>
                 </a:solidFill>
-                <a:latin typeface="Tahoma"/>
-                <a:cs typeface="Tahoma"/>
+                <a:latin typeface="Vazirmatn"/>
+                <a:cs typeface="Vazirmatn"/>
               </a:rPr>
               <a:t>هر جلسه با تمرین عملی، تصویر آموزشی، خطاهای رایج و نکته مربی همراه است.</a:t>
             </a:r>
@@ -20912,7 +21275,7 @@
         <p:spPr>
           <a:xfrm>
             <a:off x="502920" y="6400800"/>
-            <a:ext cx="5486400" cy="320040"/>
+            <a:ext cx="6858000" cy="320040"/>
           </a:xfrm>
           <a:prstGeom prst="rect">
             <a:avLst/>
@@ -20937,14 +21300,24 @@
               </a:spcAft>
             </a:pPr>
             <a:r>
+              <a:rPr sz="1100" b="1" i="0">
+                <a:solidFill>
+                  <a:srgbClr val="2E7D32"/>
+                </a:solidFill>
+                <a:latin typeface="Vazirmatn"/>
+                <a:cs typeface="Vazirmatn"/>
+              </a:rPr>
+              <a:t>⛳ Puttclub</a:t>
+            </a:r>
+            <a:r>
               <a:rPr sz="1000" b="0" i="0">
                 <a:solidFill>
                   <a:srgbClr val="5C6B62"/>
                 </a:solidFill>
-                <a:latin typeface="Tahoma"/>
-                <a:cs typeface="Tahoma"/>
-              </a:rPr>
-              <a:t>Golf Academy  ·  Beginner · Level 1</a:t>
+                <a:latin typeface="Vazirmatn"/>
+                <a:cs typeface="Vazirmatn"/>
+              </a:rPr>
+              <a:t>   ·   Beginner · Level 1</a:t>
             </a:r>
           </a:p>
         </p:txBody>
@@ -20987,8 +21360,8 @@
                 <a:solidFill>
                   <a:srgbClr val="2E7D32"/>
                 </a:solidFill>
-                <a:latin typeface="Tahoma"/>
-                <a:cs typeface="Tahoma"/>
+                <a:latin typeface="Vazirmatn"/>
+                <a:cs typeface="Vazirmatn"/>
               </a:rPr>
               <a:t>25</a:t>
             </a:r>
@@ -21139,8 +21512,8 @@
                 <a:solidFill>
                   <a:srgbClr val="2E7D32"/>
                 </a:solidFill>
-                <a:latin typeface="Tahoma"/>
-                <a:cs typeface="Tahoma"/>
+                <a:latin typeface="Vazirmatn"/>
+                <a:cs typeface="Vazirmatn"/>
               </a:rPr>
               <a:t>آزمون پایان دوره</a:t>
             </a:r>
@@ -21162,8 +21535,8 @@
                 <a:solidFill>
                   <a:srgbClr val="1F2A24"/>
                 </a:solidFill>
-                <a:latin typeface="Tahoma"/>
-                <a:cs typeface="Tahoma"/>
+                <a:latin typeface="Vazirmatn"/>
+                <a:cs typeface="Vazirmatn"/>
               </a:rPr>
               <a:t>آزمون پایان دوره مقدماتی</a:t>
             </a:r>
@@ -21386,8 +21759,8 @@
                 <a:solidFill>
                   <a:srgbClr val="FFFFFF"/>
                 </a:solidFill>
-                <a:latin typeface="Tahoma"/>
-                <a:cs typeface="Tahoma"/>
+                <a:latin typeface="Vazirmatn"/>
+                <a:cs typeface="Vazirmatn"/>
               </a:rPr>
               <a:t>تئوری</a:t>
             </a:r>
@@ -21432,8 +21805,8 @@
                 <a:solidFill>
                   <a:srgbClr val="2E7D32"/>
                 </a:solidFill>
-                <a:latin typeface="Tahoma"/>
-                <a:cs typeface="Tahoma"/>
+                <a:latin typeface="Vazirmatn"/>
+                <a:cs typeface="Vazirmatn"/>
               </a:rPr>
               <a:t>☐  </a:t>
             </a:r>
@@ -21442,8 +21815,8 @@
                 <a:solidFill>
                   <a:srgbClr val="1F2A24"/>
                 </a:solidFill>
-                <a:latin typeface="Tahoma"/>
-                <a:cs typeface="Tahoma"/>
+                <a:latin typeface="Vazirmatn"/>
+                <a:cs typeface="Vazirmatn"/>
               </a:rPr>
               <a:t>اجزای زمین را توضیح دهد</a:t>
             </a:r>
@@ -21465,8 +21838,8 @@
                 <a:solidFill>
                   <a:srgbClr val="2E7D32"/>
                 </a:solidFill>
-                <a:latin typeface="Tahoma"/>
-                <a:cs typeface="Tahoma"/>
+                <a:latin typeface="Vazirmatn"/>
+                <a:cs typeface="Vazirmatn"/>
               </a:rPr>
               <a:t>☐  </a:t>
             </a:r>
@@ -21475,8 +21848,8 @@
                 <a:solidFill>
                   <a:srgbClr val="1F2A24"/>
                 </a:solidFill>
-                <a:latin typeface="Tahoma"/>
-                <a:cs typeface="Tahoma"/>
+                <a:latin typeface="Vazirmatn"/>
+                <a:cs typeface="Vazirmatn"/>
               </a:rPr>
               <a:t>کلاب‌های اصلی را بشناسد</a:t>
             </a:r>
@@ -21498,8 +21871,8 @@
                 <a:solidFill>
                   <a:srgbClr val="2E7D32"/>
                 </a:solidFill>
-                <a:latin typeface="Tahoma"/>
-                <a:cs typeface="Tahoma"/>
+                <a:latin typeface="Vazirmatn"/>
+                <a:cs typeface="Vazirmatn"/>
               </a:rPr>
               <a:t>☐  </a:t>
             </a:r>
@@ -21508,8 +21881,8 @@
                 <a:solidFill>
                   <a:srgbClr val="1F2A24"/>
                 </a:solidFill>
-                <a:latin typeface="Tahoma"/>
-                <a:cs typeface="Tahoma"/>
+                <a:latin typeface="Vazirmatn"/>
+                <a:cs typeface="Vazirmatn"/>
               </a:rPr>
               <a:t>اصطلاحات پایه را بداند</a:t>
             </a:r>
@@ -21531,8 +21904,8 @@
                 <a:solidFill>
                   <a:srgbClr val="2E7D32"/>
                 </a:solidFill>
-                <a:latin typeface="Tahoma"/>
-                <a:cs typeface="Tahoma"/>
+                <a:latin typeface="Vazirmatn"/>
+                <a:cs typeface="Vazirmatn"/>
               </a:rPr>
               <a:t>☐  </a:t>
             </a:r>
@@ -21541,8 +21914,8 @@
                 <a:solidFill>
                   <a:srgbClr val="1F2A24"/>
                 </a:solidFill>
-                <a:latin typeface="Tahoma"/>
-                <a:cs typeface="Tahoma"/>
+                <a:latin typeface="Vazirmatn"/>
+                <a:cs typeface="Vazirmatn"/>
               </a:rPr>
               <a:t>قوانین ابتدایی را رعایت کند</a:t>
             </a:r>
@@ -21564,8 +21937,8 @@
                 <a:solidFill>
                   <a:srgbClr val="2E7D32"/>
                 </a:solidFill>
-                <a:latin typeface="Tahoma"/>
-                <a:cs typeface="Tahoma"/>
+                <a:latin typeface="Vazirmatn"/>
+                <a:cs typeface="Vazirmatn"/>
               </a:rPr>
               <a:t>☐  </a:t>
             </a:r>
@@ -21574,8 +21947,8 @@
                 <a:solidFill>
                   <a:srgbClr val="1F2A24"/>
                 </a:solidFill>
-                <a:latin typeface="Tahoma"/>
-                <a:cs typeface="Tahoma"/>
+                <a:latin typeface="Vazirmatn"/>
+                <a:cs typeface="Vazirmatn"/>
               </a:rPr>
               <a:t>Scorecard را تکمیل کند</a:t>
             </a:r>
@@ -21754,8 +22127,8 @@
                 <a:solidFill>
                   <a:srgbClr val="FFFFFF"/>
                 </a:solidFill>
-                <a:latin typeface="Tahoma"/>
-                <a:cs typeface="Tahoma"/>
+                <a:latin typeface="Vazirmatn"/>
+                <a:cs typeface="Vazirmatn"/>
               </a:rPr>
               <a:t>فنی</a:t>
             </a:r>
@@ -21800,8 +22173,8 @@
                 <a:solidFill>
                   <a:srgbClr val="2E7D32"/>
                 </a:solidFill>
-                <a:latin typeface="Tahoma"/>
-                <a:cs typeface="Tahoma"/>
+                <a:latin typeface="Vazirmatn"/>
+                <a:cs typeface="Vazirmatn"/>
               </a:rPr>
               <a:t>☐  </a:t>
             </a:r>
@@ -21810,8 +22183,8 @@
                 <a:solidFill>
                   <a:srgbClr val="1F2A24"/>
                 </a:solidFill>
-                <a:latin typeface="Tahoma"/>
-                <a:cs typeface="Tahoma"/>
+                <a:latin typeface="Vazirmatn"/>
+                <a:cs typeface="Vazirmatn"/>
               </a:rPr>
               <a:t>Grip صحیح داشته باشد</a:t>
             </a:r>
@@ -21833,8 +22206,8 @@
                 <a:solidFill>
                   <a:srgbClr val="2E7D32"/>
                 </a:solidFill>
-                <a:latin typeface="Tahoma"/>
-                <a:cs typeface="Tahoma"/>
+                <a:latin typeface="Vazirmatn"/>
+                <a:cs typeface="Vazirmatn"/>
               </a:rPr>
               <a:t>☐  </a:t>
             </a:r>
@@ -21843,8 +22216,8 @@
                 <a:solidFill>
                   <a:srgbClr val="1F2A24"/>
                 </a:solidFill>
-                <a:latin typeface="Tahoma"/>
-                <a:cs typeface="Tahoma"/>
+                <a:latin typeface="Vazirmatn"/>
+                <a:cs typeface="Vazirmatn"/>
               </a:rPr>
               <a:t>Setup مناسب ایجاد کند</a:t>
             </a:r>
@@ -21866,8 +22239,8 @@
                 <a:solidFill>
                   <a:srgbClr val="2E7D32"/>
                 </a:solidFill>
-                <a:latin typeface="Tahoma"/>
-                <a:cs typeface="Tahoma"/>
+                <a:latin typeface="Vazirmatn"/>
+                <a:cs typeface="Vazirmatn"/>
               </a:rPr>
               <a:t>☐  </a:t>
             </a:r>
@@ -21876,8 +22249,8 @@
                 <a:solidFill>
                   <a:srgbClr val="1F2A24"/>
                 </a:solidFill>
-                <a:latin typeface="Tahoma"/>
-                <a:cs typeface="Tahoma"/>
+                <a:latin typeface="Vazirmatn"/>
+                <a:cs typeface="Vazirmatn"/>
               </a:rPr>
               <a:t>Alignment صحیح داشته باشد</a:t>
             </a:r>
@@ -21899,8 +22272,8 @@
                 <a:solidFill>
                   <a:srgbClr val="2E7D32"/>
                 </a:solidFill>
-                <a:latin typeface="Tahoma"/>
-                <a:cs typeface="Tahoma"/>
+                <a:latin typeface="Vazirmatn"/>
+                <a:cs typeface="Vazirmatn"/>
               </a:rPr>
               <a:t>☐  </a:t>
             </a:r>
@@ -21909,8 +22282,8 @@
                 <a:solidFill>
                   <a:srgbClr val="1F2A24"/>
                 </a:solidFill>
-                <a:latin typeface="Tahoma"/>
-                <a:cs typeface="Tahoma"/>
+                <a:latin typeface="Vazirmatn"/>
+                <a:cs typeface="Vazirmatn"/>
               </a:rPr>
               <a:t>Putting پایه اجرا کند</a:t>
             </a:r>
@@ -21932,8 +22305,8 @@
                 <a:solidFill>
                   <a:srgbClr val="2E7D32"/>
                 </a:solidFill>
-                <a:latin typeface="Tahoma"/>
-                <a:cs typeface="Tahoma"/>
+                <a:latin typeface="Vazirmatn"/>
+                <a:cs typeface="Vazirmatn"/>
               </a:rPr>
               <a:t>☐  </a:t>
             </a:r>
@@ -21942,8 +22315,8 @@
                 <a:solidFill>
                   <a:srgbClr val="1F2A24"/>
                 </a:solidFill>
-                <a:latin typeface="Tahoma"/>
-                <a:cs typeface="Tahoma"/>
+                <a:latin typeface="Vazirmatn"/>
+                <a:cs typeface="Vazirmatn"/>
               </a:rPr>
               <a:t>Chip و Pitch پایه اجرا کند</a:t>
             </a:r>
@@ -21965,8 +22338,8 @@
                 <a:solidFill>
                   <a:srgbClr val="2E7D32"/>
                 </a:solidFill>
-                <a:latin typeface="Tahoma"/>
-                <a:cs typeface="Tahoma"/>
+                <a:latin typeface="Vazirmatn"/>
+                <a:cs typeface="Vazirmatn"/>
               </a:rPr>
               <a:t>☐  </a:t>
             </a:r>
@@ -21975,8 +22348,8 @@
                 <a:solidFill>
                   <a:srgbClr val="1F2A24"/>
                 </a:solidFill>
-                <a:latin typeface="Tahoma"/>
-                <a:cs typeface="Tahoma"/>
+                <a:latin typeface="Vazirmatn"/>
+                <a:cs typeface="Vazirmatn"/>
               </a:rPr>
               <a:t>Iron و Wood Swing پایه اجرا کند</a:t>
             </a:r>
@@ -22155,8 +22528,8 @@
                 <a:solidFill>
                   <a:srgbClr val="FFFFFF"/>
                 </a:solidFill>
-                <a:latin typeface="Tahoma"/>
-                <a:cs typeface="Tahoma"/>
+                <a:latin typeface="Vazirmatn"/>
+                <a:cs typeface="Vazirmatn"/>
               </a:rPr>
               <a:t>رفتاری</a:t>
             </a:r>
@@ -22201,8 +22574,8 @@
                 <a:solidFill>
                   <a:srgbClr val="2E7D32"/>
                 </a:solidFill>
-                <a:latin typeface="Tahoma"/>
-                <a:cs typeface="Tahoma"/>
+                <a:latin typeface="Vazirmatn"/>
+                <a:cs typeface="Vazirmatn"/>
               </a:rPr>
               <a:t>☐  </a:t>
             </a:r>
@@ -22211,8 +22584,8 @@
                 <a:solidFill>
                   <a:srgbClr val="1F2A24"/>
                 </a:solidFill>
-                <a:latin typeface="Tahoma"/>
-                <a:cs typeface="Tahoma"/>
+                <a:latin typeface="Vazirmatn"/>
+                <a:cs typeface="Vazirmatn"/>
               </a:rPr>
               <a:t>ایمنی را رعایت کند</a:t>
             </a:r>
@@ -22234,8 +22607,8 @@
                 <a:solidFill>
                   <a:srgbClr val="2E7D32"/>
                 </a:solidFill>
-                <a:latin typeface="Tahoma"/>
-                <a:cs typeface="Tahoma"/>
+                <a:latin typeface="Vazirmatn"/>
+                <a:cs typeface="Vazirmatn"/>
               </a:rPr>
               <a:t>☐  </a:t>
             </a:r>
@@ -22244,8 +22617,8 @@
                 <a:solidFill>
                   <a:srgbClr val="1F2A24"/>
                 </a:solidFill>
-                <a:latin typeface="Tahoma"/>
-                <a:cs typeface="Tahoma"/>
+                <a:latin typeface="Vazirmatn"/>
+                <a:cs typeface="Vazirmatn"/>
               </a:rPr>
               <a:t>آداب گلف را رعایت کند</a:t>
             </a:r>
@@ -22267,8 +22640,8 @@
                 <a:solidFill>
                   <a:srgbClr val="2E7D32"/>
                 </a:solidFill>
-                <a:latin typeface="Tahoma"/>
-                <a:cs typeface="Tahoma"/>
+                <a:latin typeface="Vazirmatn"/>
+                <a:cs typeface="Vazirmatn"/>
               </a:rPr>
               <a:t>☐  </a:t>
             </a:r>
@@ -22277,8 +22650,8 @@
                 <a:solidFill>
                   <a:srgbClr val="1F2A24"/>
                 </a:solidFill>
-                <a:latin typeface="Tahoma"/>
-                <a:cs typeface="Tahoma"/>
+                <a:latin typeface="Vazirmatn"/>
+                <a:cs typeface="Vazirmatn"/>
               </a:rPr>
               <a:t>در بازی منظم باشد</a:t>
             </a:r>
@@ -22300,8 +22673,8 @@
                 <a:solidFill>
                   <a:srgbClr val="2E7D32"/>
                 </a:solidFill>
-                <a:latin typeface="Tahoma"/>
-                <a:cs typeface="Tahoma"/>
+                <a:latin typeface="Vazirmatn"/>
+                <a:cs typeface="Vazirmatn"/>
               </a:rPr>
               <a:t>☐  </a:t>
             </a:r>
@@ -22310,8 +22683,8 @@
                 <a:solidFill>
                   <a:srgbClr val="1F2A24"/>
                 </a:solidFill>
-                <a:latin typeface="Tahoma"/>
-                <a:cs typeface="Tahoma"/>
+                <a:latin typeface="Vazirmatn"/>
+                <a:cs typeface="Vazirmatn"/>
               </a:rPr>
               <a:t>امتیاز را صادقانه ثبت کند</a:t>
             </a:r>
@@ -22356,8 +22729,8 @@
                 <a:solidFill>
                   <a:srgbClr val="2E7D32"/>
                 </a:solidFill>
-                <a:latin typeface="Tahoma"/>
-                <a:cs typeface="Tahoma"/>
+                <a:latin typeface="Vazirmatn"/>
+                <a:cs typeface="Vazirmatn"/>
               </a:rPr>
               <a:t>بازیکن با تسلط بر این موارد آماده ورود به دوره تکمیلی است.</a:t>
             </a:r>
@@ -22373,7 +22746,7 @@
         <p:spPr>
           <a:xfrm>
             <a:off x="502920" y="6400800"/>
-            <a:ext cx="5486400" cy="320040"/>
+            <a:ext cx="6858000" cy="320040"/>
           </a:xfrm>
           <a:prstGeom prst="rect">
             <a:avLst/>
@@ -22398,14 +22771,24 @@
               </a:spcAft>
             </a:pPr>
             <a:r>
+              <a:rPr sz="1100" b="1" i="0">
+                <a:solidFill>
+                  <a:srgbClr val="2E7D32"/>
+                </a:solidFill>
+                <a:latin typeface="Vazirmatn"/>
+                <a:cs typeface="Vazirmatn"/>
+              </a:rPr>
+              <a:t>⛳ Puttclub</a:t>
+            </a:r>
+            <a:r>
               <a:rPr sz="1000" b="0" i="0">
                 <a:solidFill>
                   <a:srgbClr val="5C6B62"/>
                 </a:solidFill>
-                <a:latin typeface="Tahoma"/>
-                <a:cs typeface="Tahoma"/>
-              </a:rPr>
-              <a:t>Golf Academy  ·  Beginner · Level 1</a:t>
+                <a:latin typeface="Vazirmatn"/>
+                <a:cs typeface="Vazirmatn"/>
+              </a:rPr>
+              <a:t>   ·   Beginner · Level 1</a:t>
             </a:r>
           </a:p>
         </p:txBody>
@@ -22448,8 +22831,8 @@
                 <a:solidFill>
                   <a:srgbClr val="2E7D32"/>
                 </a:solidFill>
-                <a:latin typeface="Tahoma"/>
-                <a:cs typeface="Tahoma"/>
+                <a:latin typeface="Vazirmatn"/>
+                <a:cs typeface="Vazirmatn"/>
               </a:rPr>
               <a:t>26</a:t>
             </a:r>
@@ -22644,8 +23027,8 @@
                 <a:solidFill>
                   <a:srgbClr val="9CCC65"/>
                 </a:solidFill>
-                <a:latin typeface="Tahoma"/>
-                <a:cs typeface="Tahoma"/>
+                <a:latin typeface="Vazirmatn"/>
+                <a:cs typeface="Vazirmatn"/>
               </a:rPr>
               <a:t>نتیجه نهایی  |  انتظار درست از دوره مقدماتی</a:t>
             </a:r>
@@ -22690,8 +23073,8 @@
                 <a:solidFill>
                   <a:srgbClr val="FFFFFF"/>
                 </a:solidFill>
-                <a:latin typeface="Tahoma"/>
-                <a:cs typeface="Tahoma"/>
+                <a:latin typeface="Vazirmatn"/>
+                <a:cs typeface="Vazirmatn"/>
               </a:rPr>
               <a:t>« در پایان این دوره، «گلف را کامل یاد نگرفته‌اید»؛ بلکه پایه صحیح ادامه مسیر را ساخته‌اید. »</a:t>
             </a:r>
@@ -22713,8 +23096,8 @@
                 <a:solidFill>
                   <a:srgbClr val="C9D6C8"/>
                 </a:solidFill>
-                <a:latin typeface="Tahoma"/>
-                <a:cs typeface="Tahoma"/>
+                <a:latin typeface="Vazirmatn"/>
+                <a:cs typeface="Vazirmatn"/>
               </a:rPr>
               <a:t>مقدماتی: شناخت + تکنیک پایه  ·  تکمیلی: تثبیت + کنترل  ·  نیمه‌پیشرفته: استراتژی  ·  پیشرفته: عملکرد رقابتی</a:t>
             </a:r>
@@ -22730,7 +23113,7 @@
         <p:spPr>
           <a:xfrm>
             <a:off x="502920" y="6400800"/>
-            <a:ext cx="5486400" cy="320040"/>
+            <a:ext cx="6858000" cy="320040"/>
           </a:xfrm>
           <a:prstGeom prst="rect">
             <a:avLst/>
@@ -22755,14 +23138,24 @@
               </a:spcAft>
             </a:pPr>
             <a:r>
+              <a:rPr sz="1100" b="1" i="0">
+                <a:solidFill>
+                  <a:srgbClr val="9CCC65"/>
+                </a:solidFill>
+                <a:latin typeface="Vazirmatn"/>
+                <a:cs typeface="Vazirmatn"/>
+              </a:rPr>
+              <a:t>⛳ Puttclub</a:t>
+            </a:r>
+            <a:r>
               <a:rPr sz="1000" b="0" i="0">
                 <a:solidFill>
                   <a:srgbClr val="FFFFFF"/>
                 </a:solidFill>
-                <a:latin typeface="Tahoma"/>
-                <a:cs typeface="Tahoma"/>
-              </a:rPr>
-              <a:t>Golf Academy  ·  Beginner · Level 1</a:t>
+                <a:latin typeface="Vazirmatn"/>
+                <a:cs typeface="Vazirmatn"/>
+              </a:rPr>
+              <a:t>   ·   Beginner · Level 1</a:t>
             </a:r>
           </a:p>
         </p:txBody>
@@ -22805,8 +23198,8 @@
                 <a:solidFill>
                   <a:srgbClr val="9CCC65"/>
                 </a:solidFill>
-                <a:latin typeface="Tahoma"/>
-                <a:cs typeface="Tahoma"/>
+                <a:latin typeface="Vazirmatn"/>
+                <a:cs typeface="Vazirmatn"/>
               </a:rPr>
               <a:t>27</a:t>
             </a:r>
@@ -22983,8 +23376,8 @@
                 <a:solidFill>
                   <a:srgbClr val="FFFFFF"/>
                 </a:solidFill>
-                <a:latin typeface="Tahoma"/>
-                <a:cs typeface="Tahoma"/>
+                <a:latin typeface="Vazirmatn"/>
+                <a:cs typeface="Vazirmatn"/>
               </a:rPr>
               <a:t>مسیر چهار سطح آموزشی</a:t>
             </a:r>
@@ -23119,8 +23512,8 @@
                 <a:solidFill>
                   <a:srgbClr val="FFFFFF"/>
                 </a:solidFill>
-                <a:latin typeface="Tahoma"/>
-                <a:cs typeface="Tahoma"/>
+                <a:latin typeface="Vazirmatn"/>
+                <a:cs typeface="Vazirmatn"/>
               </a:rPr>
               <a:t>مقدماتی</a:t>
             </a:r>
@@ -23165,8 +23558,8 @@
                 <a:solidFill>
                   <a:srgbClr val="1F2A24"/>
                 </a:solidFill>
-                <a:latin typeface="Tahoma"/>
-                <a:cs typeface="Tahoma"/>
+                <a:latin typeface="Vazirmatn"/>
+                <a:cs typeface="Vazirmatn"/>
               </a:rPr>
               <a:t>شناخت و تکنیک پایه</a:t>
             </a:r>
@@ -23345,8 +23738,8 @@
                 <a:solidFill>
                   <a:srgbClr val="FFFFFF"/>
                 </a:solidFill>
-                <a:latin typeface="Tahoma"/>
-                <a:cs typeface="Tahoma"/>
+                <a:latin typeface="Vazirmatn"/>
+                <a:cs typeface="Vazirmatn"/>
               </a:rPr>
               <a:t>تکمیلی</a:t>
             </a:r>
@@ -23391,8 +23784,8 @@
                 <a:solidFill>
                   <a:srgbClr val="1F2A24"/>
                 </a:solidFill>
-                <a:latin typeface="Tahoma"/>
-                <a:cs typeface="Tahoma"/>
+                <a:latin typeface="Vazirmatn"/>
+                <a:cs typeface="Vazirmatn"/>
               </a:rPr>
               <a:t>تثبیت و کنترل</a:t>
             </a:r>
@@ -23571,8 +23964,8 @@
                 <a:solidFill>
                   <a:srgbClr val="FFFFFF"/>
                 </a:solidFill>
-                <a:latin typeface="Tahoma"/>
-                <a:cs typeface="Tahoma"/>
+                <a:latin typeface="Vazirmatn"/>
+                <a:cs typeface="Vazirmatn"/>
               </a:rPr>
               <a:t>نیمه‌پیشرفته</a:t>
             </a:r>
@@ -23617,8 +24010,8 @@
                 <a:solidFill>
                   <a:srgbClr val="1F2A24"/>
                 </a:solidFill>
-                <a:latin typeface="Tahoma"/>
-                <a:cs typeface="Tahoma"/>
+                <a:latin typeface="Vazirmatn"/>
+                <a:cs typeface="Vazirmatn"/>
               </a:rPr>
               <a:t>استراتژی و مدیریت زمین</a:t>
             </a:r>
@@ -23797,8 +24190,8 @@
                 <a:solidFill>
                   <a:srgbClr val="FFFFFF"/>
                 </a:solidFill>
-                <a:latin typeface="Tahoma"/>
-                <a:cs typeface="Tahoma"/>
+                <a:latin typeface="Vazirmatn"/>
+                <a:cs typeface="Vazirmatn"/>
               </a:rPr>
               <a:t>پیشرفته</a:t>
             </a:r>
@@ -23843,8 +24236,8 @@
                 <a:solidFill>
                   <a:srgbClr val="1F2A24"/>
                 </a:solidFill>
-                <a:latin typeface="Tahoma"/>
-                <a:cs typeface="Tahoma"/>
+                <a:latin typeface="Vazirmatn"/>
+                <a:cs typeface="Vazirmatn"/>
               </a:rPr>
               <a:t>عملکرد رقابتی و تخصص</a:t>
             </a:r>
@@ -23859,8 +24252,8 @@
         </p:nvSpPr>
         <p:spPr>
           <a:xfrm>
-            <a:off x="1097280" y="4617720"/>
-            <a:ext cx="9997135" cy="1554480"/>
+            <a:off x="1097280" y="4434840"/>
+            <a:ext cx="9997135" cy="1234440"/>
           </a:xfrm>
           <a:prstGeom prst="rect">
             <a:avLst/>
@@ -23881,7 +24274,7 @@
                 <a:spcPts val="0"/>
               </a:spcBef>
               <a:spcAft>
-                <a:spcPts val="800"/>
+                <a:spcPts val="1000"/>
               </a:spcAft>
             </a:pPr>
             <a:r>
@@ -23889,10 +24282,33 @@
                 <a:solidFill>
                   <a:srgbClr val="EAF3E8"/>
                 </a:solidFill>
-                <a:latin typeface="Tahoma"/>
-                <a:cs typeface="Tahoma"/>
+                <a:latin typeface="Vazirmatn"/>
+                <a:cs typeface="Vazirmatn"/>
               </a:rPr>
               <a:t>ساخت بازیکنی تکنیکی، باهوش، منضبط، مستقل و آماده مسابقه.</a:t>
+            </a:r>
+          </a:p>
+          <a:p>
+            <a:pPr algn="ctr" rtl="1">
+              <a:lnSpc>
+                <a:spcPct val="108000"/>
+              </a:lnSpc>
+              <a:spcBef>
+                <a:spcPts val="0"/>
+              </a:spcBef>
+              <a:spcAft>
+                <a:spcPts val="0"/>
+              </a:spcAft>
+            </a:pPr>
+            <a:r>
+              <a:rPr sz="1400" b="1" i="0">
+                <a:solidFill>
+                  <a:srgbClr val="9CCC65"/>
+                </a:solidFill>
+                <a:latin typeface="Vazirmatn"/>
+                <a:cs typeface="Vazirmatn"/>
+              </a:rPr>
+              <a:t>⛳ Puttclub  —  آکادمی گلف پات‌کلاب   |   مدرس: الهام طالبی (مدرس درجه یک گلف ایران)</a:t>
             </a:r>
           </a:p>
         </p:txBody>
@@ -23906,7 +24322,7 @@
         <p:spPr>
           <a:xfrm>
             <a:off x="502920" y="6400800"/>
-            <a:ext cx="5486400" cy="320040"/>
+            <a:ext cx="6858000" cy="320040"/>
           </a:xfrm>
           <a:prstGeom prst="rect">
             <a:avLst/>
@@ -23931,14 +24347,24 @@
               </a:spcAft>
             </a:pPr>
             <a:r>
+              <a:rPr sz="1100" b="1" i="0">
+                <a:solidFill>
+                  <a:srgbClr val="9CCC65"/>
+                </a:solidFill>
+                <a:latin typeface="Vazirmatn"/>
+                <a:cs typeface="Vazirmatn"/>
+              </a:rPr>
+              <a:t>⛳ Puttclub</a:t>
+            </a:r>
+            <a:r>
               <a:rPr sz="1000" b="0" i="0">
                 <a:solidFill>
                   <a:srgbClr val="FFFFFF"/>
                 </a:solidFill>
-                <a:latin typeface="Tahoma"/>
-                <a:cs typeface="Tahoma"/>
-              </a:rPr>
-              <a:t>Golf Academy  ·  Beginner · Level 1</a:t>
+                <a:latin typeface="Vazirmatn"/>
+                <a:cs typeface="Vazirmatn"/>
+              </a:rPr>
+              <a:t>   ·   Beginner · Level 1</a:t>
             </a:r>
           </a:p>
         </p:txBody>
@@ -23981,8 +24407,8 @@
                 <a:solidFill>
                   <a:srgbClr val="9CCC65"/>
                 </a:solidFill>
-                <a:latin typeface="Tahoma"/>
-                <a:cs typeface="Tahoma"/>
+                <a:latin typeface="Vazirmatn"/>
+                <a:cs typeface="Vazirmatn"/>
               </a:rPr>
               <a:t>28</a:t>
             </a:r>
@@ -24133,8 +24559,8 @@
                 <a:solidFill>
                   <a:srgbClr val="2E7D32"/>
                 </a:solidFill>
-                <a:latin typeface="Tahoma"/>
-                <a:cs typeface="Tahoma"/>
+                <a:latin typeface="Vazirmatn"/>
+                <a:cs typeface="Vazirmatn"/>
               </a:rPr>
               <a:t>فصل اول</a:t>
             </a:r>
@@ -24156,8 +24582,8 @@
                 <a:solidFill>
                   <a:srgbClr val="1F2A24"/>
                 </a:solidFill>
-                <a:latin typeface="Tahoma"/>
-                <a:cs typeface="Tahoma"/>
+                <a:latin typeface="Vazirmatn"/>
+                <a:cs typeface="Vazirmatn"/>
               </a:rPr>
               <a:t>گلف چیست؟</a:t>
             </a:r>
@@ -24246,8 +24672,8 @@
                 <a:solidFill>
                   <a:srgbClr val="2E7D32"/>
                 </a:solidFill>
-                <a:latin typeface="Tahoma"/>
-                <a:cs typeface="Tahoma"/>
+                <a:latin typeface="Vazirmatn"/>
+                <a:cs typeface="Vazirmatn"/>
               </a:rPr>
               <a:t>●  </a:t>
             </a:r>
@@ -24256,8 +24682,8 @@
                 <a:solidFill>
                   <a:srgbClr val="1F2A24"/>
                 </a:solidFill>
-                <a:latin typeface="Tahoma"/>
-                <a:cs typeface="Tahoma"/>
+                <a:latin typeface="Vazirmatn"/>
+                <a:cs typeface="Vazirmatn"/>
               </a:rPr>
               <a:t>گلف ورزشی است که بازیکن توپ را از محل شروع Tee به داخل Hole می‌رساند.</a:t>
             </a:r>
@@ -24279,8 +24705,8 @@
                 <a:solidFill>
                   <a:srgbClr val="2E7D32"/>
                 </a:solidFill>
-                <a:latin typeface="Tahoma"/>
-                <a:cs typeface="Tahoma"/>
+                <a:latin typeface="Vazirmatn"/>
+                <a:cs typeface="Vazirmatn"/>
               </a:rPr>
               <a:t>●  </a:t>
             </a:r>
@@ -24289,8 +24715,8 @@
                 <a:solidFill>
                   <a:srgbClr val="1F2A24"/>
                 </a:solidFill>
-                <a:latin typeface="Tahoma"/>
-                <a:cs typeface="Tahoma"/>
+                <a:latin typeface="Vazirmatn"/>
+                <a:cs typeface="Vazirmatn"/>
               </a:rPr>
               <a:t>و این کار را با کمترین تعداد ضربه انجام می‌دهد.</a:t>
             </a:r>
@@ -24312,8 +24738,8 @@
                 <a:solidFill>
                   <a:srgbClr val="2E7D32"/>
                 </a:solidFill>
-                <a:latin typeface="Tahoma"/>
-                <a:cs typeface="Tahoma"/>
+                <a:latin typeface="Vazirmatn"/>
+                <a:cs typeface="Vazirmatn"/>
               </a:rPr>
               <a:t>●  </a:t>
             </a:r>
@@ -24322,8 +24748,8 @@
                 <a:solidFill>
                   <a:srgbClr val="1F2A24"/>
                 </a:solidFill>
-                <a:latin typeface="Tahoma"/>
-                <a:cs typeface="Tahoma"/>
+                <a:latin typeface="Vazirmatn"/>
+                <a:cs typeface="Vazirmatn"/>
               </a:rPr>
               <a:t>اما گلف فقط ضربه زدن به توپ نیست؛ یک بازیکن باید هم‌زمان بتواند:</a:t>
             </a:r>
@@ -24345,8 +24771,8 @@
                 <a:solidFill>
                   <a:srgbClr val="2E7D32"/>
                 </a:solidFill>
-                <a:latin typeface="Tahoma"/>
-                <a:cs typeface="Tahoma"/>
+                <a:latin typeface="Vazirmatn"/>
+                <a:cs typeface="Vazirmatn"/>
               </a:rPr>
               <a:t>–  </a:t>
             </a:r>
@@ -24355,8 +24781,8 @@
                 <a:solidFill>
                   <a:srgbClr val="1F2A24"/>
                 </a:solidFill>
-                <a:latin typeface="Tahoma"/>
-                <a:cs typeface="Tahoma"/>
+                <a:latin typeface="Vazirmatn"/>
+                <a:cs typeface="Vazirmatn"/>
               </a:rPr>
               <a:t>ضربه صحیح اجرا کند و فاصله را تخمین بزند</a:t>
             </a:r>
@@ -24378,8 +24804,8 @@
                 <a:solidFill>
                   <a:srgbClr val="2E7D32"/>
                 </a:solidFill>
-                <a:latin typeface="Tahoma"/>
-                <a:cs typeface="Tahoma"/>
+                <a:latin typeface="Vazirmatn"/>
+                <a:cs typeface="Vazirmatn"/>
               </a:rPr>
               <a:t>–  </a:t>
             </a:r>
@@ -24388,8 +24814,8 @@
                 <a:solidFill>
                   <a:srgbClr val="1F2A24"/>
                 </a:solidFill>
-                <a:latin typeface="Tahoma"/>
-                <a:cs typeface="Tahoma"/>
+                <a:latin typeface="Vazirmatn"/>
+                <a:cs typeface="Vazirmatn"/>
               </a:rPr>
               <a:t>کلاب مناسب را انتخاب کند و مسیر زمین را بشناسد</a:t>
             </a:r>
@@ -24411,8 +24837,8 @@
                 <a:solidFill>
                   <a:srgbClr val="2E7D32"/>
                 </a:solidFill>
-                <a:latin typeface="Tahoma"/>
-                <a:cs typeface="Tahoma"/>
+                <a:latin typeface="Vazirmatn"/>
+                <a:cs typeface="Vazirmatn"/>
               </a:rPr>
               <a:t>–  </a:t>
             </a:r>
@@ -24421,8 +24847,8 @@
                 <a:solidFill>
                   <a:srgbClr val="1F2A24"/>
                 </a:solidFill>
-                <a:latin typeface="Tahoma"/>
-                <a:cs typeface="Tahoma"/>
+                <a:latin typeface="Vazirmatn"/>
+                <a:cs typeface="Vazirmatn"/>
               </a:rPr>
               <a:t>شرایط باد و شیب را در نظر بگیرد و تمرکز خود را حفظ کند</a:t>
             </a:r>
@@ -24444,8 +24870,8 @@
                 <a:solidFill>
                   <a:srgbClr val="2E7D32"/>
                 </a:solidFill>
-                <a:latin typeface="Tahoma"/>
-                <a:cs typeface="Tahoma"/>
+                <a:latin typeface="Vazirmatn"/>
+                <a:cs typeface="Vazirmatn"/>
               </a:rPr>
               <a:t>–  </a:t>
             </a:r>
@@ -24454,8 +24880,8 @@
                 <a:solidFill>
                   <a:srgbClr val="1F2A24"/>
                 </a:solidFill>
-                <a:latin typeface="Tahoma"/>
-                <a:cs typeface="Tahoma"/>
+                <a:latin typeface="Vazirmatn"/>
+                <a:cs typeface="Vazirmatn"/>
               </a:rPr>
               <a:t>امتیاز را درست ثبت کند و قوانین و اخلاق ورزشی را رعایت کند</a:t>
             </a:r>
@@ -24590,8 +25016,8 @@
                 <a:solidFill>
                   <a:srgbClr val="2E7D32"/>
                 </a:solidFill>
-                <a:latin typeface="Tahoma"/>
-                <a:cs typeface="Tahoma"/>
+                <a:latin typeface="Vazirmatn"/>
+                <a:cs typeface="Vazirmatn"/>
               </a:rPr>
               <a:t>💡 </a:t>
             </a:r>
@@ -24600,8 +25026,8 @@
                 <a:solidFill>
                   <a:srgbClr val="1F2A24"/>
                 </a:solidFill>
-                <a:latin typeface="Tahoma"/>
-                <a:cs typeface="Tahoma"/>
+                <a:latin typeface="Vazirmatn"/>
+                <a:cs typeface="Vazirmatn"/>
               </a:rPr>
               <a:t>در گلف ابتدا حرکت صحیح را یاد می‌گیریم؛ سپس به فکر افزایش قدرت و فاصله هستیم.</a:t>
             </a:r>
@@ -24617,7 +25043,7 @@
         <p:spPr>
           <a:xfrm>
             <a:off x="502920" y="6400800"/>
-            <a:ext cx="5486400" cy="320040"/>
+            <a:ext cx="6858000" cy="320040"/>
           </a:xfrm>
           <a:prstGeom prst="rect">
             <a:avLst/>
@@ -24642,14 +25068,24 @@
               </a:spcAft>
             </a:pPr>
             <a:r>
+              <a:rPr sz="1100" b="1" i="0">
+                <a:solidFill>
+                  <a:srgbClr val="2E7D32"/>
+                </a:solidFill>
+                <a:latin typeface="Vazirmatn"/>
+                <a:cs typeface="Vazirmatn"/>
+              </a:rPr>
+              <a:t>⛳ Puttclub</a:t>
+            </a:r>
+            <a:r>
               <a:rPr sz="1000" b="0" i="0">
                 <a:solidFill>
                   <a:srgbClr val="5C6B62"/>
                 </a:solidFill>
-                <a:latin typeface="Tahoma"/>
-                <a:cs typeface="Tahoma"/>
-              </a:rPr>
-              <a:t>Golf Academy  ·  Beginner · Level 1</a:t>
+                <a:latin typeface="Vazirmatn"/>
+                <a:cs typeface="Vazirmatn"/>
+              </a:rPr>
+              <a:t>   ·   Beginner · Level 1</a:t>
             </a:r>
           </a:p>
         </p:txBody>
@@ -24692,8 +25128,8 @@
                 <a:solidFill>
                   <a:srgbClr val="2E7D32"/>
                 </a:solidFill>
-                <a:latin typeface="Tahoma"/>
-                <a:cs typeface="Tahoma"/>
+                <a:latin typeface="Vazirmatn"/>
+                <a:cs typeface="Vazirmatn"/>
               </a:rPr>
               <a:t>3</a:t>
             </a:r>
@@ -24870,8 +25306,8 @@
                 <a:solidFill>
                   <a:srgbClr val="FFFFFF"/>
                 </a:solidFill>
-                <a:latin typeface="Tahoma"/>
-                <a:cs typeface="Tahoma"/>
+                <a:latin typeface="Vazirmatn"/>
+                <a:cs typeface="Vazirmatn"/>
               </a:rPr>
               <a:t>نمای هوایی یک زمین استاندارد گلف</a:t>
             </a:r>
@@ -24960,8 +25396,8 @@
                 <a:solidFill>
                   <a:srgbClr val="2E7D32"/>
                 </a:solidFill>
-                <a:latin typeface="Tahoma"/>
-                <a:cs typeface="Tahoma"/>
+                <a:latin typeface="Vazirmatn"/>
+                <a:cs typeface="Vazirmatn"/>
               </a:rPr>
               <a:t>فصل دوم</a:t>
             </a:r>
@@ -24983,8 +25419,8 @@
                 <a:solidFill>
                   <a:srgbClr val="1F2A24"/>
                 </a:solidFill>
-                <a:latin typeface="Tahoma"/>
-                <a:cs typeface="Tahoma"/>
+                <a:latin typeface="Vazirmatn"/>
+                <a:cs typeface="Vazirmatn"/>
               </a:rPr>
               <a:t>آشنایی با زمین گلف</a:t>
             </a:r>
@@ -25073,8 +25509,8 @@
                 <a:solidFill>
                   <a:srgbClr val="2E7D32"/>
                 </a:solidFill>
-                <a:latin typeface="Tahoma"/>
-                <a:cs typeface="Tahoma"/>
+                <a:latin typeface="Vazirmatn"/>
+                <a:cs typeface="Vazirmatn"/>
               </a:rPr>
               <a:t>●  </a:t>
             </a:r>
@@ -25083,8 +25519,8 @@
                 <a:solidFill>
                   <a:srgbClr val="2E7D32"/>
                 </a:solidFill>
-                <a:latin typeface="Tahoma"/>
-                <a:cs typeface="Tahoma"/>
+                <a:latin typeface="Vazirmatn"/>
+                <a:cs typeface="Vazirmatn"/>
               </a:rPr>
               <a:t>Tee Box</a:t>
             </a:r>
@@ -25093,8 +25529,8 @@
                 <a:solidFill>
                   <a:srgbClr val="1F2A24"/>
                 </a:solidFill>
-                <a:latin typeface="Tahoma"/>
-                <a:cs typeface="Tahoma"/>
+                <a:latin typeface="Vazirmatn"/>
+                <a:cs typeface="Vazirmatn"/>
               </a:rPr>
               <a:t>  —  محل شروع بازی هر سوراخ</a:t>
             </a:r>
@@ -25116,8 +25552,8 @@
                 <a:solidFill>
                   <a:srgbClr val="2E7D32"/>
                 </a:solidFill>
-                <a:latin typeface="Tahoma"/>
-                <a:cs typeface="Tahoma"/>
+                <a:latin typeface="Vazirmatn"/>
+                <a:cs typeface="Vazirmatn"/>
               </a:rPr>
               <a:t>●  </a:t>
             </a:r>
@@ -25126,8 +25562,8 @@
                 <a:solidFill>
                   <a:srgbClr val="2E7D32"/>
                 </a:solidFill>
-                <a:latin typeface="Tahoma"/>
-                <a:cs typeface="Tahoma"/>
+                <a:latin typeface="Vazirmatn"/>
+                <a:cs typeface="Vazirmatn"/>
               </a:rPr>
               <a:t>Fairway</a:t>
             </a:r>
@@ -25136,8 +25572,8 @@
                 <a:solidFill>
                   <a:srgbClr val="1F2A24"/>
                 </a:solidFill>
-                <a:latin typeface="Tahoma"/>
-                <a:cs typeface="Tahoma"/>
+                <a:latin typeface="Vazirmatn"/>
+                <a:cs typeface="Vazirmatn"/>
               </a:rPr>
               <a:t>  —  مسیر اصلی و کوتاه‌تر چمن</a:t>
             </a:r>
@@ -25159,8 +25595,8 @@
                 <a:solidFill>
                   <a:srgbClr val="2E7D32"/>
                 </a:solidFill>
-                <a:latin typeface="Tahoma"/>
-                <a:cs typeface="Tahoma"/>
+                <a:latin typeface="Vazirmatn"/>
+                <a:cs typeface="Vazirmatn"/>
               </a:rPr>
               <a:t>●  </a:t>
             </a:r>
@@ -25169,8 +25605,8 @@
                 <a:solidFill>
                   <a:srgbClr val="2E7D32"/>
                 </a:solidFill>
-                <a:latin typeface="Tahoma"/>
-                <a:cs typeface="Tahoma"/>
+                <a:latin typeface="Vazirmatn"/>
+                <a:cs typeface="Vazirmatn"/>
               </a:rPr>
               <a:t>Rough</a:t>
             </a:r>
@@ -25179,8 +25615,8 @@
                 <a:solidFill>
                   <a:srgbClr val="1F2A24"/>
                 </a:solidFill>
-                <a:latin typeface="Tahoma"/>
-                <a:cs typeface="Tahoma"/>
+                <a:latin typeface="Vazirmatn"/>
+                <a:cs typeface="Vazirmatn"/>
               </a:rPr>
               <a:t>  —  چمن بلندتر اطراف Fairway</a:t>
             </a:r>
@@ -25202,8 +25638,8 @@
                 <a:solidFill>
                   <a:srgbClr val="2E7D32"/>
                 </a:solidFill>
-                <a:latin typeface="Tahoma"/>
-                <a:cs typeface="Tahoma"/>
+                <a:latin typeface="Vazirmatn"/>
+                <a:cs typeface="Vazirmatn"/>
               </a:rPr>
               <a:t>●  </a:t>
             </a:r>
@@ -25212,8 +25648,8 @@
                 <a:solidFill>
                   <a:srgbClr val="2E7D32"/>
                 </a:solidFill>
-                <a:latin typeface="Tahoma"/>
-                <a:cs typeface="Tahoma"/>
+                <a:latin typeface="Vazirmatn"/>
+                <a:cs typeface="Vazirmatn"/>
               </a:rPr>
               <a:t>Bunker</a:t>
             </a:r>
@@ -25222,8 +25658,8 @@
                 <a:solidFill>
                   <a:srgbClr val="1F2A24"/>
                 </a:solidFill>
-                <a:latin typeface="Tahoma"/>
-                <a:cs typeface="Tahoma"/>
+                <a:latin typeface="Vazirmatn"/>
+                <a:cs typeface="Vazirmatn"/>
               </a:rPr>
               <a:t>  —  ناحیه پر از شن با تکنیک خاص</a:t>
             </a:r>
@@ -25245,8 +25681,8 @@
                 <a:solidFill>
                   <a:srgbClr val="2E7D32"/>
                 </a:solidFill>
-                <a:latin typeface="Tahoma"/>
-                <a:cs typeface="Tahoma"/>
+                <a:latin typeface="Vazirmatn"/>
+                <a:cs typeface="Vazirmatn"/>
               </a:rPr>
               <a:t>●  </a:t>
             </a:r>
@@ -25255,8 +25691,8 @@
                 <a:solidFill>
                   <a:srgbClr val="2E7D32"/>
                 </a:solidFill>
-                <a:latin typeface="Tahoma"/>
-                <a:cs typeface="Tahoma"/>
+                <a:latin typeface="Vazirmatn"/>
+                <a:cs typeface="Vazirmatn"/>
               </a:rPr>
               <a:t>Green</a:t>
             </a:r>
@@ -25265,8 +25701,8 @@
                 <a:solidFill>
                   <a:srgbClr val="1F2A24"/>
                 </a:solidFill>
-                <a:latin typeface="Tahoma"/>
-                <a:cs typeface="Tahoma"/>
+                <a:latin typeface="Vazirmatn"/>
+                <a:cs typeface="Vazirmatn"/>
               </a:rPr>
               <a:t>  —  بخش کوتاه و صاف که Hole در آن است</a:t>
             </a:r>
@@ -25288,8 +25724,8 @@
                 <a:solidFill>
                   <a:srgbClr val="2E7D32"/>
                 </a:solidFill>
-                <a:latin typeface="Tahoma"/>
-                <a:cs typeface="Tahoma"/>
+                <a:latin typeface="Vazirmatn"/>
+                <a:cs typeface="Vazirmatn"/>
               </a:rPr>
               <a:t>●  </a:t>
             </a:r>
@@ -25298,8 +25734,8 @@
                 <a:solidFill>
                   <a:srgbClr val="2E7D32"/>
                 </a:solidFill>
-                <a:latin typeface="Tahoma"/>
-                <a:cs typeface="Tahoma"/>
+                <a:latin typeface="Vazirmatn"/>
+                <a:cs typeface="Vazirmatn"/>
               </a:rPr>
               <a:t>Hole</a:t>
             </a:r>
@@ -25308,8 +25744,8 @@
                 <a:solidFill>
                   <a:srgbClr val="1F2A24"/>
                 </a:solidFill>
-                <a:latin typeface="Tahoma"/>
-                <a:cs typeface="Tahoma"/>
+                <a:latin typeface="Vazirmatn"/>
+                <a:cs typeface="Vazirmatn"/>
               </a:rPr>
               <a:t>  —  هدف نهایی بازیکن</a:t>
             </a:r>
@@ -25444,8 +25880,8 @@
                 <a:solidFill>
                   <a:srgbClr val="2E7D32"/>
                 </a:solidFill>
-                <a:latin typeface="Tahoma"/>
-                <a:cs typeface="Tahoma"/>
+                <a:latin typeface="Vazirmatn"/>
+                <a:cs typeface="Vazirmatn"/>
               </a:rPr>
               <a:t>نکته مربی:  </a:t>
             </a:r>
@@ -25454,8 +25890,8 @@
                 <a:solidFill>
                   <a:srgbClr val="1F2A24"/>
                 </a:solidFill>
-                <a:latin typeface="Tahoma"/>
-                <a:cs typeface="Tahoma"/>
+                <a:latin typeface="Vazirmatn"/>
+                <a:cs typeface="Vazirmatn"/>
               </a:rPr>
               <a:t>هر سوراخ از این بخش‌ها تشکیل شده و شناخت آن‌ها پایه تصمیم‌گیری است.</a:t>
             </a:r>
@@ -25471,7 +25907,7 @@
         <p:spPr>
           <a:xfrm>
             <a:off x="502920" y="6400800"/>
-            <a:ext cx="5486400" cy="320040"/>
+            <a:ext cx="6858000" cy="320040"/>
           </a:xfrm>
           <a:prstGeom prst="rect">
             <a:avLst/>
@@ -25496,14 +25932,24 @@
               </a:spcAft>
             </a:pPr>
             <a:r>
+              <a:rPr sz="1100" b="1" i="0">
+                <a:solidFill>
+                  <a:srgbClr val="2E7D32"/>
+                </a:solidFill>
+                <a:latin typeface="Vazirmatn"/>
+                <a:cs typeface="Vazirmatn"/>
+              </a:rPr>
+              <a:t>⛳ Puttclub</a:t>
+            </a:r>
+            <a:r>
               <a:rPr sz="1000" b="0" i="0">
                 <a:solidFill>
                   <a:srgbClr val="5C6B62"/>
                 </a:solidFill>
-                <a:latin typeface="Tahoma"/>
-                <a:cs typeface="Tahoma"/>
-              </a:rPr>
-              <a:t>Golf Academy  ·  Beginner · Level 1</a:t>
+                <a:latin typeface="Vazirmatn"/>
+                <a:cs typeface="Vazirmatn"/>
+              </a:rPr>
+              <a:t>   ·   Beginner · Level 1</a:t>
             </a:r>
           </a:p>
         </p:txBody>
@@ -25546,8 +25992,8 @@
                 <a:solidFill>
                   <a:srgbClr val="2E7D32"/>
                 </a:solidFill>
-                <a:latin typeface="Tahoma"/>
-                <a:cs typeface="Tahoma"/>
+                <a:latin typeface="Vazirmatn"/>
+                <a:cs typeface="Vazirmatn"/>
               </a:rPr>
               <a:t>4</a:t>
             </a:r>
@@ -25698,8 +26144,8 @@
                 <a:solidFill>
                   <a:srgbClr val="2E7D32"/>
                 </a:solidFill>
-                <a:latin typeface="Tahoma"/>
-                <a:cs typeface="Tahoma"/>
+                <a:latin typeface="Vazirmatn"/>
+                <a:cs typeface="Vazirmatn"/>
               </a:rPr>
               <a:t>فصل دوم</a:t>
             </a:r>
@@ -25721,8 +26167,8 @@
                 <a:solidFill>
                   <a:srgbClr val="1F2A24"/>
                 </a:solidFill>
-                <a:latin typeface="Tahoma"/>
-                <a:cs typeface="Tahoma"/>
+                <a:latin typeface="Vazirmatn"/>
+                <a:cs typeface="Vazirmatn"/>
               </a:rPr>
               <a:t>مسیر کلی یک سوراخ</a:t>
             </a:r>
@@ -25909,8 +26355,8 @@
                 <a:solidFill>
                   <a:srgbClr val="FFFFFF"/>
                 </a:solidFill>
-                <a:latin typeface="Tahoma"/>
-                <a:cs typeface="Tahoma"/>
+                <a:latin typeface="Vazirmatn"/>
+                <a:cs typeface="Vazirmatn"/>
               </a:rPr>
               <a:t>1</a:t>
             </a:r>
@@ -25955,8 +26401,8 @@
                 <a:solidFill>
                   <a:srgbClr val="1F2A24"/>
                 </a:solidFill>
-                <a:latin typeface="Tahoma"/>
-                <a:cs typeface="Tahoma"/>
+                <a:latin typeface="Vazirmatn"/>
+                <a:cs typeface="Vazirmatn"/>
               </a:rPr>
               <a:t>TEE</a:t>
             </a:r>
@@ -25978,8 +26424,8 @@
                 <a:solidFill>
                   <a:srgbClr val="5C6B62"/>
                 </a:solidFill>
-                <a:latin typeface="Tahoma"/>
-                <a:cs typeface="Tahoma"/>
+                <a:latin typeface="Vazirmatn"/>
+                <a:cs typeface="Vazirmatn"/>
               </a:rPr>
               <a:t>شروع</a:t>
             </a:r>
@@ -26122,8 +26568,8 @@
                 <a:solidFill>
                   <a:srgbClr val="FFFFFF"/>
                 </a:solidFill>
-                <a:latin typeface="Tahoma"/>
-                <a:cs typeface="Tahoma"/>
+                <a:latin typeface="Vazirmatn"/>
+                <a:cs typeface="Vazirmatn"/>
               </a:rPr>
               <a:t>2</a:t>
             </a:r>
@@ -26168,8 +26614,8 @@
                 <a:solidFill>
                   <a:srgbClr val="1F2A24"/>
                 </a:solidFill>
-                <a:latin typeface="Tahoma"/>
-                <a:cs typeface="Tahoma"/>
+                <a:latin typeface="Vazirmatn"/>
+                <a:cs typeface="Vazirmatn"/>
               </a:rPr>
               <a:t>FAIRWAY</a:t>
             </a:r>
@@ -26191,8 +26637,8 @@
                 <a:solidFill>
                   <a:srgbClr val="5C6B62"/>
                 </a:solidFill>
-                <a:latin typeface="Tahoma"/>
-                <a:cs typeface="Tahoma"/>
+                <a:latin typeface="Vazirmatn"/>
+                <a:cs typeface="Vazirmatn"/>
               </a:rPr>
               <a:t>مسیر اصلی</a:t>
             </a:r>
@@ -26335,8 +26781,8 @@
                 <a:solidFill>
                   <a:srgbClr val="FFFFFF"/>
                 </a:solidFill>
-                <a:latin typeface="Tahoma"/>
-                <a:cs typeface="Tahoma"/>
+                <a:latin typeface="Vazirmatn"/>
+                <a:cs typeface="Vazirmatn"/>
               </a:rPr>
               <a:t>3</a:t>
             </a:r>
@@ -26381,8 +26827,8 @@
                 <a:solidFill>
                   <a:srgbClr val="1F2A24"/>
                 </a:solidFill>
-                <a:latin typeface="Tahoma"/>
-                <a:cs typeface="Tahoma"/>
+                <a:latin typeface="Vazirmatn"/>
+                <a:cs typeface="Vazirmatn"/>
               </a:rPr>
               <a:t>APPROACH</a:t>
             </a:r>
@@ -26404,8 +26850,8 @@
                 <a:solidFill>
                   <a:srgbClr val="5C6B62"/>
                 </a:solidFill>
-                <a:latin typeface="Tahoma"/>
-                <a:cs typeface="Tahoma"/>
+                <a:latin typeface="Vazirmatn"/>
+                <a:cs typeface="Vazirmatn"/>
               </a:rPr>
               <a:t>نزدیک شدن</a:t>
             </a:r>
@@ -26548,8 +26994,8 @@
                 <a:solidFill>
                   <a:srgbClr val="FFFFFF"/>
                 </a:solidFill>
-                <a:latin typeface="Tahoma"/>
-                <a:cs typeface="Tahoma"/>
+                <a:latin typeface="Vazirmatn"/>
+                <a:cs typeface="Vazirmatn"/>
               </a:rPr>
               <a:t>4</a:t>
             </a:r>
@@ -26594,8 +27040,8 @@
                 <a:solidFill>
                   <a:srgbClr val="1F2A24"/>
                 </a:solidFill>
-                <a:latin typeface="Tahoma"/>
-                <a:cs typeface="Tahoma"/>
+                <a:latin typeface="Vazirmatn"/>
+                <a:cs typeface="Vazirmatn"/>
               </a:rPr>
               <a:t>GREEN</a:t>
             </a:r>
@@ -26617,8 +27063,8 @@
                 <a:solidFill>
                   <a:srgbClr val="5C6B62"/>
                 </a:solidFill>
-                <a:latin typeface="Tahoma"/>
-                <a:cs typeface="Tahoma"/>
+                <a:latin typeface="Vazirmatn"/>
+                <a:cs typeface="Vazirmatn"/>
               </a:rPr>
               <a:t>محل Hole</a:t>
             </a:r>
@@ -26761,8 +27207,8 @@
                 <a:solidFill>
                   <a:srgbClr val="FFFFFF"/>
                 </a:solidFill>
-                <a:latin typeface="Tahoma"/>
-                <a:cs typeface="Tahoma"/>
+                <a:latin typeface="Vazirmatn"/>
+                <a:cs typeface="Vazirmatn"/>
               </a:rPr>
               <a:t>5</a:t>
             </a:r>
@@ -26807,8 +27253,8 @@
                 <a:solidFill>
                   <a:srgbClr val="1F2A24"/>
                 </a:solidFill>
-                <a:latin typeface="Tahoma"/>
-                <a:cs typeface="Tahoma"/>
+                <a:latin typeface="Vazirmatn"/>
+                <a:cs typeface="Vazirmatn"/>
               </a:rPr>
               <a:t>HOLE</a:t>
             </a:r>
@@ -26830,8 +27276,8 @@
                 <a:solidFill>
                   <a:srgbClr val="5C6B62"/>
                 </a:solidFill>
-                <a:latin typeface="Tahoma"/>
-                <a:cs typeface="Tahoma"/>
+                <a:latin typeface="Vazirmatn"/>
+                <a:cs typeface="Vazirmatn"/>
               </a:rPr>
               <a:t>هدف نهایی</a:t>
             </a:r>
@@ -26966,8 +27412,8 @@
                 <a:solidFill>
                   <a:srgbClr val="1F2A24"/>
                 </a:solidFill>
-                <a:latin typeface="Tahoma"/>
-                <a:cs typeface="Tahoma"/>
+                <a:latin typeface="Vazirmatn"/>
+                <a:cs typeface="Vazirmatn"/>
               </a:rPr>
               <a:t>بازی هر سوراخ از Tee آغاز و با رسیدن توپ به Hole پایان می‌یابد.</a:t>
             </a:r>
@@ -26983,7 +27429,7 @@
         <p:spPr>
           <a:xfrm>
             <a:off x="502920" y="6400800"/>
-            <a:ext cx="5486400" cy="320040"/>
+            <a:ext cx="6858000" cy="320040"/>
           </a:xfrm>
           <a:prstGeom prst="rect">
             <a:avLst/>
@@ -27008,14 +27454,24 @@
               </a:spcAft>
             </a:pPr>
             <a:r>
+              <a:rPr sz="1100" b="1" i="0">
+                <a:solidFill>
+                  <a:srgbClr val="2E7D32"/>
+                </a:solidFill>
+                <a:latin typeface="Vazirmatn"/>
+                <a:cs typeface="Vazirmatn"/>
+              </a:rPr>
+              <a:t>⛳ Puttclub</a:t>
+            </a:r>
+            <a:r>
               <a:rPr sz="1000" b="0" i="0">
                 <a:solidFill>
                   <a:srgbClr val="5C6B62"/>
                 </a:solidFill>
-                <a:latin typeface="Tahoma"/>
-                <a:cs typeface="Tahoma"/>
-              </a:rPr>
-              <a:t>Golf Academy  ·  Beginner · Level 1</a:t>
+                <a:latin typeface="Vazirmatn"/>
+                <a:cs typeface="Vazirmatn"/>
+              </a:rPr>
+              <a:t>   ·   Beginner · Level 1</a:t>
             </a:r>
           </a:p>
         </p:txBody>
@@ -27058,8 +27514,8 @@
                 <a:solidFill>
                   <a:srgbClr val="2E7D32"/>
                 </a:solidFill>
-                <a:latin typeface="Tahoma"/>
-                <a:cs typeface="Tahoma"/>
+                <a:latin typeface="Vazirmatn"/>
+                <a:cs typeface="Vazirmatn"/>
               </a:rPr>
               <a:t>5</a:t>
             </a:r>
@@ -27210,8 +27666,8 @@
                 <a:solidFill>
                   <a:srgbClr val="2E7D32"/>
                 </a:solidFill>
-                <a:latin typeface="Tahoma"/>
-                <a:cs typeface="Tahoma"/>
+                <a:latin typeface="Vazirmatn"/>
+                <a:cs typeface="Vazirmatn"/>
               </a:rPr>
               <a:t>فصل سوم</a:t>
             </a:r>
@@ -27233,8 +27689,8 @@
                 <a:solidFill>
                   <a:srgbClr val="1F2A24"/>
                 </a:solidFill>
-                <a:latin typeface="Tahoma"/>
-                <a:cs typeface="Tahoma"/>
+                <a:latin typeface="Vazirmatn"/>
+                <a:cs typeface="Vazirmatn"/>
               </a:rPr>
               <a:t>تجهیزات گلف</a:t>
             </a:r>
@@ -27413,8 +27869,8 @@
                 <a:solidFill>
                   <a:srgbClr val="2E7D32"/>
                 </a:solidFill>
-                <a:latin typeface="Tahoma"/>
-                <a:cs typeface="Tahoma"/>
+                <a:latin typeface="Vazirmatn"/>
+                <a:cs typeface="Vazirmatn"/>
               </a:rPr>
               <a:t>Driver</a:t>
             </a:r>
@@ -27436,8 +27892,8 @@
                 <a:solidFill>
                   <a:srgbClr val="5C6B62"/>
                 </a:solidFill>
-                <a:latin typeface="Tahoma"/>
-                <a:cs typeface="Tahoma"/>
+                <a:latin typeface="Vazirmatn"/>
+                <a:cs typeface="Vazirmatn"/>
               </a:rPr>
               <a:t>ضربات بسیار بلند، معمولاً از روی Tee</a:t>
             </a:r>
@@ -27572,8 +28028,8 @@
                 <a:solidFill>
                   <a:srgbClr val="2E7D32"/>
                 </a:solidFill>
-                <a:latin typeface="Tahoma"/>
-                <a:cs typeface="Tahoma"/>
+                <a:latin typeface="Vazirmatn"/>
+                <a:cs typeface="Vazirmatn"/>
               </a:rPr>
               <a:t>Wood</a:t>
             </a:r>
@@ -27595,8 +28051,8 @@
                 <a:solidFill>
                   <a:srgbClr val="5C6B62"/>
                 </a:solidFill>
-                <a:latin typeface="Tahoma"/>
-                <a:cs typeface="Tahoma"/>
+                <a:latin typeface="Vazirmatn"/>
+                <a:cs typeface="Vazirmatn"/>
               </a:rPr>
               <a:t>ضربات بلند از Fairway یا Tee</a:t>
             </a:r>
@@ -27731,8 +28187,8 @@
                 <a:solidFill>
                   <a:srgbClr val="2E7D32"/>
                 </a:solidFill>
-                <a:latin typeface="Tahoma"/>
-                <a:cs typeface="Tahoma"/>
+                <a:latin typeface="Vazirmatn"/>
+                <a:cs typeface="Vazirmatn"/>
               </a:rPr>
               <a:t>Hybrid</a:t>
             </a:r>
@@ -27754,8 +28210,8 @@
                 <a:solidFill>
                   <a:srgbClr val="5C6B62"/>
                 </a:solidFill>
-                <a:latin typeface="Tahoma"/>
-                <a:cs typeface="Tahoma"/>
+                <a:latin typeface="Vazirmatn"/>
+                <a:cs typeface="Vazirmatn"/>
               </a:rPr>
               <a:t>راحت‌تر از آهن‌های بلند برای مبتدی</a:t>
             </a:r>
@@ -27890,8 +28346,8 @@
                 <a:solidFill>
                   <a:srgbClr val="2E7D32"/>
                 </a:solidFill>
-                <a:latin typeface="Tahoma"/>
-                <a:cs typeface="Tahoma"/>
+                <a:latin typeface="Vazirmatn"/>
+                <a:cs typeface="Vazirmatn"/>
               </a:rPr>
               <a:t>Iron</a:t>
             </a:r>
@@ -27913,8 +28369,8 @@
                 <a:solidFill>
                   <a:srgbClr val="5C6B62"/>
                 </a:solidFill>
-                <a:latin typeface="Tahoma"/>
-                <a:cs typeface="Tahoma"/>
+                <a:latin typeface="Vazirmatn"/>
+                <a:cs typeface="Vazirmatn"/>
               </a:rPr>
               <a:t>ضربات دقیق‌تر در فواصل مختلف</a:t>
             </a:r>
@@ -28049,8 +28505,8 @@
                 <a:solidFill>
                   <a:srgbClr val="2E7D32"/>
                 </a:solidFill>
-                <a:latin typeface="Tahoma"/>
-                <a:cs typeface="Tahoma"/>
+                <a:latin typeface="Vazirmatn"/>
+                <a:cs typeface="Vazirmatn"/>
               </a:rPr>
               <a:t>Wedge</a:t>
             </a:r>
@@ -28072,8 +28528,8 @@
                 <a:solidFill>
                   <a:srgbClr val="5C6B62"/>
                 </a:solidFill>
-                <a:latin typeface="Tahoma"/>
-                <a:cs typeface="Tahoma"/>
+                <a:latin typeface="Vazirmatn"/>
+                <a:cs typeface="Vazirmatn"/>
               </a:rPr>
               <a:t>ضربات کوتاه و نزدیک Green</a:t>
             </a:r>
@@ -28208,8 +28664,8 @@
                 <a:solidFill>
                   <a:srgbClr val="2E7D32"/>
                 </a:solidFill>
-                <a:latin typeface="Tahoma"/>
-                <a:cs typeface="Tahoma"/>
+                <a:latin typeface="Vazirmatn"/>
+                <a:cs typeface="Vazirmatn"/>
               </a:rPr>
               <a:t>Putter</a:t>
             </a:r>
@@ -28231,8 +28687,8 @@
                 <a:solidFill>
                   <a:srgbClr val="5C6B62"/>
                 </a:solidFill>
-                <a:latin typeface="Tahoma"/>
-                <a:cs typeface="Tahoma"/>
+                <a:latin typeface="Vazirmatn"/>
+                <a:cs typeface="Vazirmatn"/>
               </a:rPr>
               <a:t>ضربات روی سطح Green</a:t>
             </a:r>
@@ -28323,8 +28779,8 @@
                 <a:solidFill>
                   <a:srgbClr val="FFFFFF"/>
                 </a:solidFill>
-                <a:latin typeface="Tahoma"/>
-                <a:cs typeface="Tahoma"/>
+                <a:latin typeface="Vazirmatn"/>
+                <a:cs typeface="Vazirmatn"/>
               </a:rPr>
               <a:t>کلاب مناسب را بر اساس شرایط ضربه انتخاب می‌کنیم، نه بر اساس «قوی‌ترین» کلاب.</a:t>
             </a:r>
@@ -28340,7 +28796,7 @@
         <p:spPr>
           <a:xfrm>
             <a:off x="502920" y="6400800"/>
-            <a:ext cx="5486400" cy="320040"/>
+            <a:ext cx="6858000" cy="320040"/>
           </a:xfrm>
           <a:prstGeom prst="rect">
             <a:avLst/>
@@ -28365,14 +28821,24 @@
               </a:spcAft>
             </a:pPr>
             <a:r>
+              <a:rPr sz="1100" b="1" i="0">
+                <a:solidFill>
+                  <a:srgbClr val="2E7D32"/>
+                </a:solidFill>
+                <a:latin typeface="Vazirmatn"/>
+                <a:cs typeface="Vazirmatn"/>
+              </a:rPr>
+              <a:t>⛳ Puttclub</a:t>
+            </a:r>
+            <a:r>
               <a:rPr sz="1000" b="0" i="0">
                 <a:solidFill>
                   <a:srgbClr val="5C6B62"/>
                 </a:solidFill>
-                <a:latin typeface="Tahoma"/>
-                <a:cs typeface="Tahoma"/>
-              </a:rPr>
-              <a:t>Golf Academy  ·  Beginner · Level 1</a:t>
+                <a:latin typeface="Vazirmatn"/>
+                <a:cs typeface="Vazirmatn"/>
+              </a:rPr>
+              <a:t>   ·   Beginner · Level 1</a:t>
             </a:r>
           </a:p>
         </p:txBody>
@@ -28415,8 +28881,8 @@
                 <a:solidFill>
                   <a:srgbClr val="2E7D32"/>
                 </a:solidFill>
-                <a:latin typeface="Tahoma"/>
-                <a:cs typeface="Tahoma"/>
+                <a:latin typeface="Vazirmatn"/>
+                <a:cs typeface="Vazirmatn"/>
               </a:rPr>
               <a:t>6</a:t>
             </a:r>
@@ -28567,8 +29033,8 @@
                 <a:solidFill>
                   <a:srgbClr val="2E7D32"/>
                 </a:solidFill>
-                <a:latin typeface="Tahoma"/>
-                <a:cs typeface="Tahoma"/>
+                <a:latin typeface="Vazirmatn"/>
+                <a:cs typeface="Vazirmatn"/>
               </a:rPr>
               <a:t>فصل چهارم</a:t>
             </a:r>
@@ -28590,8 +29056,8 @@
                 <a:solidFill>
                   <a:srgbClr val="1F2A24"/>
                 </a:solidFill>
-                <a:latin typeface="Tahoma"/>
-                <a:cs typeface="Tahoma"/>
+                <a:latin typeface="Vazirmatn"/>
+                <a:cs typeface="Vazirmatn"/>
               </a:rPr>
               <a:t>آشنایی با اجزای Club</a:t>
             </a:r>
@@ -28770,8 +29236,8 @@
                 <a:solidFill>
                   <a:srgbClr val="2E7D32"/>
                 </a:solidFill>
-                <a:latin typeface="Tahoma"/>
-                <a:cs typeface="Tahoma"/>
+                <a:latin typeface="Vazirmatn"/>
+                <a:cs typeface="Vazirmatn"/>
               </a:rPr>
               <a:t>Grip</a:t>
             </a:r>
@@ -28793,8 +29259,8 @@
                 <a:solidFill>
                   <a:srgbClr val="5C6B62"/>
                 </a:solidFill>
-                <a:latin typeface="Tahoma"/>
-                <a:cs typeface="Tahoma"/>
+                <a:latin typeface="Vazirmatn"/>
+                <a:cs typeface="Vazirmatn"/>
               </a:rPr>
               <a:t>قسمتی که دست‌ها کلاب را می‌گیرند</a:t>
             </a:r>
@@ -28929,8 +29395,8 @@
                 <a:solidFill>
                   <a:srgbClr val="2E7D32"/>
                 </a:solidFill>
-                <a:latin typeface="Tahoma"/>
-                <a:cs typeface="Tahoma"/>
+                <a:latin typeface="Vazirmatn"/>
+                <a:cs typeface="Vazirmatn"/>
               </a:rPr>
               <a:t>Shaft</a:t>
             </a:r>
@@ -28952,8 +29418,8 @@
                 <a:solidFill>
                   <a:srgbClr val="5C6B62"/>
                 </a:solidFill>
-                <a:latin typeface="Tahoma"/>
-                <a:cs typeface="Tahoma"/>
+                <a:latin typeface="Vazirmatn"/>
+                <a:cs typeface="Vazirmatn"/>
               </a:rPr>
               <a:t>میله اصلی کلاب</a:t>
             </a:r>
@@ -29088,8 +29554,8 @@
                 <a:solidFill>
                   <a:srgbClr val="2E7D32"/>
                 </a:solidFill>
-                <a:latin typeface="Tahoma"/>
-                <a:cs typeface="Tahoma"/>
+                <a:latin typeface="Vazirmatn"/>
+                <a:cs typeface="Vazirmatn"/>
               </a:rPr>
               <a:t>Club Head</a:t>
             </a:r>
@@ -29111,8 +29577,8 @@
                 <a:solidFill>
                   <a:srgbClr val="5C6B62"/>
                 </a:solidFill>
-                <a:latin typeface="Tahoma"/>
-                <a:cs typeface="Tahoma"/>
+                <a:latin typeface="Vazirmatn"/>
+                <a:cs typeface="Vazirmatn"/>
               </a:rPr>
               <a:t>سر کلاب</a:t>
             </a:r>
@@ -29247,8 +29713,8 @@
                 <a:solidFill>
                   <a:srgbClr val="2E7D32"/>
                 </a:solidFill>
-                <a:latin typeface="Tahoma"/>
-                <a:cs typeface="Tahoma"/>
+                <a:latin typeface="Vazirmatn"/>
+                <a:cs typeface="Vazirmatn"/>
               </a:rPr>
               <a:t>Club Face</a:t>
             </a:r>
@@ -29270,8 +29736,8 @@
                 <a:solidFill>
                   <a:srgbClr val="5C6B62"/>
                 </a:solidFill>
-                <a:latin typeface="Tahoma"/>
-                <a:cs typeface="Tahoma"/>
+                <a:latin typeface="Vazirmatn"/>
+                <a:cs typeface="Vazirmatn"/>
               </a:rPr>
               <a:t>سطحی که با توپ تماس پیدا می‌کند</a:t>
             </a:r>
@@ -29406,8 +29872,8 @@
                 <a:solidFill>
                   <a:srgbClr val="2E7D32"/>
                 </a:solidFill>
-                <a:latin typeface="Tahoma"/>
-                <a:cs typeface="Tahoma"/>
+                <a:latin typeface="Vazirmatn"/>
+                <a:cs typeface="Vazirmatn"/>
               </a:rPr>
               <a:t>Loft</a:t>
             </a:r>
@@ -29429,8 +29895,8 @@
                 <a:solidFill>
                   <a:srgbClr val="5C6B62"/>
                 </a:solidFill>
-                <a:latin typeface="Tahoma"/>
-                <a:cs typeface="Tahoma"/>
+                <a:latin typeface="Vazirmatn"/>
+                <a:cs typeface="Vazirmatn"/>
               </a:rPr>
               <a:t>زاویه Face که بر ارتفاع و مسیر توپ اثر دارد</a:t>
             </a:r>
@@ -29446,7 +29912,7 @@
         <p:spPr>
           <a:xfrm>
             <a:off x="502920" y="6400800"/>
-            <a:ext cx="5486400" cy="320040"/>
+            <a:ext cx="6858000" cy="320040"/>
           </a:xfrm>
           <a:prstGeom prst="rect">
             <a:avLst/>
@@ -29471,14 +29937,24 @@
               </a:spcAft>
             </a:pPr>
             <a:r>
+              <a:rPr sz="1100" b="1" i="0">
+                <a:solidFill>
+                  <a:srgbClr val="2E7D32"/>
+                </a:solidFill>
+                <a:latin typeface="Vazirmatn"/>
+                <a:cs typeface="Vazirmatn"/>
+              </a:rPr>
+              <a:t>⛳ Puttclub</a:t>
+            </a:r>
+            <a:r>
               <a:rPr sz="1000" b="0" i="0">
                 <a:solidFill>
                   <a:srgbClr val="5C6B62"/>
                 </a:solidFill>
-                <a:latin typeface="Tahoma"/>
-                <a:cs typeface="Tahoma"/>
-              </a:rPr>
-              <a:t>Golf Academy  ·  Beginner · Level 1</a:t>
+                <a:latin typeface="Vazirmatn"/>
+                <a:cs typeface="Vazirmatn"/>
+              </a:rPr>
+              <a:t>   ·   Beginner · Level 1</a:t>
             </a:r>
           </a:p>
         </p:txBody>
@@ -29521,8 +29997,8 @@
                 <a:solidFill>
                   <a:srgbClr val="2E7D32"/>
                 </a:solidFill>
-                <a:latin typeface="Tahoma"/>
-                <a:cs typeface="Tahoma"/>
+                <a:latin typeface="Vazirmatn"/>
+                <a:cs typeface="Vazirmatn"/>
               </a:rPr>
               <a:t>7</a:t>
             </a:r>
@@ -29699,8 +30175,8 @@
                 <a:solidFill>
                   <a:srgbClr val="FFFFFF"/>
                 </a:solidFill>
-                <a:latin typeface="Tahoma"/>
-                <a:cs typeface="Tahoma"/>
+                <a:latin typeface="Vazirmatn"/>
+                <a:cs typeface="Vazirmatn"/>
               </a:rPr>
               <a:t>گرفتن صحیح و طبیعی کلاب</a:t>
             </a:r>
@@ -29789,8 +30265,8 @@
                 <a:solidFill>
                   <a:srgbClr val="2E7D32"/>
                 </a:solidFill>
-                <a:latin typeface="Tahoma"/>
-                <a:cs typeface="Tahoma"/>
+                <a:latin typeface="Vazirmatn"/>
+                <a:cs typeface="Vazirmatn"/>
               </a:rPr>
               <a:t>فصل پنجم</a:t>
             </a:r>
@@ -29812,8 +30288,8 @@
                 <a:solidFill>
                   <a:srgbClr val="1F2A24"/>
                 </a:solidFill>
-                <a:latin typeface="Tahoma"/>
-                <a:cs typeface="Tahoma"/>
+                <a:latin typeface="Vazirmatn"/>
+                <a:cs typeface="Vazirmatn"/>
               </a:rPr>
               <a:t>گرفتن صحیح کلاب (Grip)</a:t>
             </a:r>
@@ -29902,8 +30378,8 @@
                 <a:solidFill>
                   <a:srgbClr val="2E7D32"/>
                 </a:solidFill>
-                <a:latin typeface="Tahoma"/>
-                <a:cs typeface="Tahoma"/>
+                <a:latin typeface="Vazirmatn"/>
+                <a:cs typeface="Vazirmatn"/>
               </a:rPr>
               <a:t>●  </a:t>
             </a:r>
@@ -29912,8 +30388,8 @@
                 <a:solidFill>
                   <a:srgbClr val="2E7D32"/>
                 </a:solidFill>
-                <a:latin typeface="Tahoma"/>
-                <a:cs typeface="Tahoma"/>
+                <a:latin typeface="Vazirmatn"/>
+                <a:cs typeface="Vazirmatn"/>
               </a:rPr>
               <a:t>سه مدل رایج</a:t>
             </a:r>
@@ -29922,8 +30398,8 @@
                 <a:solidFill>
                   <a:srgbClr val="1F2A24"/>
                 </a:solidFill>
-                <a:latin typeface="Tahoma"/>
-                <a:cs typeface="Tahoma"/>
+                <a:latin typeface="Vazirmatn"/>
+                <a:cs typeface="Vazirmatn"/>
               </a:rPr>
               <a:t>  —  Overlap، Interlock و Ten Finger</a:t>
             </a:r>
@@ -29945,8 +30421,8 @@
                 <a:solidFill>
                   <a:srgbClr val="2E7D32"/>
                 </a:solidFill>
-                <a:latin typeface="Tahoma"/>
-                <a:cs typeface="Tahoma"/>
+                <a:latin typeface="Vazirmatn"/>
+                <a:cs typeface="Vazirmatn"/>
               </a:rPr>
               <a:t>●  </a:t>
             </a:r>
@@ -29955,8 +30431,8 @@
                 <a:solidFill>
                   <a:srgbClr val="2E7D32"/>
                 </a:solidFill>
-                <a:latin typeface="Tahoma"/>
-                <a:cs typeface="Tahoma"/>
+                <a:latin typeface="Vazirmatn"/>
+                <a:cs typeface="Vazirmatn"/>
               </a:rPr>
               <a:t>Overlap</a:t>
             </a:r>
@@ -29965,8 +30441,8 @@
                 <a:solidFill>
                   <a:srgbClr val="1F2A24"/>
                 </a:solidFill>
-                <a:latin typeface="Tahoma"/>
-                <a:cs typeface="Tahoma"/>
+                <a:latin typeface="Vazirmatn"/>
+                <a:cs typeface="Vazirmatn"/>
               </a:rPr>
               <a:t>  —  یکی از روش‌های رایج بازیکنان</a:t>
             </a:r>
@@ -29988,8 +30464,8 @@
                 <a:solidFill>
                   <a:srgbClr val="2E7D32"/>
                 </a:solidFill>
-                <a:latin typeface="Tahoma"/>
-                <a:cs typeface="Tahoma"/>
+                <a:latin typeface="Vazirmatn"/>
+                <a:cs typeface="Vazirmatn"/>
               </a:rPr>
               <a:t>●  </a:t>
             </a:r>
@@ -29998,8 +30474,8 @@
                 <a:solidFill>
                   <a:srgbClr val="2E7D32"/>
                 </a:solidFill>
-                <a:latin typeface="Tahoma"/>
-                <a:cs typeface="Tahoma"/>
+                <a:latin typeface="Vazirmatn"/>
+                <a:cs typeface="Vazirmatn"/>
               </a:rPr>
               <a:t>Interlock</a:t>
             </a:r>
@@ -30008,8 +30484,8 @@
                 <a:solidFill>
                   <a:srgbClr val="1F2A24"/>
                 </a:solidFill>
-                <a:latin typeface="Tahoma"/>
-                <a:cs typeface="Tahoma"/>
+                <a:latin typeface="Vazirmatn"/>
+                <a:cs typeface="Vazirmatn"/>
               </a:rPr>
               <a:t>  —  دو انگشت دست‌ها در هم قفل می‌شوند</a:t>
             </a:r>
@@ -30031,8 +30507,8 @@
                 <a:solidFill>
                   <a:srgbClr val="2E7D32"/>
                 </a:solidFill>
-                <a:latin typeface="Tahoma"/>
-                <a:cs typeface="Tahoma"/>
+                <a:latin typeface="Vazirmatn"/>
+                <a:cs typeface="Vazirmatn"/>
               </a:rPr>
               <a:t>●  </a:t>
             </a:r>
@@ -30041,8 +30517,8 @@
                 <a:solidFill>
                   <a:srgbClr val="2E7D32"/>
                 </a:solidFill>
-                <a:latin typeface="Tahoma"/>
-                <a:cs typeface="Tahoma"/>
+                <a:latin typeface="Vazirmatn"/>
+                <a:cs typeface="Vazirmatn"/>
               </a:rPr>
               <a:t>Ten Finger</a:t>
             </a:r>
@@ -30051,8 +30527,8 @@
                 <a:solidFill>
                   <a:srgbClr val="1F2A24"/>
                 </a:solidFill>
-                <a:latin typeface="Tahoma"/>
-                <a:cs typeface="Tahoma"/>
+                <a:latin typeface="Vazirmatn"/>
+                <a:cs typeface="Vazirmatn"/>
               </a:rPr>
               <a:t>  —  تمام انگشتان روی Grip قرار می‌گیرند</a:t>
             </a:r>
@@ -30074,8 +30550,8 @@
                 <a:solidFill>
                   <a:srgbClr val="2E7D32"/>
                 </a:solidFill>
-                <a:latin typeface="Tahoma"/>
-                <a:cs typeface="Tahoma"/>
+                <a:latin typeface="Vazirmatn"/>
+                <a:cs typeface="Vazirmatn"/>
               </a:rPr>
               <a:t>●  </a:t>
             </a:r>
@@ -30084,8 +30560,8 @@
                 <a:solidFill>
                   <a:srgbClr val="1F2A24"/>
                 </a:solidFill>
-                <a:latin typeface="Tahoma"/>
-                <a:cs typeface="Tahoma"/>
+                <a:latin typeface="Vazirmatn"/>
+                <a:cs typeface="Vazirmatn"/>
               </a:rPr>
               <a:t>کلاب را بیش از حد محکم نگیرید</a:t>
             </a:r>
@@ -30107,8 +30583,8 @@
                 <a:solidFill>
                   <a:srgbClr val="2E7D32"/>
                 </a:solidFill>
-                <a:latin typeface="Tahoma"/>
-                <a:cs typeface="Tahoma"/>
+                <a:latin typeface="Vazirmatn"/>
+                <a:cs typeface="Vazirmatn"/>
               </a:rPr>
               <a:t>●  </a:t>
             </a:r>
@@ -30117,8 +30593,8 @@
                 <a:solidFill>
                   <a:srgbClr val="1F2A24"/>
                 </a:solidFill>
-                <a:latin typeface="Tahoma"/>
-                <a:cs typeface="Tahoma"/>
+                <a:latin typeface="Vazirmatn"/>
+                <a:cs typeface="Vazirmatn"/>
               </a:rPr>
               <a:t>دست‌ها در وضعیت طبیعی و فشار Grip ثابت باشد</a:t>
             </a:r>
@@ -30253,8 +30729,8 @@
                 <a:solidFill>
                   <a:srgbClr val="2E7D32"/>
                 </a:solidFill>
-                <a:latin typeface="Tahoma"/>
-                <a:cs typeface="Tahoma"/>
+                <a:latin typeface="Vazirmatn"/>
+                <a:cs typeface="Vazirmatn"/>
               </a:rPr>
               <a:t>نکته مربی:  </a:t>
             </a:r>
@@ -30263,8 +30739,8 @@
                 <a:solidFill>
                   <a:srgbClr val="1F2A24"/>
                 </a:solidFill>
-                <a:latin typeface="Tahoma"/>
-                <a:cs typeface="Tahoma"/>
+                <a:latin typeface="Vazirmatn"/>
+                <a:cs typeface="Vazirmatn"/>
               </a:rPr>
               <a:t>تمرین: چند بار Grip ← Release ← Grip انجام دهید تا فشار مناسب دست را پیدا کنید.</a:t>
             </a:r>
@@ -30280,7 +30756,7 @@
         <p:spPr>
           <a:xfrm>
             <a:off x="502920" y="6400800"/>
-            <a:ext cx="5486400" cy="320040"/>
+            <a:ext cx="6858000" cy="320040"/>
           </a:xfrm>
           <a:prstGeom prst="rect">
             <a:avLst/>
@@ -30305,14 +30781,24 @@
               </a:spcAft>
             </a:pPr>
             <a:r>
+              <a:rPr sz="1100" b="1" i="0">
+                <a:solidFill>
+                  <a:srgbClr val="2E7D32"/>
+                </a:solidFill>
+                <a:latin typeface="Vazirmatn"/>
+                <a:cs typeface="Vazirmatn"/>
+              </a:rPr>
+              <a:t>⛳ Puttclub</a:t>
+            </a:r>
+            <a:r>
               <a:rPr sz="1000" b="0" i="0">
                 <a:solidFill>
                   <a:srgbClr val="5C6B62"/>
                 </a:solidFill>
-                <a:latin typeface="Tahoma"/>
-                <a:cs typeface="Tahoma"/>
-              </a:rPr>
-              <a:t>Golf Academy  ·  Beginner · Level 1</a:t>
+                <a:latin typeface="Vazirmatn"/>
+                <a:cs typeface="Vazirmatn"/>
+              </a:rPr>
+              <a:t>   ·   Beginner · Level 1</a:t>
             </a:r>
           </a:p>
         </p:txBody>
@@ -30355,8 +30841,8 @@
                 <a:solidFill>
                   <a:srgbClr val="2E7D32"/>
                 </a:solidFill>
-                <a:latin typeface="Tahoma"/>
-                <a:cs typeface="Tahoma"/>
+                <a:latin typeface="Vazirmatn"/>
+                <a:cs typeface="Vazirmatn"/>
               </a:rPr>
               <a:t>8</a:t>
             </a:r>
@@ -30533,8 +31019,8 @@
                 <a:solidFill>
                   <a:srgbClr val="FFFFFF"/>
                 </a:solidFill>
-                <a:latin typeface="Tahoma"/>
-                <a:cs typeface="Tahoma"/>
+                <a:latin typeface="Vazirmatn"/>
+                <a:cs typeface="Vazirmatn"/>
               </a:rPr>
               <a:t>Setup متعادل و آماده حرکت</a:t>
             </a:r>
@@ -30623,8 +31109,8 @@
                 <a:solidFill>
                   <a:srgbClr val="2E7D32"/>
                 </a:solidFill>
-                <a:latin typeface="Tahoma"/>
-                <a:cs typeface="Tahoma"/>
+                <a:latin typeface="Vazirmatn"/>
+                <a:cs typeface="Vazirmatn"/>
               </a:rPr>
               <a:t>فصل ششم</a:t>
             </a:r>
@@ -30646,8 +31132,8 @@
                 <a:solidFill>
                   <a:srgbClr val="1F2A24"/>
                 </a:solidFill>
-                <a:latin typeface="Tahoma"/>
-                <a:cs typeface="Tahoma"/>
+                <a:latin typeface="Vazirmatn"/>
+                <a:cs typeface="Vazirmatn"/>
               </a:rPr>
               <a:t>وضعیت قرارگیری پاها (Stance)</a:t>
             </a:r>
@@ -30736,8 +31222,8 @@
                 <a:solidFill>
                   <a:srgbClr val="2E7D32"/>
                 </a:solidFill>
-                <a:latin typeface="Tahoma"/>
-                <a:cs typeface="Tahoma"/>
+                <a:latin typeface="Vazirmatn"/>
+                <a:cs typeface="Vazirmatn"/>
               </a:rPr>
               <a:t>●  </a:t>
             </a:r>
@@ -30746,8 +31232,8 @@
                 <a:solidFill>
                   <a:srgbClr val="1F2A24"/>
                 </a:solidFill>
-                <a:latin typeface="Tahoma"/>
-                <a:cs typeface="Tahoma"/>
+                <a:latin typeface="Vazirmatn"/>
+                <a:cs typeface="Vazirmatn"/>
               </a:rPr>
               <a:t>پاها تقریباً به اندازه عرض شانه باز شوند</a:t>
             </a:r>
@@ -30769,8 +31255,8 @@
                 <a:solidFill>
                   <a:srgbClr val="2E7D32"/>
                 </a:solidFill>
-                <a:latin typeface="Tahoma"/>
-                <a:cs typeface="Tahoma"/>
+                <a:latin typeface="Vazirmatn"/>
+                <a:cs typeface="Vazirmatn"/>
               </a:rPr>
               <a:t>●  </a:t>
             </a:r>
@@ -30779,8 +31265,8 @@
                 <a:solidFill>
                   <a:srgbClr val="1F2A24"/>
                 </a:solidFill>
-                <a:latin typeface="Tahoma"/>
-                <a:cs typeface="Tahoma"/>
+                <a:latin typeface="Vazirmatn"/>
+                <a:cs typeface="Vazirmatn"/>
               </a:rPr>
               <a:t>زانوها کمی خم و وزن بدن متعادل باشد</a:t>
             </a:r>
@@ -30802,8 +31288,8 @@
                 <a:solidFill>
                   <a:srgbClr val="2E7D32"/>
                 </a:solidFill>
-                <a:latin typeface="Tahoma"/>
-                <a:cs typeface="Tahoma"/>
+                <a:latin typeface="Vazirmatn"/>
+                <a:cs typeface="Vazirmatn"/>
               </a:rPr>
               <a:t>●  </a:t>
             </a:r>
@@ -30812,8 +31298,8 @@
                 <a:solidFill>
                   <a:srgbClr val="1F2A24"/>
                 </a:solidFill>
-                <a:latin typeface="Tahoma"/>
-                <a:cs typeface="Tahoma"/>
+                <a:latin typeface="Vazirmatn"/>
+                <a:cs typeface="Vazirmatn"/>
               </a:rPr>
               <a:t>پاها پایدار و بدن آزاد و بدون تنش</a:t>
             </a:r>
@@ -30835,8 +31321,8 @@
                 <a:solidFill>
                   <a:srgbClr val="2E7D32"/>
                 </a:solidFill>
-                <a:latin typeface="Tahoma"/>
-                <a:cs typeface="Tahoma"/>
+                <a:latin typeface="Vazirmatn"/>
+                <a:cs typeface="Vazirmatn"/>
               </a:rPr>
               <a:t>●  </a:t>
             </a:r>
@@ -30845,8 +31331,8 @@
                 <a:solidFill>
                   <a:srgbClr val="1F2A24"/>
                 </a:solidFill>
-                <a:latin typeface="Tahoma"/>
-                <a:cs typeface="Tahoma"/>
+                <a:latin typeface="Vazirmatn"/>
+                <a:cs typeface="Vazirmatn"/>
               </a:rPr>
               <a:t>Stance یعنی وضعیت پاها نسبت به توپ</a:t>
             </a:r>
@@ -30868,8 +31354,8 @@
                 <a:solidFill>
                   <a:srgbClr val="2E7D32"/>
                 </a:solidFill>
-                <a:latin typeface="Tahoma"/>
-                <a:cs typeface="Tahoma"/>
+                <a:latin typeface="Vazirmatn"/>
+                <a:cs typeface="Vazirmatn"/>
               </a:rPr>
               <a:t>●  </a:t>
             </a:r>
@@ -30878,8 +31364,8 @@
                 <a:solidFill>
                   <a:srgbClr val="2E7D32"/>
                 </a:solidFill>
-                <a:latin typeface="Tahoma"/>
-                <a:cs typeface="Tahoma"/>
+                <a:latin typeface="Vazirmatn"/>
+                <a:cs typeface="Vazirmatn"/>
               </a:rPr>
               <a:t>اشتباه رایج</a:t>
             </a:r>
@@ -30888,8 +31374,8 @@
                 <a:solidFill>
                   <a:srgbClr val="1F2A24"/>
                 </a:solidFill>
-                <a:latin typeface="Tahoma"/>
-                <a:cs typeface="Tahoma"/>
+                <a:latin typeface="Vazirmatn"/>
+                <a:cs typeface="Vazirmatn"/>
               </a:rPr>
               <a:t>  —  باز کردن بیش از حد پاها برای قدرت</a:t>
             </a:r>
@@ -30911,8 +31397,8 @@
                 <a:solidFill>
                   <a:srgbClr val="2E7D32"/>
                 </a:solidFill>
-                <a:latin typeface="Tahoma"/>
-                <a:cs typeface="Tahoma"/>
+                <a:latin typeface="Vazirmatn"/>
+                <a:cs typeface="Vazirmatn"/>
               </a:rPr>
               <a:t>●  </a:t>
             </a:r>
@@ -30921,8 +31407,8 @@
                 <a:solidFill>
                   <a:srgbClr val="1F2A24"/>
                 </a:solidFill>
-                <a:latin typeface="Tahoma"/>
-                <a:cs typeface="Tahoma"/>
+                <a:latin typeface="Vazirmatn"/>
+                <a:cs typeface="Vazirmatn"/>
               </a:rPr>
               <a:t>یا خشک کردن بدن برای ایجاد نیرو</a:t>
             </a:r>
@@ -31057,8 +31543,8 @@
                 <a:solidFill>
                   <a:srgbClr val="2E7D32"/>
                 </a:solidFill>
-                <a:latin typeface="Tahoma"/>
-                <a:cs typeface="Tahoma"/>
+                <a:latin typeface="Vazirmatn"/>
+                <a:cs typeface="Vazirmatn"/>
               </a:rPr>
               <a:t>نکته مربی:  </a:t>
             </a:r>
@@ -31067,8 +31553,8 @@
                 <a:solidFill>
                   <a:srgbClr val="1F2A24"/>
                 </a:solidFill>
-                <a:latin typeface="Tahoma"/>
-                <a:cs typeface="Tahoma"/>
+                <a:latin typeface="Vazirmatn"/>
+                <a:cs typeface="Vazirmatn"/>
               </a:rPr>
               <a:t>تمرین: بدون کلاب مقابل توپ چند بار Setup تکرار شود تا تکرارپذیری ایجاد شود.</a:t>
             </a:r>
@@ -31084,7 +31570,7 @@
         <p:spPr>
           <a:xfrm>
             <a:off x="502920" y="6400800"/>
-            <a:ext cx="5486400" cy="320040"/>
+            <a:ext cx="6858000" cy="320040"/>
           </a:xfrm>
           <a:prstGeom prst="rect">
             <a:avLst/>
@@ -31109,14 +31595,24 @@
               </a:spcAft>
             </a:pPr>
             <a:r>
+              <a:rPr sz="1100" b="1" i="0">
+                <a:solidFill>
+                  <a:srgbClr val="2E7D32"/>
+                </a:solidFill>
+                <a:latin typeface="Vazirmatn"/>
+                <a:cs typeface="Vazirmatn"/>
+              </a:rPr>
+              <a:t>⛳ Puttclub</a:t>
+            </a:r>
+            <a:r>
               <a:rPr sz="1000" b="0" i="0">
                 <a:solidFill>
                   <a:srgbClr val="5C6B62"/>
                 </a:solidFill>
-                <a:latin typeface="Tahoma"/>
-                <a:cs typeface="Tahoma"/>
-              </a:rPr>
-              <a:t>Golf Academy  ·  Beginner · Level 1</a:t>
+                <a:latin typeface="Vazirmatn"/>
+                <a:cs typeface="Vazirmatn"/>
+              </a:rPr>
+              <a:t>   ·   Beginner · Level 1</a:t>
             </a:r>
           </a:p>
         </p:txBody>
@@ -31159,8 +31655,8 @@
                 <a:solidFill>
                   <a:srgbClr val="2E7D32"/>
                 </a:solidFill>
-                <a:latin typeface="Tahoma"/>
-                <a:cs typeface="Tahoma"/>
+                <a:latin typeface="Vazirmatn"/>
+                <a:cs typeface="Vazirmatn"/>
               </a:rPr>
               <a:t>9</a:t>
             </a:r>
